--- a/output/wordlabs-aud-3day.pptx
+++ b/output/wordlabs-aud-3day.pptx
@@ -6040,7 +6040,7 @@
                 <a:ea typeface="Calibri" pitchFamily="34" charset="-122"/>
                 <a:cs typeface="Calibri" pitchFamily="34" charset="-120"/>
               </a:rPr>
-              <a:t>The </a:t>
+              <a:t>After a successful </a:t>
             </a:r>
             <a:pPr algn="l" indent="0" marL="0">
               <a:buNone/>
@@ -6071,7 +6071,7 @@
                 <a:ea typeface="Calibri" pitchFamily="34" charset="-122"/>
                 <a:cs typeface="Calibri" pitchFamily="34" charset="-120"/>
               </a:rPr>
-              <a:t> was held in the school </a:t>
+              <a:t>, the excited performer waved to the </a:t>
             </a:r>
             <a:pPr algn="l" indent="0" marL="0">
               <a:buNone/>
@@ -6088,7 +6088,7 @@
                 <a:ea typeface="Calibri" pitchFamily="34" charset="-122"/>
                 <a:cs typeface="Calibri" pitchFamily="34" charset="-120"/>
               </a:rPr>
-              <a:t>auditorium</a:t>
+              <a:t>audience</a:t>
             </a:r>
             <a:pPr algn="l" indent="0" marL="0">
               <a:buNone/>
@@ -6102,7 +6102,7 @@
                 <a:ea typeface="Calibri" pitchFamily="34" charset="-122"/>
                 <a:cs typeface="Calibri" pitchFamily="34" charset="-120"/>
               </a:rPr>
-              <a:t>, where every student performed their best.</a:t>
+              <a:t> and beamed with pride.</a:t>
             </a:r>
             <a:endParaRPr lang="en-US" sz="1800" dirty="0"/>
           </a:p>
@@ -6385,7 +6385,7 @@
                 <a:ea typeface="Trebuchet MS" pitchFamily="34" charset="-122"/>
                 <a:cs typeface="Trebuchet MS" pitchFamily="34" charset="-120"/>
               </a:rPr>
-              <a:t>auditorium</a:t>
+              <a:t>audience</a:t>
             </a:r>
             <a:endParaRPr lang="en-US" sz="1400" dirty="0"/>
           </a:p>
@@ -7860,7 +7860,7 @@
                 <a:ea typeface="Calibri" pitchFamily="34" charset="-122"/>
                 <a:cs typeface="Calibri" pitchFamily="34" charset="-120"/>
               </a:rPr>
-              <a:t>hear</a:t>
+              <a:t>hear / listen</a:t>
             </a:r>
             <a:endParaRPr lang="en-US" sz="850" dirty="0"/>
           </a:p>
@@ -7972,7 +7972,7 @@
                 <a:ea typeface="Calibri" pitchFamily="34" charset="-122"/>
                 <a:cs typeface="Calibri" pitchFamily="34" charset="-120"/>
               </a:rPr>
-              <a:t>go, act</a:t>
+              <a:t>go, process</a:t>
             </a:r>
             <a:endParaRPr lang="en-US" sz="850" dirty="0"/>
           </a:p>
@@ -8084,7 +8084,7 @@
                 <a:ea typeface="Calibri" pitchFamily="34" charset="-122"/>
                 <a:cs typeface="Calibri" pitchFamily="34" charset="-120"/>
               </a:rPr>
-              <a:t>action or process</a:t>
+              <a:t>act or result of</a:t>
             </a:r>
             <a:endParaRPr lang="en-US" sz="850" dirty="0"/>
           </a:p>
@@ -8957,7 +8957,7 @@
                 <a:ea typeface="Calibri" pitchFamily="34" charset="-122"/>
                 <a:cs typeface="Calibri" pitchFamily="34" charset="-120"/>
               </a:rPr>
-              <a:t>hear</a:t>
+              <a:t>hear / listen</a:t>
             </a:r>
             <a:endParaRPr lang="en-US" sz="850" dirty="0"/>
           </a:p>
@@ -9069,7 +9069,7 @@
                 <a:ea typeface="Calibri" pitchFamily="34" charset="-122"/>
                 <a:cs typeface="Calibri" pitchFamily="34" charset="-120"/>
               </a:rPr>
-              <a:t>go, act</a:t>
+              <a:t>go, process</a:t>
             </a:r>
             <a:endParaRPr lang="en-US" sz="850" dirty="0"/>
           </a:p>
@@ -9181,7 +9181,7 @@
                 <a:ea typeface="Calibri" pitchFamily="34" charset="-122"/>
                 <a:cs typeface="Calibri" pitchFamily="34" charset="-120"/>
               </a:rPr>
-              <a:t>action or process</a:t>
+              <a:t>act or result of</a:t>
             </a:r>
             <a:endParaRPr lang="en-US" sz="850" dirty="0"/>
           </a:p>
@@ -10291,7 +10291,7 @@
                 <a:ea typeface="Calibri" pitchFamily="34" charset="-122"/>
                 <a:cs typeface="Calibri" pitchFamily="34" charset="-120"/>
               </a:rPr>
-              <a:t>hear</a:t>
+              <a:t>hear / listen</a:t>
             </a:r>
             <a:endParaRPr lang="en-US" sz="850" dirty="0"/>
           </a:p>
@@ -10403,7 +10403,7 @@
                 <a:ea typeface="Calibri" pitchFamily="34" charset="-122"/>
                 <a:cs typeface="Calibri" pitchFamily="34" charset="-120"/>
               </a:rPr>
-              <a:t>go, act</a:t>
+              <a:t>go, process</a:t>
             </a:r>
             <a:endParaRPr lang="en-US" sz="850" dirty="0"/>
           </a:p>
@@ -10515,7 +10515,7 @@
                 <a:ea typeface="Calibri" pitchFamily="34" charset="-122"/>
                 <a:cs typeface="Calibri" pitchFamily="34" charset="-120"/>
               </a:rPr>
-              <a:t>action or process</a:t>
+              <a:t>act or result of</a:t>
             </a:r>
             <a:endParaRPr lang="en-US" sz="850" dirty="0"/>
           </a:p>
@@ -11843,7 +11843,7 @@
                 <a:ea typeface="Trebuchet MS" pitchFamily="34" charset="-122"/>
                 <a:cs typeface="Trebuchet MS" pitchFamily="34" charset="-120"/>
               </a:rPr>
-              <a:t>auditorium</a:t>
+              <a:t>audience</a:t>
             </a:r>
             <a:endParaRPr lang="en-US" sz="2800" dirty="0"/>
           </a:p>
@@ -12670,7 +12670,7 @@
                 <a:ea typeface="Trebuchet MS" pitchFamily="34" charset="-122"/>
                 <a:cs typeface="Trebuchet MS" pitchFamily="34" charset="-120"/>
               </a:rPr>
-              <a:t>auditorium</a:t>
+              <a:t>audience</a:t>
             </a:r>
             <a:endParaRPr lang="en-US" sz="2800" dirty="0"/>
           </a:p>
@@ -12750,8 +12750,8 @@
         </p:nvSpPr>
         <p:spPr>
           <a:xfrm>
-            <a:off x="1989734" y="2258568"/>
-            <a:ext cx="1581912" cy="292608"/>
+            <a:off x="2221992" y="2258568"/>
+            <a:ext cx="1828800" cy="292608"/>
           </a:xfrm>
           <a:prstGeom prst="rect">
             <a:avLst>
@@ -12784,8 +12784,8 @@
         </p:nvSpPr>
         <p:spPr>
           <a:xfrm>
-            <a:off x="1989734" y="2258568"/>
-            <a:ext cx="1581912" cy="292608"/>
+            <a:off x="2221992" y="2258568"/>
+            <a:ext cx="1828800" cy="292608"/>
           </a:xfrm>
           <a:prstGeom prst="rect">
             <a:avLst/>
@@ -12823,8 +12823,8 @@
         </p:nvSpPr>
         <p:spPr>
           <a:xfrm>
-            <a:off x="1989734" y="2569464"/>
-            <a:ext cx="1581912" cy="201168"/>
+            <a:off x="2221992" y="2569464"/>
+            <a:ext cx="1828800" cy="201168"/>
           </a:xfrm>
           <a:prstGeom prst="rect">
             <a:avLst/>
@@ -12848,7 +12848,7 @@
                 <a:ea typeface="Calibri" pitchFamily="34" charset="-122"/>
                 <a:cs typeface="Calibri" pitchFamily="34" charset="-120"/>
               </a:rPr>
-              <a:t>hear</a:t>
+              <a:t>hear / listen</a:t>
             </a:r>
             <a:endParaRPr lang="en-US" sz="850" dirty="0"/>
           </a:p>
@@ -12862,8 +12862,8 @@
         </p:nvSpPr>
         <p:spPr>
           <a:xfrm>
-            <a:off x="3659429" y="2258568"/>
-            <a:ext cx="1581912" cy="292608"/>
+            <a:off x="4370832" y="2258568"/>
+            <a:ext cx="1828800" cy="292608"/>
           </a:xfrm>
           <a:prstGeom prst="rect">
             <a:avLst>
@@ -12896,8 +12896,8 @@
         </p:nvSpPr>
         <p:spPr>
           <a:xfrm>
-            <a:off x="3659429" y="2258568"/>
-            <a:ext cx="1581912" cy="292608"/>
+            <a:off x="4370832" y="2258568"/>
+            <a:ext cx="1828800" cy="292608"/>
           </a:xfrm>
           <a:prstGeom prst="rect">
             <a:avLst/>
@@ -12921,7 +12921,7 @@
                 <a:ea typeface="Trebuchet MS" pitchFamily="34" charset="-122"/>
                 <a:cs typeface="Trebuchet MS" pitchFamily="34" charset="-120"/>
               </a:rPr>
-              <a:t>it</a:t>
+              <a:t>i</a:t>
             </a:r>
             <a:endParaRPr lang="en-US" sz="1300" dirty="0"/>
           </a:p>
@@ -12935,8 +12935,8 @@
         </p:nvSpPr>
         <p:spPr>
           <a:xfrm>
-            <a:off x="3659429" y="2569464"/>
-            <a:ext cx="1581912" cy="201168"/>
+            <a:off x="4370832" y="2569464"/>
+            <a:ext cx="1828800" cy="201168"/>
           </a:xfrm>
           <a:prstGeom prst="rect">
             <a:avLst/>
@@ -12960,7 +12960,7 @@
                 <a:ea typeface="Calibri" pitchFamily="34" charset="-122"/>
                 <a:cs typeface="Calibri" pitchFamily="34" charset="-120"/>
               </a:rPr>
-              <a:t>go, act</a:t>
+              <a:t>connecting vowel</a:t>
             </a:r>
             <a:endParaRPr lang="en-US" sz="850" dirty="0"/>
           </a:p>
@@ -12968,14 +12968,53 @@
       </p:sp>
       <p:sp>
         <p:nvSpPr>
-          <p:cNvPr id="22" name="Shape 20"/>
-          <p:cNvSpPr/>
-          <p:nvPr/>
-        </p:nvSpPr>
-        <p:spPr>
-          <a:xfrm>
-            <a:off x="5329123" y="2258568"/>
-            <a:ext cx="1581912" cy="292608"/>
+          <p:cNvPr id="22" name="Text 20"/>
+          <p:cNvSpPr/>
+          <p:nvPr/>
+        </p:nvSpPr>
+        <p:spPr>
+          <a:xfrm>
+            <a:off x="4370832" y="2752344"/>
+            <a:ext cx="1828800" cy="182880"/>
+          </a:xfrm>
+          <a:prstGeom prst="rect">
+            <a:avLst/>
+          </a:prstGeom>
+          <a:noFill/>
+          <a:ln/>
+        </p:spPr>
+        <p:txBody>
+          <a:bodyPr wrap="square" lIns="0" tIns="0" rIns="0" bIns="0" rtlCol="0" anchor="t"/>
+          <a:lstStyle/>
+          <a:p>
+            <a:pPr algn="ctr" indent="0" marL="0">
+              <a:buNone/>
+            </a:pPr>
+            <a:r>
+              <a:rPr lang="en-US" sz="700" i="1" dirty="0">
+                <a:solidFill>
+                  <a:srgbClr val="94A3B8"/>
+                </a:solidFill>
+                <a:latin typeface="Calibri" pitchFamily="34" charset="0"/>
+                <a:ea typeface="Calibri" pitchFamily="34" charset="-122"/>
+                <a:cs typeface="Calibri" pitchFamily="34" charset="-120"/>
+              </a:rPr>
+              <a:t>links base to suffix</a:t>
+            </a:r>
+            <a:endParaRPr lang="en-US" sz="700" dirty="0"/>
+          </a:p>
+        </p:txBody>
+      </p:sp>
+      <p:sp>
+        <p:nvSpPr>
+          <p:cNvPr id="23" name="Shape 21"/>
+          <p:cNvSpPr/>
+          <p:nvPr/>
+        </p:nvSpPr>
+        <p:spPr>
+          <a:xfrm>
+            <a:off x="6519672" y="2258568"/>
+            <a:ext cx="1828800" cy="292608"/>
           </a:xfrm>
           <a:prstGeom prst="rect">
             <a:avLst>
@@ -13002,14 +13041,14 @@
       </p:sp>
       <p:sp>
         <p:nvSpPr>
-          <p:cNvPr id="23" name="Text 21"/>
-          <p:cNvSpPr/>
-          <p:nvPr/>
-        </p:nvSpPr>
-        <p:spPr>
-          <a:xfrm>
-            <a:off x="5329123" y="2258568"/>
-            <a:ext cx="1581912" cy="292608"/>
+          <p:cNvPr id="24" name="Text 22"/>
+          <p:cNvSpPr/>
+          <p:nvPr/>
+        </p:nvSpPr>
+        <p:spPr>
+          <a:xfrm>
+            <a:off x="6519672" y="2258568"/>
+            <a:ext cx="1828800" cy="292608"/>
           </a:xfrm>
           <a:prstGeom prst="rect">
             <a:avLst/>
@@ -13033,7 +13072,7 @@
                 <a:ea typeface="Trebuchet MS" pitchFamily="34" charset="-122"/>
                 <a:cs typeface="Trebuchet MS" pitchFamily="34" charset="-120"/>
               </a:rPr>
-              <a:t>or</a:t>
+              <a:t>ence</a:t>
             </a:r>
             <a:endParaRPr lang="en-US" sz="1300" dirty="0"/>
           </a:p>
@@ -13041,14 +13080,14 @@
       </p:sp>
       <p:sp>
         <p:nvSpPr>
-          <p:cNvPr id="24" name="Text 22"/>
-          <p:cNvSpPr/>
-          <p:nvPr/>
-        </p:nvSpPr>
-        <p:spPr>
-          <a:xfrm>
-            <a:off x="5329123" y="2569464"/>
-            <a:ext cx="1581912" cy="201168"/>
+          <p:cNvPr id="25" name="Text 23"/>
+          <p:cNvSpPr/>
+          <p:nvPr/>
+        </p:nvSpPr>
+        <p:spPr>
+          <a:xfrm>
+            <a:off x="6519672" y="2569464"/>
+            <a:ext cx="1828800" cy="201168"/>
           </a:xfrm>
           <a:prstGeom prst="rect">
             <a:avLst/>
@@ -13072,7 +13111,7 @@
                 <a:ea typeface="Calibri" pitchFamily="34" charset="-122"/>
                 <a:cs typeface="Calibri" pitchFamily="34" charset="-120"/>
               </a:rPr>
-              <a:t>one who</a:t>
+              <a:t>state or quality of</a:t>
             </a:r>
             <a:endParaRPr lang="en-US" sz="850" dirty="0"/>
           </a:p>
@@ -13080,130 +13119,150 @@
       </p:sp>
       <p:sp>
         <p:nvSpPr>
-          <p:cNvPr id="25" name="Shape 23"/>
-          <p:cNvSpPr/>
-          <p:nvPr/>
-        </p:nvSpPr>
-        <p:spPr>
-          <a:xfrm>
-            <a:off x="6998818" y="2258568"/>
-            <a:ext cx="1581912" cy="292608"/>
+          <p:cNvPr id="26" name="Shape 24"/>
+          <p:cNvSpPr/>
+          <p:nvPr/>
+        </p:nvSpPr>
+        <p:spPr>
+          <a:xfrm>
+            <a:off x="365760" y="3273552"/>
+            <a:ext cx="1371600" cy="658368"/>
           </a:xfrm>
           <a:prstGeom prst="rect">
             <a:avLst>
-              <a:gd name="adj" fmla="val 25000"/>
+              <a:gd name="adj" fmla="val 8333"/>
             </a:avLst>
           </a:prstGeom>
           <a:solidFill>
-            <a:srgbClr val="FCE7F3"/>
-          </a:solidFill>
-          <a:ln w="19050">
-            <a:solidFill>
-              <a:srgbClr val="DB2777"/>
-            </a:solidFill>
-            <a:prstDash val="solid"/>
-          </a:ln>
-          <a:effectLst>
-            <a:outerShdw sx="100000" sy="100000" kx="0" ky="0" algn="bl" rotWithShape="0" blurRad="101600" dist="38100" dir="8100000">
-              <a:srgbClr val="000000">
-                <a:alpha val="12000"/>
-              </a:srgbClr>
-            </a:outerShdw>
-          </a:effectLst>
-        </p:spPr>
-      </p:sp>
-      <p:sp>
-        <p:nvSpPr>
-          <p:cNvPr id="26" name="Text 24"/>
-          <p:cNvSpPr/>
-          <p:nvPr/>
-        </p:nvSpPr>
-        <p:spPr>
-          <a:xfrm>
-            <a:off x="6998818" y="2258568"/>
-            <a:ext cx="1581912" cy="292608"/>
-          </a:xfrm>
-          <a:prstGeom prst="rect">
-            <a:avLst/>
-          </a:prstGeom>
-          <a:noFill/>
-          <a:ln/>
-        </p:spPr>
-        <p:txBody>
-          <a:bodyPr wrap="square" lIns="0" tIns="0" rIns="0" bIns="0" rtlCol="0" anchor="ctr"/>
-          <a:lstStyle/>
-          <a:p>
-            <a:pPr algn="ctr" indent="0" marL="0">
-              <a:buNone/>
-            </a:pPr>
-            <a:r>
-              <a:rPr lang="en-US" sz="1300" b="1" dirty="0">
-                <a:solidFill>
-                  <a:srgbClr val="9D174D"/>
+            <a:srgbClr val="E2E8F0"/>
+          </a:solidFill>
+          <a:ln w="12700">
+            <a:solidFill>
+              <a:srgbClr val="E2E8F0"/>
+            </a:solidFill>
+            <a:prstDash val="solid"/>
+          </a:ln>
+        </p:spPr>
+      </p:sp>
+      <p:sp>
+        <p:nvSpPr>
+          <p:cNvPr id="27" name="Text 25"/>
+          <p:cNvSpPr/>
+          <p:nvPr/>
+        </p:nvSpPr>
+        <p:spPr>
+          <a:xfrm>
+            <a:off x="365760" y="3273552"/>
+            <a:ext cx="1371600" cy="658368"/>
+          </a:xfrm>
+          <a:prstGeom prst="rect">
+            <a:avLst/>
+          </a:prstGeom>
+          <a:noFill/>
+          <a:ln/>
+        </p:spPr>
+        <p:txBody>
+          <a:bodyPr wrap="square" lIns="0" tIns="0" rIns="0" bIns="0" rtlCol="0" anchor="ctr"/>
+          <a:lstStyle/>
+          <a:p>
+            <a:pPr algn="ctr" indent="0" marL="0">
+              <a:buNone/>
+            </a:pPr>
+            <a:r>
+              <a:rPr lang="en-US" sz="1100" b="1" dirty="0">
+                <a:solidFill>
+                  <a:srgbClr val="475569"/>
                 </a:solidFill>
                 <a:latin typeface="Trebuchet MS" pitchFamily="34" charset="0"/>
                 <a:ea typeface="Trebuchet MS" pitchFamily="34" charset="-122"/>
                 <a:cs typeface="Trebuchet MS" pitchFamily="34" charset="-120"/>
               </a:rPr>
-              <a:t>ium</a:t>
-            </a:r>
-            <a:endParaRPr lang="en-US" sz="1300" dirty="0"/>
-          </a:p>
-        </p:txBody>
-      </p:sp>
-      <p:sp>
-        <p:nvSpPr>
-          <p:cNvPr id="27" name="Text 25"/>
-          <p:cNvSpPr/>
-          <p:nvPr/>
-        </p:nvSpPr>
-        <p:spPr>
-          <a:xfrm>
-            <a:off x="6998818" y="2569464"/>
-            <a:ext cx="1581912" cy="201168"/>
-          </a:xfrm>
-          <a:prstGeom prst="rect">
-            <a:avLst/>
-          </a:prstGeom>
-          <a:noFill/>
-          <a:ln/>
-        </p:spPr>
-        <p:txBody>
-          <a:bodyPr wrap="square" lIns="0" tIns="0" rIns="0" bIns="0" rtlCol="0" anchor="t"/>
-          <a:lstStyle/>
-          <a:p>
-            <a:pPr algn="ctr" indent="0" marL="0">
-              <a:buNone/>
-            </a:pPr>
-            <a:r>
-              <a:rPr lang="en-US" sz="850" dirty="0">
-                <a:solidFill>
-                  <a:srgbClr val="475569"/>
+              <a:t>Syllables</a:t>
+            </a:r>
+            <a:endParaRPr lang="en-US" sz="1100" dirty="0"/>
+          </a:p>
+        </p:txBody>
+      </p:sp>
+      <p:sp>
+        <p:nvSpPr>
+          <p:cNvPr id="28" name="Shape 26"/>
+          <p:cNvSpPr/>
+          <p:nvPr/>
+        </p:nvSpPr>
+        <p:spPr>
+          <a:xfrm>
+            <a:off x="1874520" y="3273552"/>
+            <a:ext cx="6903720" cy="658368"/>
+          </a:xfrm>
+          <a:prstGeom prst="rect">
+            <a:avLst>
+              <a:gd name="adj" fmla="val 8333"/>
+            </a:avLst>
+          </a:prstGeom>
+          <a:solidFill>
+            <a:srgbClr val="F8FAFC"/>
+          </a:solidFill>
+          <a:ln w="12700">
+            <a:solidFill>
+              <a:srgbClr val="E2E8F0"/>
+            </a:solidFill>
+            <a:prstDash val="dash"/>
+          </a:ln>
+        </p:spPr>
+      </p:sp>
+      <p:sp>
+        <p:nvSpPr>
+          <p:cNvPr id="29" name="Text 27"/>
+          <p:cNvSpPr/>
+          <p:nvPr/>
+        </p:nvSpPr>
+        <p:spPr>
+          <a:xfrm>
+            <a:off x="1874520" y="3273552"/>
+            <a:ext cx="6903720" cy="658368"/>
+          </a:xfrm>
+          <a:prstGeom prst="rect">
+            <a:avLst/>
+          </a:prstGeom>
+          <a:noFill/>
+          <a:ln/>
+        </p:spPr>
+        <p:txBody>
+          <a:bodyPr wrap="square" rtlCol="0" anchor="ctr"/>
+          <a:lstStyle/>
+          <a:p>
+            <a:pPr algn="ctr" indent="0" marL="0">
+              <a:buNone/>
+            </a:pPr>
+            <a:r>
+              <a:rPr lang="en-US" sz="1100" i="1" dirty="0">
+                <a:solidFill>
+                  <a:srgbClr val="CBD5E1"/>
                 </a:solidFill>
                 <a:latin typeface="Calibri" pitchFamily="34" charset="0"/>
                 <a:ea typeface="Calibri" pitchFamily="34" charset="-122"/>
                 <a:cs typeface="Calibri" pitchFamily="34" charset="-120"/>
               </a:rPr>
-              <a:t>place or space</a:t>
-            </a:r>
-            <a:endParaRPr lang="en-US" sz="850" dirty="0"/>
-          </a:p>
-        </p:txBody>
-      </p:sp>
-      <p:sp>
-        <p:nvSpPr>
-          <p:cNvPr id="28" name="Shape 26"/>
-          <p:cNvSpPr/>
-          <p:nvPr/>
-        </p:nvSpPr>
-        <p:spPr>
-          <a:xfrm>
-            <a:off x="365760" y="3273552"/>
-            <a:ext cx="1371600" cy="658368"/>
+              <a:t>Write here...</a:t>
+            </a:r>
+            <a:endParaRPr lang="en-US" sz="1100" dirty="0"/>
+          </a:p>
+        </p:txBody>
+      </p:sp>
+      <p:sp>
+        <p:nvSpPr>
+          <p:cNvPr id="30" name="Shape 28"/>
+          <p:cNvSpPr/>
+          <p:nvPr/>
+        </p:nvSpPr>
+        <p:spPr>
+          <a:xfrm>
+            <a:off x="365760" y="4096512"/>
+            <a:ext cx="1371600" cy="804672"/>
           </a:xfrm>
           <a:prstGeom prst="rect">
             <a:avLst>
-              <a:gd name="adj" fmla="val 8333"/>
+              <a:gd name="adj" fmla="val 6818"/>
             </a:avLst>
           </a:prstGeom>
           <a:solidFill>
@@ -13219,14 +13278,14 @@
       </p:sp>
       <p:sp>
         <p:nvSpPr>
-          <p:cNvPr id="29" name="Text 27"/>
-          <p:cNvSpPr/>
-          <p:nvPr/>
-        </p:nvSpPr>
-        <p:spPr>
-          <a:xfrm>
-            <a:off x="365760" y="3273552"/>
-            <a:ext cx="1371600" cy="658368"/>
+          <p:cNvPr id="31" name="Text 29"/>
+          <p:cNvSpPr/>
+          <p:nvPr/>
+        </p:nvSpPr>
+        <p:spPr>
+          <a:xfrm>
+            <a:off x="365760" y="4096512"/>
+            <a:ext cx="1371600" cy="804672"/>
           </a:xfrm>
           <a:prstGeom prst="rect">
             <a:avLst/>
@@ -13250,7 +13309,7 @@
                 <a:ea typeface="Trebuchet MS" pitchFamily="34" charset="-122"/>
                 <a:cs typeface="Trebuchet MS" pitchFamily="34" charset="-120"/>
               </a:rPr>
-              <a:t>Syllables</a:t>
+              <a:t>Phonemes</a:t>
             </a:r>
             <a:endParaRPr lang="en-US" sz="1100" dirty="0"/>
           </a:p>
@@ -13258,80 +13317,14 @@
       </p:sp>
       <p:sp>
         <p:nvSpPr>
-          <p:cNvPr id="30" name="Shape 28"/>
-          <p:cNvSpPr/>
-          <p:nvPr/>
-        </p:nvSpPr>
-        <p:spPr>
-          <a:xfrm>
-            <a:off x="1874520" y="3273552"/>
-            <a:ext cx="6903720" cy="658368"/>
-          </a:xfrm>
-          <a:prstGeom prst="rect">
-            <a:avLst>
-              <a:gd name="adj" fmla="val 8333"/>
-            </a:avLst>
-          </a:prstGeom>
-          <a:solidFill>
-            <a:srgbClr val="F8FAFC"/>
-          </a:solidFill>
-          <a:ln w="12700">
-            <a:solidFill>
-              <a:srgbClr val="E2E8F0"/>
-            </a:solidFill>
-            <a:prstDash val="dash"/>
-          </a:ln>
-        </p:spPr>
-      </p:sp>
-      <p:sp>
-        <p:nvSpPr>
-          <p:cNvPr id="31" name="Text 29"/>
-          <p:cNvSpPr/>
-          <p:nvPr/>
-        </p:nvSpPr>
-        <p:spPr>
-          <a:xfrm>
-            <a:off x="1874520" y="3273552"/>
-            <a:ext cx="6903720" cy="658368"/>
-          </a:xfrm>
-          <a:prstGeom prst="rect">
-            <a:avLst/>
-          </a:prstGeom>
-          <a:noFill/>
-          <a:ln/>
-        </p:spPr>
-        <p:txBody>
-          <a:bodyPr wrap="square" rtlCol="0" anchor="ctr"/>
-          <a:lstStyle/>
-          <a:p>
-            <a:pPr algn="ctr" indent="0" marL="0">
-              <a:buNone/>
-            </a:pPr>
-            <a:r>
-              <a:rPr lang="en-US" sz="1100" i="1" dirty="0">
-                <a:solidFill>
-                  <a:srgbClr val="CBD5E1"/>
-                </a:solidFill>
-                <a:latin typeface="Calibri" pitchFamily="34" charset="0"/>
-                <a:ea typeface="Calibri" pitchFamily="34" charset="-122"/>
-                <a:cs typeface="Calibri" pitchFamily="34" charset="-120"/>
-              </a:rPr>
-              <a:t>Write here...</a:t>
-            </a:r>
-            <a:endParaRPr lang="en-US" sz="1100" dirty="0"/>
-          </a:p>
-        </p:txBody>
-      </p:sp>
-      <p:sp>
-        <p:nvSpPr>
           <p:cNvPr id="32" name="Shape 30"/>
           <p:cNvSpPr/>
           <p:nvPr/>
         </p:nvSpPr>
         <p:spPr>
           <a:xfrm>
-            <a:off x="365760" y="4096512"/>
-            <a:ext cx="1371600" cy="804672"/>
+            <a:off x="1874520" y="4096512"/>
+            <a:ext cx="6903720" cy="804672"/>
           </a:xfrm>
           <a:prstGeom prst="rect">
             <a:avLst>
@@ -13339,85 +13332,19 @@
             </a:avLst>
           </a:prstGeom>
           <a:solidFill>
-            <a:srgbClr val="E2E8F0"/>
+            <a:srgbClr val="F8FAFC"/>
           </a:solidFill>
           <a:ln w="12700">
             <a:solidFill>
               <a:srgbClr val="E2E8F0"/>
             </a:solidFill>
-            <a:prstDash val="solid"/>
+            <a:prstDash val="dash"/>
           </a:ln>
         </p:spPr>
       </p:sp>
       <p:sp>
         <p:nvSpPr>
           <p:cNvPr id="33" name="Text 31"/>
-          <p:cNvSpPr/>
-          <p:nvPr/>
-        </p:nvSpPr>
-        <p:spPr>
-          <a:xfrm>
-            <a:off x="365760" y="4096512"/>
-            <a:ext cx="1371600" cy="804672"/>
-          </a:xfrm>
-          <a:prstGeom prst="rect">
-            <a:avLst/>
-          </a:prstGeom>
-          <a:noFill/>
-          <a:ln/>
-        </p:spPr>
-        <p:txBody>
-          <a:bodyPr wrap="square" lIns="0" tIns="0" rIns="0" bIns="0" rtlCol="0" anchor="ctr"/>
-          <a:lstStyle/>
-          <a:p>
-            <a:pPr algn="ctr" indent="0" marL="0">
-              <a:buNone/>
-            </a:pPr>
-            <a:r>
-              <a:rPr lang="en-US" sz="1100" b="1" dirty="0">
-                <a:solidFill>
-                  <a:srgbClr val="475569"/>
-                </a:solidFill>
-                <a:latin typeface="Trebuchet MS" pitchFamily="34" charset="0"/>
-                <a:ea typeface="Trebuchet MS" pitchFamily="34" charset="-122"/>
-                <a:cs typeface="Trebuchet MS" pitchFamily="34" charset="-120"/>
-              </a:rPr>
-              <a:t>Phonemes</a:t>
-            </a:r>
-            <a:endParaRPr lang="en-US" sz="1100" dirty="0"/>
-          </a:p>
-        </p:txBody>
-      </p:sp>
-      <p:sp>
-        <p:nvSpPr>
-          <p:cNvPr id="34" name="Shape 32"/>
-          <p:cNvSpPr/>
-          <p:nvPr/>
-        </p:nvSpPr>
-        <p:spPr>
-          <a:xfrm>
-            <a:off x="1874520" y="4096512"/>
-            <a:ext cx="6903720" cy="804672"/>
-          </a:xfrm>
-          <a:prstGeom prst="rect">
-            <a:avLst>
-              <a:gd name="adj" fmla="val 6818"/>
-            </a:avLst>
-          </a:prstGeom>
-          <a:solidFill>
-            <a:srgbClr val="F8FAFC"/>
-          </a:solidFill>
-          <a:ln w="12700">
-            <a:solidFill>
-              <a:srgbClr val="E2E8F0"/>
-            </a:solidFill>
-            <a:prstDash val="dash"/>
-          </a:ln>
-        </p:spPr>
-      </p:sp>
-      <p:sp>
-        <p:nvSpPr>
-          <p:cNvPr id="35" name="Text 33"/>
           <p:cNvSpPr/>
           <p:nvPr/>
         </p:nvSpPr>
@@ -13879,7 +13806,7 @@
                 <a:ea typeface="Trebuchet MS" pitchFamily="34" charset="-122"/>
                 <a:cs typeface="Trebuchet MS" pitchFamily="34" charset="-120"/>
               </a:rPr>
-              <a:t>auditorium</a:t>
+              <a:t>audience</a:t>
             </a:r>
             <a:endParaRPr lang="en-US" sz="2800" dirty="0"/>
           </a:p>
@@ -13959,8 +13886,8 @@
         </p:nvSpPr>
         <p:spPr>
           <a:xfrm>
-            <a:off x="1989734" y="2258568"/>
-            <a:ext cx="1581912" cy="292608"/>
+            <a:off x="2221992" y="2258568"/>
+            <a:ext cx="1828800" cy="292608"/>
           </a:xfrm>
           <a:prstGeom prst="rect">
             <a:avLst>
@@ -13993,8 +13920,8 @@
         </p:nvSpPr>
         <p:spPr>
           <a:xfrm>
-            <a:off x="1989734" y="2258568"/>
-            <a:ext cx="1581912" cy="292608"/>
+            <a:off x="2221992" y="2258568"/>
+            <a:ext cx="1828800" cy="292608"/>
           </a:xfrm>
           <a:prstGeom prst="rect">
             <a:avLst/>
@@ -14032,8 +13959,8 @@
         </p:nvSpPr>
         <p:spPr>
           <a:xfrm>
-            <a:off x="1989734" y="2569464"/>
-            <a:ext cx="1581912" cy="201168"/>
+            <a:off x="2221992" y="2569464"/>
+            <a:ext cx="1828800" cy="201168"/>
           </a:xfrm>
           <a:prstGeom prst="rect">
             <a:avLst/>
@@ -14057,7 +13984,7 @@
                 <a:ea typeface="Calibri" pitchFamily="34" charset="-122"/>
                 <a:cs typeface="Calibri" pitchFamily="34" charset="-120"/>
               </a:rPr>
-              <a:t>hear</a:t>
+              <a:t>hear / listen</a:t>
             </a:r>
             <a:endParaRPr lang="en-US" sz="850" dirty="0"/>
           </a:p>
@@ -14071,8 +13998,8 @@
         </p:nvSpPr>
         <p:spPr>
           <a:xfrm>
-            <a:off x="3659429" y="2258568"/>
-            <a:ext cx="1581912" cy="292608"/>
+            <a:off x="4370832" y="2258568"/>
+            <a:ext cx="1828800" cy="292608"/>
           </a:xfrm>
           <a:prstGeom prst="rect">
             <a:avLst>
@@ -14105,8 +14032,8 @@
         </p:nvSpPr>
         <p:spPr>
           <a:xfrm>
-            <a:off x="3659429" y="2258568"/>
-            <a:ext cx="1581912" cy="292608"/>
+            <a:off x="4370832" y="2258568"/>
+            <a:ext cx="1828800" cy="292608"/>
           </a:xfrm>
           <a:prstGeom prst="rect">
             <a:avLst/>
@@ -14130,7 +14057,7 @@
                 <a:ea typeface="Trebuchet MS" pitchFamily="34" charset="-122"/>
                 <a:cs typeface="Trebuchet MS" pitchFamily="34" charset="-120"/>
               </a:rPr>
-              <a:t>it</a:t>
+              <a:t>i</a:t>
             </a:r>
             <a:endParaRPr lang="en-US" sz="1300" dirty="0"/>
           </a:p>
@@ -14144,8 +14071,8 @@
         </p:nvSpPr>
         <p:spPr>
           <a:xfrm>
-            <a:off x="3659429" y="2569464"/>
-            <a:ext cx="1581912" cy="201168"/>
+            <a:off x="4370832" y="2569464"/>
+            <a:ext cx="1828800" cy="201168"/>
           </a:xfrm>
           <a:prstGeom prst="rect">
             <a:avLst/>
@@ -14169,7 +14096,7 @@
                 <a:ea typeface="Calibri" pitchFamily="34" charset="-122"/>
                 <a:cs typeface="Calibri" pitchFamily="34" charset="-120"/>
               </a:rPr>
-              <a:t>go, act</a:t>
+              <a:t>connecting vowel</a:t>
             </a:r>
             <a:endParaRPr lang="en-US" sz="850" dirty="0"/>
           </a:p>
@@ -14177,14 +14104,53 @@
       </p:sp>
       <p:sp>
         <p:nvSpPr>
-          <p:cNvPr id="22" name="Shape 20"/>
-          <p:cNvSpPr/>
-          <p:nvPr/>
-        </p:nvSpPr>
-        <p:spPr>
-          <a:xfrm>
-            <a:off x="5329123" y="2258568"/>
-            <a:ext cx="1581912" cy="292608"/>
+          <p:cNvPr id="22" name="Text 20"/>
+          <p:cNvSpPr/>
+          <p:nvPr/>
+        </p:nvSpPr>
+        <p:spPr>
+          <a:xfrm>
+            <a:off x="4370832" y="2752344"/>
+            <a:ext cx="1828800" cy="182880"/>
+          </a:xfrm>
+          <a:prstGeom prst="rect">
+            <a:avLst/>
+          </a:prstGeom>
+          <a:noFill/>
+          <a:ln/>
+        </p:spPr>
+        <p:txBody>
+          <a:bodyPr wrap="square" lIns="0" tIns="0" rIns="0" bIns="0" rtlCol="0" anchor="t"/>
+          <a:lstStyle/>
+          <a:p>
+            <a:pPr algn="ctr" indent="0" marL="0">
+              <a:buNone/>
+            </a:pPr>
+            <a:r>
+              <a:rPr lang="en-US" sz="700" i="1" dirty="0">
+                <a:solidFill>
+                  <a:srgbClr val="94A3B8"/>
+                </a:solidFill>
+                <a:latin typeface="Calibri" pitchFamily="34" charset="0"/>
+                <a:ea typeface="Calibri" pitchFamily="34" charset="-122"/>
+                <a:cs typeface="Calibri" pitchFamily="34" charset="-120"/>
+              </a:rPr>
+              <a:t>links base to suffix</a:t>
+            </a:r>
+            <a:endParaRPr lang="en-US" sz="700" dirty="0"/>
+          </a:p>
+        </p:txBody>
+      </p:sp>
+      <p:sp>
+        <p:nvSpPr>
+          <p:cNvPr id="23" name="Shape 21"/>
+          <p:cNvSpPr/>
+          <p:nvPr/>
+        </p:nvSpPr>
+        <p:spPr>
+          <a:xfrm>
+            <a:off x="6519672" y="2258568"/>
+            <a:ext cx="1828800" cy="292608"/>
           </a:xfrm>
           <a:prstGeom prst="rect">
             <a:avLst>
@@ -14211,14 +14177,14 @@
       </p:sp>
       <p:sp>
         <p:nvSpPr>
-          <p:cNvPr id="23" name="Text 21"/>
-          <p:cNvSpPr/>
-          <p:nvPr/>
-        </p:nvSpPr>
-        <p:spPr>
-          <a:xfrm>
-            <a:off x="5329123" y="2258568"/>
-            <a:ext cx="1581912" cy="292608"/>
+          <p:cNvPr id="24" name="Text 22"/>
+          <p:cNvSpPr/>
+          <p:nvPr/>
+        </p:nvSpPr>
+        <p:spPr>
+          <a:xfrm>
+            <a:off x="6519672" y="2258568"/>
+            <a:ext cx="1828800" cy="292608"/>
           </a:xfrm>
           <a:prstGeom prst="rect">
             <a:avLst/>
@@ -14242,7 +14208,7 @@
                 <a:ea typeface="Trebuchet MS" pitchFamily="34" charset="-122"/>
                 <a:cs typeface="Trebuchet MS" pitchFamily="34" charset="-120"/>
               </a:rPr>
-              <a:t>or</a:t>
+              <a:t>ence</a:t>
             </a:r>
             <a:endParaRPr lang="en-US" sz="1300" dirty="0"/>
           </a:p>
@@ -14250,14 +14216,14 @@
       </p:sp>
       <p:sp>
         <p:nvSpPr>
-          <p:cNvPr id="24" name="Text 22"/>
-          <p:cNvSpPr/>
-          <p:nvPr/>
-        </p:nvSpPr>
-        <p:spPr>
-          <a:xfrm>
-            <a:off x="5329123" y="2569464"/>
-            <a:ext cx="1581912" cy="201168"/>
+          <p:cNvPr id="25" name="Text 23"/>
+          <p:cNvSpPr/>
+          <p:nvPr/>
+        </p:nvSpPr>
+        <p:spPr>
+          <a:xfrm>
+            <a:off x="6519672" y="2569464"/>
+            <a:ext cx="1828800" cy="201168"/>
           </a:xfrm>
           <a:prstGeom prst="rect">
             <a:avLst/>
@@ -14281,7 +14247,7 @@
                 <a:ea typeface="Calibri" pitchFamily="34" charset="-122"/>
                 <a:cs typeface="Calibri" pitchFamily="34" charset="-120"/>
               </a:rPr>
-              <a:t>one who</a:t>
+              <a:t>state or quality of</a:t>
             </a:r>
             <a:endParaRPr lang="en-US" sz="850" dirty="0"/>
           </a:p>
@@ -14289,113 +14255,67 @@
       </p:sp>
       <p:sp>
         <p:nvSpPr>
-          <p:cNvPr id="25" name="Shape 23"/>
-          <p:cNvSpPr/>
-          <p:nvPr/>
-        </p:nvSpPr>
-        <p:spPr>
-          <a:xfrm>
-            <a:off x="6998818" y="2258568"/>
-            <a:ext cx="1581912" cy="292608"/>
+          <p:cNvPr id="26" name="Shape 24"/>
+          <p:cNvSpPr/>
+          <p:nvPr/>
+        </p:nvSpPr>
+        <p:spPr>
+          <a:xfrm>
+            <a:off x="365760" y="3273552"/>
+            <a:ext cx="1371600" cy="658368"/>
           </a:xfrm>
           <a:prstGeom prst="rect">
             <a:avLst>
-              <a:gd name="adj" fmla="val 25000"/>
+              <a:gd name="adj" fmla="val 8333"/>
             </a:avLst>
           </a:prstGeom>
           <a:solidFill>
-            <a:srgbClr val="FCE7F3"/>
-          </a:solidFill>
-          <a:ln w="19050">
-            <a:solidFill>
-              <a:srgbClr val="DB2777"/>
-            </a:solidFill>
-            <a:prstDash val="solid"/>
-          </a:ln>
-          <a:effectLst>
-            <a:outerShdw sx="100000" sy="100000" kx="0" ky="0" algn="bl" rotWithShape="0" blurRad="101600" dist="38100" dir="8100000">
-              <a:srgbClr val="000000">
-                <a:alpha val="12000"/>
-              </a:srgbClr>
-            </a:outerShdw>
-          </a:effectLst>
-        </p:spPr>
-      </p:sp>
-      <p:sp>
-        <p:nvSpPr>
-          <p:cNvPr id="26" name="Text 24"/>
-          <p:cNvSpPr/>
-          <p:nvPr/>
-        </p:nvSpPr>
-        <p:spPr>
-          <a:xfrm>
-            <a:off x="6998818" y="2258568"/>
-            <a:ext cx="1581912" cy="292608"/>
-          </a:xfrm>
-          <a:prstGeom prst="rect">
-            <a:avLst/>
-          </a:prstGeom>
-          <a:noFill/>
-          <a:ln/>
-        </p:spPr>
-        <p:txBody>
-          <a:bodyPr wrap="square" lIns="0" tIns="0" rIns="0" bIns="0" rtlCol="0" anchor="ctr"/>
-          <a:lstStyle/>
-          <a:p>
-            <a:pPr algn="ctr" indent="0" marL="0">
-              <a:buNone/>
-            </a:pPr>
-            <a:r>
-              <a:rPr lang="en-US" sz="1300" b="1" dirty="0">
-                <a:solidFill>
-                  <a:srgbClr val="9D174D"/>
+            <a:srgbClr val="E2E8F0"/>
+          </a:solidFill>
+          <a:ln w="12700">
+            <a:solidFill>
+              <a:srgbClr val="E2E8F0"/>
+            </a:solidFill>
+            <a:prstDash val="solid"/>
+          </a:ln>
+        </p:spPr>
+      </p:sp>
+      <p:sp>
+        <p:nvSpPr>
+          <p:cNvPr id="27" name="Text 25"/>
+          <p:cNvSpPr/>
+          <p:nvPr/>
+        </p:nvSpPr>
+        <p:spPr>
+          <a:xfrm>
+            <a:off x="365760" y="3273552"/>
+            <a:ext cx="1371600" cy="658368"/>
+          </a:xfrm>
+          <a:prstGeom prst="rect">
+            <a:avLst/>
+          </a:prstGeom>
+          <a:noFill/>
+          <a:ln/>
+        </p:spPr>
+        <p:txBody>
+          <a:bodyPr wrap="square" lIns="0" tIns="0" rIns="0" bIns="0" rtlCol="0" anchor="ctr"/>
+          <a:lstStyle/>
+          <a:p>
+            <a:pPr algn="ctr" indent="0" marL="0">
+              <a:buNone/>
+            </a:pPr>
+            <a:r>
+              <a:rPr lang="en-US" sz="1100" b="1" dirty="0">
+                <a:solidFill>
+                  <a:srgbClr val="475569"/>
                 </a:solidFill>
                 <a:latin typeface="Trebuchet MS" pitchFamily="34" charset="0"/>
                 <a:ea typeface="Trebuchet MS" pitchFamily="34" charset="-122"/>
                 <a:cs typeface="Trebuchet MS" pitchFamily="34" charset="-120"/>
               </a:rPr>
-              <a:t>ium</a:t>
-            </a:r>
-            <a:endParaRPr lang="en-US" sz="1300" dirty="0"/>
-          </a:p>
-        </p:txBody>
-      </p:sp>
-      <p:sp>
-        <p:nvSpPr>
-          <p:cNvPr id="27" name="Text 25"/>
-          <p:cNvSpPr/>
-          <p:nvPr/>
-        </p:nvSpPr>
-        <p:spPr>
-          <a:xfrm>
-            <a:off x="6998818" y="2569464"/>
-            <a:ext cx="1581912" cy="201168"/>
-          </a:xfrm>
-          <a:prstGeom prst="rect">
-            <a:avLst/>
-          </a:prstGeom>
-          <a:noFill/>
-          <a:ln/>
-        </p:spPr>
-        <p:txBody>
-          <a:bodyPr wrap="square" lIns="0" tIns="0" rIns="0" bIns="0" rtlCol="0" anchor="t"/>
-          <a:lstStyle/>
-          <a:p>
-            <a:pPr algn="ctr" indent="0" marL="0">
-              <a:buNone/>
-            </a:pPr>
-            <a:r>
-              <a:rPr lang="en-US" sz="850" dirty="0">
-                <a:solidFill>
-                  <a:srgbClr val="475569"/>
-                </a:solidFill>
-                <a:latin typeface="Calibri" pitchFamily="34" charset="0"/>
-                <a:ea typeface="Calibri" pitchFamily="34" charset="-122"/>
-                <a:cs typeface="Calibri" pitchFamily="34" charset="-120"/>
-              </a:rPr>
-              <a:t>place or space</a:t>
-            </a:r>
-            <a:endParaRPr lang="en-US" sz="850" dirty="0"/>
+              <a:t>Syllables</a:t>
+            </a:r>
+            <a:endParaRPr lang="en-US" sz="1100" dirty="0"/>
           </a:p>
         </p:txBody>
       </p:sp>
@@ -14407,8 +14327,8 @@
         </p:nvSpPr>
         <p:spPr>
           <a:xfrm>
-            <a:off x="365760" y="3273552"/>
-            <a:ext cx="1371600" cy="658368"/>
+            <a:off x="1874520" y="3273552"/>
+            <a:ext cx="6903720" cy="658368"/>
           </a:xfrm>
           <a:prstGeom prst="rect">
             <a:avLst>
@@ -14416,92 +14336,131 @@
             </a:avLst>
           </a:prstGeom>
           <a:solidFill>
-            <a:srgbClr val="E2E8F0"/>
-          </a:solidFill>
-          <a:ln w="12700">
-            <a:solidFill>
-              <a:srgbClr val="E2E8F0"/>
-            </a:solidFill>
-            <a:prstDash val="solid"/>
-          </a:ln>
-        </p:spPr>
-      </p:sp>
-      <p:sp>
-        <p:nvSpPr>
-          <p:cNvPr id="29" name="Text 27"/>
-          <p:cNvSpPr/>
-          <p:nvPr/>
-        </p:nvSpPr>
-        <p:spPr>
-          <a:xfrm>
-            <a:off x="365760" y="3273552"/>
-            <a:ext cx="1371600" cy="658368"/>
-          </a:xfrm>
-          <a:prstGeom prst="rect">
-            <a:avLst/>
-          </a:prstGeom>
-          <a:noFill/>
-          <a:ln/>
-        </p:spPr>
-        <p:txBody>
-          <a:bodyPr wrap="square" lIns="0" tIns="0" rIns="0" bIns="0" rtlCol="0" anchor="ctr"/>
-          <a:lstStyle/>
-          <a:p>
-            <a:pPr algn="ctr" indent="0" marL="0">
-              <a:buNone/>
-            </a:pPr>
-            <a:r>
-              <a:rPr lang="en-US" sz="1100" b="1" dirty="0">
-                <a:solidFill>
-                  <a:srgbClr val="475569"/>
+            <a:srgbClr val="CCFBF1"/>
+          </a:solidFill>
+          <a:ln w="12700">
+            <a:solidFill>
+              <a:srgbClr val="0D9488"/>
+            </a:solidFill>
+            <a:prstDash val="solid"/>
+          </a:ln>
+        </p:spPr>
+      </p:sp>
+      <p:sp>
+        <p:nvSpPr>
+          <p:cNvPr id="29" name="Shape 27"/>
+          <p:cNvSpPr/>
+          <p:nvPr/>
+        </p:nvSpPr>
+        <p:spPr>
+          <a:xfrm>
+            <a:off x="2313432" y="3364992"/>
+            <a:ext cx="1645920" cy="475488"/>
+          </a:xfrm>
+          <a:prstGeom prst="rect">
+            <a:avLst>
+              <a:gd name="adj" fmla="val 9615"/>
+            </a:avLst>
+          </a:prstGeom>
+          <a:solidFill>
+            <a:srgbClr val="FFFFFF"/>
+          </a:solidFill>
+          <a:ln w="12700">
+            <a:solidFill>
+              <a:srgbClr val="0D9488"/>
+            </a:solidFill>
+            <a:prstDash val="solid"/>
+          </a:ln>
+        </p:spPr>
+      </p:sp>
+      <p:sp>
+        <p:nvSpPr>
+          <p:cNvPr id="30" name="Text 28"/>
+          <p:cNvSpPr/>
+          <p:nvPr/>
+        </p:nvSpPr>
+        <p:spPr>
+          <a:xfrm>
+            <a:off x="2313432" y="3364992"/>
+            <a:ext cx="1645920" cy="475488"/>
+          </a:xfrm>
+          <a:prstGeom prst="rect">
+            <a:avLst/>
+          </a:prstGeom>
+          <a:noFill/>
+          <a:ln/>
+        </p:spPr>
+        <p:txBody>
+          <a:bodyPr wrap="square" lIns="0" tIns="0" rIns="0" bIns="0" rtlCol="0" anchor="ctr"/>
+          <a:lstStyle/>
+          <a:p>
+            <a:pPr algn="ctr" indent="0" marL="0">
+              <a:buNone/>
+            </a:pPr>
+            <a:r>
+              <a:rPr lang="en-US" sz="1400" b="1" dirty="0">
+                <a:solidFill>
+                  <a:srgbClr val="0D9488"/>
                 </a:solidFill>
                 <a:latin typeface="Trebuchet MS" pitchFamily="34" charset="0"/>
                 <a:ea typeface="Trebuchet MS" pitchFamily="34" charset="-122"/>
                 <a:cs typeface="Trebuchet MS" pitchFamily="34" charset="-120"/>
               </a:rPr>
-              <a:t>Syllables</a:t>
-            </a:r>
-            <a:endParaRPr lang="en-US" sz="1100" dirty="0"/>
-          </a:p>
-        </p:txBody>
-      </p:sp>
-      <p:sp>
-        <p:nvSpPr>
-          <p:cNvPr id="30" name="Shape 28"/>
-          <p:cNvSpPr/>
-          <p:nvPr/>
-        </p:nvSpPr>
-        <p:spPr>
-          <a:xfrm>
-            <a:off x="1874520" y="3273552"/>
-            <a:ext cx="6903720" cy="658368"/>
-          </a:xfrm>
-          <a:prstGeom prst="rect">
-            <a:avLst>
-              <a:gd name="adj" fmla="val 8333"/>
-            </a:avLst>
-          </a:prstGeom>
-          <a:solidFill>
-            <a:srgbClr val="CCFBF1"/>
-          </a:solidFill>
-          <a:ln w="12700">
-            <a:solidFill>
-              <a:srgbClr val="0D9488"/>
-            </a:solidFill>
-            <a:prstDash val="solid"/>
-          </a:ln>
-        </p:spPr>
-      </p:sp>
-      <p:sp>
-        <p:nvSpPr>
-          <p:cNvPr id="31" name="Shape 29"/>
-          <p:cNvSpPr/>
-          <p:nvPr/>
-        </p:nvSpPr>
-        <p:spPr>
-          <a:xfrm>
-            <a:off x="1978152" y="3364992"/>
-            <a:ext cx="1225296" cy="475488"/>
+              <a:t>au</a:t>
+            </a:r>
+            <a:endParaRPr lang="en-US" sz="1400" dirty="0"/>
+          </a:p>
+        </p:txBody>
+      </p:sp>
+      <p:sp>
+        <p:nvSpPr>
+          <p:cNvPr id="31" name="Text 29"/>
+          <p:cNvSpPr/>
+          <p:nvPr/>
+        </p:nvSpPr>
+        <p:spPr>
+          <a:xfrm>
+            <a:off x="3959352" y="3364992"/>
+            <a:ext cx="411480" cy="475488"/>
+          </a:xfrm>
+          <a:prstGeom prst="rect">
+            <a:avLst/>
+          </a:prstGeom>
+          <a:noFill/>
+          <a:ln/>
+        </p:spPr>
+        <p:txBody>
+          <a:bodyPr wrap="square" lIns="0" tIns="0" rIns="0" bIns="0" rtlCol="0" anchor="ctr"/>
+          <a:lstStyle/>
+          <a:p>
+            <a:pPr algn="ctr" indent="0" marL="0">
+              <a:buNone/>
+            </a:pPr>
+            <a:r>
+              <a:rPr lang="en-US" sz="1600" b="1" dirty="0">
+                <a:solidFill>
+                  <a:srgbClr val="0D9488"/>
+                </a:solidFill>
+                <a:latin typeface="Trebuchet MS" pitchFamily="34" charset="0"/>
+                <a:ea typeface="Trebuchet MS" pitchFamily="34" charset="-122"/>
+                <a:cs typeface="Trebuchet MS" pitchFamily="34" charset="-120"/>
+              </a:rPr>
+              <a:t>·</a:t>
+            </a:r>
+            <a:endParaRPr lang="en-US" sz="1600" dirty="0"/>
+          </a:p>
+        </p:txBody>
+      </p:sp>
+      <p:sp>
+        <p:nvSpPr>
+          <p:cNvPr id="32" name="Shape 30"/>
+          <p:cNvSpPr/>
+          <p:nvPr/>
+        </p:nvSpPr>
+        <p:spPr>
+          <a:xfrm>
+            <a:off x="4370832" y="3364992"/>
+            <a:ext cx="1645920" cy="475488"/>
           </a:xfrm>
           <a:prstGeom prst="rect">
             <a:avLst>
@@ -14521,14 +14480,14 @@
       </p:sp>
       <p:sp>
         <p:nvSpPr>
-          <p:cNvPr id="32" name="Text 30"/>
-          <p:cNvSpPr/>
-          <p:nvPr/>
-        </p:nvSpPr>
-        <p:spPr>
-          <a:xfrm>
-            <a:off x="1978152" y="3364992"/>
-            <a:ext cx="1225296" cy="475488"/>
+          <p:cNvPr id="33" name="Text 31"/>
+          <p:cNvSpPr/>
+          <p:nvPr/>
+        </p:nvSpPr>
+        <p:spPr>
+          <a:xfrm>
+            <a:off x="4370832" y="3364992"/>
+            <a:ext cx="1645920" cy="475488"/>
           </a:xfrm>
           <a:prstGeom prst="rect">
             <a:avLst/>
@@ -14552,7 +14511,7 @@
                 <a:ea typeface="Trebuchet MS" pitchFamily="34" charset="-122"/>
                 <a:cs typeface="Trebuchet MS" pitchFamily="34" charset="-120"/>
               </a:rPr>
-              <a:t>au</a:t>
+              <a:t>di</a:t>
             </a:r>
             <a:endParaRPr lang="en-US" sz="1400" dirty="0"/>
           </a:p>
@@ -14560,14 +14519,14 @@
       </p:sp>
       <p:sp>
         <p:nvSpPr>
-          <p:cNvPr id="33" name="Text 31"/>
-          <p:cNvSpPr/>
-          <p:nvPr/>
-        </p:nvSpPr>
-        <p:spPr>
-          <a:xfrm>
-            <a:off x="3203448" y="3364992"/>
-            <a:ext cx="76200" cy="475488"/>
+          <p:cNvPr id="34" name="Text 32"/>
+          <p:cNvSpPr/>
+          <p:nvPr/>
+        </p:nvSpPr>
+        <p:spPr>
+          <a:xfrm>
+            <a:off x="6016752" y="3364992"/>
+            <a:ext cx="411480" cy="475488"/>
           </a:xfrm>
           <a:prstGeom prst="rect">
             <a:avLst/>
@@ -14599,14 +14558,14 @@
       </p:sp>
       <p:sp>
         <p:nvSpPr>
-          <p:cNvPr id="34" name="Shape 32"/>
-          <p:cNvSpPr/>
-          <p:nvPr/>
-        </p:nvSpPr>
-        <p:spPr>
-          <a:xfrm>
-            <a:off x="3279648" y="3364992"/>
-            <a:ext cx="1225296" cy="475488"/>
+          <p:cNvPr id="35" name="Shape 33"/>
+          <p:cNvSpPr/>
+          <p:nvPr/>
+        </p:nvSpPr>
+        <p:spPr>
+          <a:xfrm>
+            <a:off x="6428232" y="3364992"/>
+            <a:ext cx="1645920" cy="475488"/>
           </a:xfrm>
           <a:prstGeom prst="rect">
             <a:avLst>
@@ -14626,14 +14585,14 @@
       </p:sp>
       <p:sp>
         <p:nvSpPr>
-          <p:cNvPr id="35" name="Text 33"/>
-          <p:cNvSpPr/>
-          <p:nvPr/>
-        </p:nvSpPr>
-        <p:spPr>
-          <a:xfrm>
-            <a:off x="3279648" y="3364992"/>
-            <a:ext cx="1225296" cy="475488"/>
+          <p:cNvPr id="36" name="Text 34"/>
+          <p:cNvSpPr/>
+          <p:nvPr/>
+        </p:nvSpPr>
+        <p:spPr>
+          <a:xfrm>
+            <a:off x="6428232" y="3364992"/>
+            <a:ext cx="1645920" cy="475488"/>
           </a:xfrm>
           <a:prstGeom prst="rect">
             <a:avLst/>
@@ -14657,7 +14616,7 @@
                 <a:ea typeface="Trebuchet MS" pitchFamily="34" charset="-122"/>
                 <a:cs typeface="Trebuchet MS" pitchFamily="34" charset="-120"/>
               </a:rPr>
-              <a:t>di</a:t>
+              <a:t>ence</a:t>
             </a:r>
             <a:endParaRPr lang="en-US" sz="1400" dirty="0"/>
           </a:p>
@@ -14665,329 +14624,80 @@
       </p:sp>
       <p:sp>
         <p:nvSpPr>
-          <p:cNvPr id="36" name="Text 34"/>
-          <p:cNvSpPr/>
-          <p:nvPr/>
-        </p:nvSpPr>
-        <p:spPr>
-          <a:xfrm>
-            <a:off x="4504944" y="3364992"/>
-            <a:ext cx="76200" cy="475488"/>
-          </a:xfrm>
-          <a:prstGeom prst="rect">
-            <a:avLst/>
-          </a:prstGeom>
-          <a:noFill/>
-          <a:ln/>
-        </p:spPr>
-        <p:txBody>
-          <a:bodyPr wrap="square" lIns="0" tIns="0" rIns="0" bIns="0" rtlCol="0" anchor="ctr"/>
-          <a:lstStyle/>
-          <a:p>
-            <a:pPr algn="ctr" indent="0" marL="0">
-              <a:buNone/>
-            </a:pPr>
-            <a:r>
-              <a:rPr lang="en-US" sz="1600" b="1" dirty="0">
-                <a:solidFill>
-                  <a:srgbClr val="0D9488"/>
+          <p:cNvPr id="37" name="Shape 35"/>
+          <p:cNvSpPr/>
+          <p:nvPr/>
+        </p:nvSpPr>
+        <p:spPr>
+          <a:xfrm>
+            <a:off x="365760" y="4096512"/>
+            <a:ext cx="1371600" cy="804672"/>
+          </a:xfrm>
+          <a:prstGeom prst="rect">
+            <a:avLst>
+              <a:gd name="adj" fmla="val 6818"/>
+            </a:avLst>
+          </a:prstGeom>
+          <a:solidFill>
+            <a:srgbClr val="E2E8F0"/>
+          </a:solidFill>
+          <a:ln w="12700">
+            <a:solidFill>
+              <a:srgbClr val="E2E8F0"/>
+            </a:solidFill>
+            <a:prstDash val="solid"/>
+          </a:ln>
+        </p:spPr>
+      </p:sp>
+      <p:sp>
+        <p:nvSpPr>
+          <p:cNvPr id="38" name="Text 36"/>
+          <p:cNvSpPr/>
+          <p:nvPr/>
+        </p:nvSpPr>
+        <p:spPr>
+          <a:xfrm>
+            <a:off x="365760" y="4096512"/>
+            <a:ext cx="1371600" cy="804672"/>
+          </a:xfrm>
+          <a:prstGeom prst="rect">
+            <a:avLst/>
+          </a:prstGeom>
+          <a:noFill/>
+          <a:ln/>
+        </p:spPr>
+        <p:txBody>
+          <a:bodyPr wrap="square" lIns="0" tIns="0" rIns="0" bIns="0" rtlCol="0" anchor="ctr"/>
+          <a:lstStyle/>
+          <a:p>
+            <a:pPr algn="ctr" indent="0" marL="0">
+              <a:buNone/>
+            </a:pPr>
+            <a:r>
+              <a:rPr lang="en-US" sz="1100" b="1" dirty="0">
+                <a:solidFill>
+                  <a:srgbClr val="475569"/>
                 </a:solidFill>
                 <a:latin typeface="Trebuchet MS" pitchFamily="34" charset="0"/>
                 <a:ea typeface="Trebuchet MS" pitchFamily="34" charset="-122"/>
                 <a:cs typeface="Trebuchet MS" pitchFamily="34" charset="-120"/>
               </a:rPr>
-              <a:t>·</a:t>
-            </a:r>
-            <a:endParaRPr lang="en-US" sz="1600" dirty="0"/>
-          </a:p>
-        </p:txBody>
-      </p:sp>
-      <p:sp>
-        <p:nvSpPr>
-          <p:cNvPr id="37" name="Shape 35"/>
-          <p:cNvSpPr/>
-          <p:nvPr/>
-        </p:nvSpPr>
-        <p:spPr>
-          <a:xfrm>
-            <a:off x="4581144" y="3364992"/>
-            <a:ext cx="1225296" cy="475488"/>
-          </a:xfrm>
-          <a:prstGeom prst="rect">
-            <a:avLst>
-              <a:gd name="adj" fmla="val 9615"/>
-            </a:avLst>
-          </a:prstGeom>
-          <a:solidFill>
-            <a:srgbClr val="FFFFFF"/>
-          </a:solidFill>
-          <a:ln w="12700">
-            <a:solidFill>
-              <a:srgbClr val="0D9488"/>
-            </a:solidFill>
-            <a:prstDash val="solid"/>
-          </a:ln>
-        </p:spPr>
-      </p:sp>
-      <p:sp>
-        <p:nvSpPr>
-          <p:cNvPr id="38" name="Text 36"/>
-          <p:cNvSpPr/>
-          <p:nvPr/>
-        </p:nvSpPr>
-        <p:spPr>
-          <a:xfrm>
-            <a:off x="4581144" y="3364992"/>
-            <a:ext cx="1225296" cy="475488"/>
-          </a:xfrm>
-          <a:prstGeom prst="rect">
-            <a:avLst/>
-          </a:prstGeom>
-          <a:noFill/>
-          <a:ln/>
-        </p:spPr>
-        <p:txBody>
-          <a:bodyPr wrap="square" lIns="0" tIns="0" rIns="0" bIns="0" rtlCol="0" anchor="ctr"/>
-          <a:lstStyle/>
-          <a:p>
-            <a:pPr algn="ctr" indent="0" marL="0">
-              <a:buNone/>
-            </a:pPr>
-            <a:r>
-              <a:rPr lang="en-US" sz="1400" b="1" dirty="0">
-                <a:solidFill>
-                  <a:srgbClr val="0D9488"/>
-                </a:solidFill>
-                <a:latin typeface="Trebuchet MS" pitchFamily="34" charset="0"/>
-                <a:ea typeface="Trebuchet MS" pitchFamily="34" charset="-122"/>
-                <a:cs typeface="Trebuchet MS" pitchFamily="34" charset="-120"/>
-              </a:rPr>
-              <a:t>tor</a:t>
-            </a:r>
-            <a:endParaRPr lang="en-US" sz="1400" dirty="0"/>
-          </a:p>
-        </p:txBody>
-      </p:sp>
-      <p:sp>
-        <p:nvSpPr>
-          <p:cNvPr id="39" name="Text 37"/>
-          <p:cNvSpPr/>
-          <p:nvPr/>
-        </p:nvSpPr>
-        <p:spPr>
-          <a:xfrm>
-            <a:off x="5806440" y="3364992"/>
-            <a:ext cx="76200" cy="475488"/>
-          </a:xfrm>
-          <a:prstGeom prst="rect">
-            <a:avLst/>
-          </a:prstGeom>
-          <a:noFill/>
-          <a:ln/>
-        </p:spPr>
-        <p:txBody>
-          <a:bodyPr wrap="square" lIns="0" tIns="0" rIns="0" bIns="0" rtlCol="0" anchor="ctr"/>
-          <a:lstStyle/>
-          <a:p>
-            <a:pPr algn="ctr" indent="0" marL="0">
-              <a:buNone/>
-            </a:pPr>
-            <a:r>
-              <a:rPr lang="en-US" sz="1600" b="1" dirty="0">
-                <a:solidFill>
-                  <a:srgbClr val="0D9488"/>
-                </a:solidFill>
-                <a:latin typeface="Trebuchet MS" pitchFamily="34" charset="0"/>
-                <a:ea typeface="Trebuchet MS" pitchFamily="34" charset="-122"/>
-                <a:cs typeface="Trebuchet MS" pitchFamily="34" charset="-120"/>
-              </a:rPr>
-              <a:t>·</a:t>
-            </a:r>
-            <a:endParaRPr lang="en-US" sz="1600" dirty="0"/>
-          </a:p>
-        </p:txBody>
-      </p:sp>
-      <p:sp>
-        <p:nvSpPr>
-          <p:cNvPr id="40" name="Shape 38"/>
-          <p:cNvSpPr/>
-          <p:nvPr/>
-        </p:nvSpPr>
-        <p:spPr>
-          <a:xfrm>
-            <a:off x="5882640" y="3364992"/>
-            <a:ext cx="1225296" cy="475488"/>
-          </a:xfrm>
-          <a:prstGeom prst="rect">
-            <a:avLst>
-              <a:gd name="adj" fmla="val 9615"/>
-            </a:avLst>
-          </a:prstGeom>
-          <a:solidFill>
-            <a:srgbClr val="FFFFFF"/>
-          </a:solidFill>
-          <a:ln w="12700">
-            <a:solidFill>
-              <a:srgbClr val="0D9488"/>
-            </a:solidFill>
-            <a:prstDash val="solid"/>
-          </a:ln>
-        </p:spPr>
-      </p:sp>
-      <p:sp>
-        <p:nvSpPr>
-          <p:cNvPr id="41" name="Text 39"/>
-          <p:cNvSpPr/>
-          <p:nvPr/>
-        </p:nvSpPr>
-        <p:spPr>
-          <a:xfrm>
-            <a:off x="5882640" y="3364992"/>
-            <a:ext cx="1225296" cy="475488"/>
-          </a:xfrm>
-          <a:prstGeom prst="rect">
-            <a:avLst/>
-          </a:prstGeom>
-          <a:noFill/>
-          <a:ln/>
-        </p:spPr>
-        <p:txBody>
-          <a:bodyPr wrap="square" lIns="0" tIns="0" rIns="0" bIns="0" rtlCol="0" anchor="ctr"/>
-          <a:lstStyle/>
-          <a:p>
-            <a:pPr algn="ctr" indent="0" marL="0">
-              <a:buNone/>
-            </a:pPr>
-            <a:r>
-              <a:rPr lang="en-US" sz="1400" b="1" dirty="0">
-                <a:solidFill>
-                  <a:srgbClr val="0D9488"/>
-                </a:solidFill>
-                <a:latin typeface="Trebuchet MS" pitchFamily="34" charset="0"/>
-                <a:ea typeface="Trebuchet MS" pitchFamily="34" charset="-122"/>
-                <a:cs typeface="Trebuchet MS" pitchFamily="34" charset="-120"/>
-              </a:rPr>
-              <a:t>i</a:t>
-            </a:r>
-            <a:endParaRPr lang="en-US" sz="1400" dirty="0"/>
-          </a:p>
-        </p:txBody>
-      </p:sp>
-      <p:sp>
-        <p:nvSpPr>
-          <p:cNvPr id="42" name="Text 40"/>
-          <p:cNvSpPr/>
-          <p:nvPr/>
-        </p:nvSpPr>
-        <p:spPr>
-          <a:xfrm>
-            <a:off x="7107936" y="3364992"/>
-            <a:ext cx="76200" cy="475488"/>
-          </a:xfrm>
-          <a:prstGeom prst="rect">
-            <a:avLst/>
-          </a:prstGeom>
-          <a:noFill/>
-          <a:ln/>
-        </p:spPr>
-        <p:txBody>
-          <a:bodyPr wrap="square" lIns="0" tIns="0" rIns="0" bIns="0" rtlCol="0" anchor="ctr"/>
-          <a:lstStyle/>
-          <a:p>
-            <a:pPr algn="ctr" indent="0" marL="0">
-              <a:buNone/>
-            </a:pPr>
-            <a:r>
-              <a:rPr lang="en-US" sz="1600" b="1" dirty="0">
-                <a:solidFill>
-                  <a:srgbClr val="0D9488"/>
-                </a:solidFill>
-                <a:latin typeface="Trebuchet MS" pitchFamily="34" charset="0"/>
-                <a:ea typeface="Trebuchet MS" pitchFamily="34" charset="-122"/>
-                <a:cs typeface="Trebuchet MS" pitchFamily="34" charset="-120"/>
-              </a:rPr>
-              <a:t>·</a:t>
-            </a:r>
-            <a:endParaRPr lang="en-US" sz="1600" dirty="0"/>
-          </a:p>
-        </p:txBody>
-      </p:sp>
-      <p:sp>
-        <p:nvSpPr>
-          <p:cNvPr id="43" name="Shape 41"/>
-          <p:cNvSpPr/>
-          <p:nvPr/>
-        </p:nvSpPr>
-        <p:spPr>
-          <a:xfrm>
-            <a:off x="7184136" y="3364992"/>
-            <a:ext cx="1225296" cy="475488"/>
-          </a:xfrm>
-          <a:prstGeom prst="rect">
-            <a:avLst>
-              <a:gd name="adj" fmla="val 9615"/>
-            </a:avLst>
-          </a:prstGeom>
-          <a:solidFill>
-            <a:srgbClr val="FFFFFF"/>
-          </a:solidFill>
-          <a:ln w="12700">
-            <a:solidFill>
-              <a:srgbClr val="0D9488"/>
-            </a:solidFill>
-            <a:prstDash val="solid"/>
-          </a:ln>
-        </p:spPr>
-      </p:sp>
-      <p:sp>
-        <p:nvSpPr>
-          <p:cNvPr id="44" name="Text 42"/>
-          <p:cNvSpPr/>
-          <p:nvPr/>
-        </p:nvSpPr>
-        <p:spPr>
-          <a:xfrm>
-            <a:off x="7184136" y="3364992"/>
-            <a:ext cx="1225296" cy="475488"/>
-          </a:xfrm>
-          <a:prstGeom prst="rect">
-            <a:avLst/>
-          </a:prstGeom>
-          <a:noFill/>
-          <a:ln/>
-        </p:spPr>
-        <p:txBody>
-          <a:bodyPr wrap="square" lIns="0" tIns="0" rIns="0" bIns="0" rtlCol="0" anchor="ctr"/>
-          <a:lstStyle/>
-          <a:p>
-            <a:pPr algn="ctr" indent="0" marL="0">
-              <a:buNone/>
-            </a:pPr>
-            <a:r>
-              <a:rPr lang="en-US" sz="1400" b="1" dirty="0">
-                <a:solidFill>
-                  <a:srgbClr val="0D9488"/>
-                </a:solidFill>
-                <a:latin typeface="Trebuchet MS" pitchFamily="34" charset="0"/>
-                <a:ea typeface="Trebuchet MS" pitchFamily="34" charset="-122"/>
-                <a:cs typeface="Trebuchet MS" pitchFamily="34" charset="-120"/>
-              </a:rPr>
-              <a:t>um</a:t>
-            </a:r>
-            <a:endParaRPr lang="en-US" sz="1400" dirty="0"/>
-          </a:p>
-        </p:txBody>
-      </p:sp>
-      <p:sp>
-        <p:nvSpPr>
-          <p:cNvPr id="45" name="Shape 43"/>
-          <p:cNvSpPr/>
-          <p:nvPr/>
-        </p:nvSpPr>
-        <p:spPr>
-          <a:xfrm>
-            <a:off x="365760" y="4096512"/>
-            <a:ext cx="1371600" cy="804672"/>
+              <a:t>Phonemes</a:t>
+            </a:r>
+            <a:endParaRPr lang="en-US" sz="1100" dirty="0"/>
+          </a:p>
+        </p:txBody>
+      </p:sp>
+      <p:sp>
+        <p:nvSpPr>
+          <p:cNvPr id="39" name="Shape 37"/>
+          <p:cNvSpPr/>
+          <p:nvPr/>
+        </p:nvSpPr>
+        <p:spPr>
+          <a:xfrm>
+            <a:off x="1874520" y="4096512"/>
+            <a:ext cx="6903720" cy="804672"/>
           </a:xfrm>
           <a:prstGeom prst="rect">
             <a:avLst>
@@ -14995,85 +14705,19 @@
             </a:avLst>
           </a:prstGeom>
           <a:solidFill>
-            <a:srgbClr val="E2E8F0"/>
+            <a:srgbClr val="F8FAFC"/>
           </a:solidFill>
           <a:ln w="12700">
             <a:solidFill>
               <a:srgbClr val="E2E8F0"/>
             </a:solidFill>
-            <a:prstDash val="solid"/>
-          </a:ln>
-        </p:spPr>
-      </p:sp>
-      <p:sp>
-        <p:nvSpPr>
-          <p:cNvPr id="46" name="Text 44"/>
-          <p:cNvSpPr/>
-          <p:nvPr/>
-        </p:nvSpPr>
-        <p:spPr>
-          <a:xfrm>
-            <a:off x="365760" y="4096512"/>
-            <a:ext cx="1371600" cy="804672"/>
-          </a:xfrm>
-          <a:prstGeom prst="rect">
-            <a:avLst/>
-          </a:prstGeom>
-          <a:noFill/>
-          <a:ln/>
-        </p:spPr>
-        <p:txBody>
-          <a:bodyPr wrap="square" lIns="0" tIns="0" rIns="0" bIns="0" rtlCol="0" anchor="ctr"/>
-          <a:lstStyle/>
-          <a:p>
-            <a:pPr algn="ctr" indent="0" marL="0">
-              <a:buNone/>
-            </a:pPr>
-            <a:r>
-              <a:rPr lang="en-US" sz="1100" b="1" dirty="0">
-                <a:solidFill>
-                  <a:srgbClr val="475569"/>
-                </a:solidFill>
-                <a:latin typeface="Trebuchet MS" pitchFamily="34" charset="0"/>
-                <a:ea typeface="Trebuchet MS" pitchFamily="34" charset="-122"/>
-                <a:cs typeface="Trebuchet MS" pitchFamily="34" charset="-120"/>
-              </a:rPr>
-              <a:t>Phonemes</a:t>
-            </a:r>
-            <a:endParaRPr lang="en-US" sz="1100" dirty="0"/>
-          </a:p>
-        </p:txBody>
-      </p:sp>
-      <p:sp>
-        <p:nvSpPr>
-          <p:cNvPr id="47" name="Shape 45"/>
-          <p:cNvSpPr/>
-          <p:nvPr/>
-        </p:nvSpPr>
-        <p:spPr>
-          <a:xfrm>
-            <a:off x="1874520" y="4096512"/>
-            <a:ext cx="6903720" cy="804672"/>
-          </a:xfrm>
-          <a:prstGeom prst="rect">
-            <a:avLst>
-              <a:gd name="adj" fmla="val 6818"/>
-            </a:avLst>
-          </a:prstGeom>
-          <a:solidFill>
-            <a:srgbClr val="F8FAFC"/>
-          </a:solidFill>
-          <a:ln w="12700">
-            <a:solidFill>
-              <a:srgbClr val="E2E8F0"/>
-            </a:solidFill>
             <a:prstDash val="dash"/>
           </a:ln>
         </p:spPr>
       </p:sp>
       <p:sp>
         <p:nvSpPr>
-          <p:cNvPr id="48" name="Text 46"/>
+          <p:cNvPr id="40" name="Text 38"/>
           <p:cNvSpPr/>
           <p:nvPr/>
         </p:nvSpPr>
@@ -15800,7 +15444,7 @@
                 <a:ea typeface="Trebuchet MS" pitchFamily="34" charset="-122"/>
                 <a:cs typeface="Trebuchet MS" pitchFamily="34" charset="-120"/>
               </a:rPr>
-              <a:t>auditorium</a:t>
+              <a:t>audience</a:t>
             </a:r>
             <a:endParaRPr lang="en-US" sz="2800" dirty="0"/>
           </a:p>
@@ -15880,8 +15524,8 @@
         </p:nvSpPr>
         <p:spPr>
           <a:xfrm>
-            <a:off x="1989734" y="2258568"/>
-            <a:ext cx="1581912" cy="292608"/>
+            <a:off x="2221992" y="2258568"/>
+            <a:ext cx="1828800" cy="292608"/>
           </a:xfrm>
           <a:prstGeom prst="rect">
             <a:avLst>
@@ -15914,8 +15558,8 @@
         </p:nvSpPr>
         <p:spPr>
           <a:xfrm>
-            <a:off x="1989734" y="2258568"/>
-            <a:ext cx="1581912" cy="292608"/>
+            <a:off x="2221992" y="2258568"/>
+            <a:ext cx="1828800" cy="292608"/>
           </a:xfrm>
           <a:prstGeom prst="rect">
             <a:avLst/>
@@ -15953,8 +15597,8 @@
         </p:nvSpPr>
         <p:spPr>
           <a:xfrm>
-            <a:off x="1989734" y="2569464"/>
-            <a:ext cx="1581912" cy="201168"/>
+            <a:off x="2221992" y="2569464"/>
+            <a:ext cx="1828800" cy="201168"/>
           </a:xfrm>
           <a:prstGeom prst="rect">
             <a:avLst/>
@@ -15978,7 +15622,7 @@
                 <a:ea typeface="Calibri" pitchFamily="34" charset="-122"/>
                 <a:cs typeface="Calibri" pitchFamily="34" charset="-120"/>
               </a:rPr>
-              <a:t>hear</a:t>
+              <a:t>hear / listen</a:t>
             </a:r>
             <a:endParaRPr lang="en-US" sz="850" dirty="0"/>
           </a:p>
@@ -15992,8 +15636,8 @@
         </p:nvSpPr>
         <p:spPr>
           <a:xfrm>
-            <a:off x="3659429" y="2258568"/>
-            <a:ext cx="1581912" cy="292608"/>
+            <a:off x="4370832" y="2258568"/>
+            <a:ext cx="1828800" cy="292608"/>
           </a:xfrm>
           <a:prstGeom prst="rect">
             <a:avLst>
@@ -16026,8 +15670,8 @@
         </p:nvSpPr>
         <p:spPr>
           <a:xfrm>
-            <a:off x="3659429" y="2258568"/>
-            <a:ext cx="1581912" cy="292608"/>
+            <a:off x="4370832" y="2258568"/>
+            <a:ext cx="1828800" cy="292608"/>
           </a:xfrm>
           <a:prstGeom prst="rect">
             <a:avLst/>
@@ -16051,7 +15695,7 @@
                 <a:ea typeface="Trebuchet MS" pitchFamily="34" charset="-122"/>
                 <a:cs typeface="Trebuchet MS" pitchFamily="34" charset="-120"/>
               </a:rPr>
-              <a:t>it</a:t>
+              <a:t>i</a:t>
             </a:r>
             <a:endParaRPr lang="en-US" sz="1300" dirty="0"/>
           </a:p>
@@ -16065,8 +15709,8 @@
         </p:nvSpPr>
         <p:spPr>
           <a:xfrm>
-            <a:off x="3659429" y="2569464"/>
-            <a:ext cx="1581912" cy="201168"/>
+            <a:off x="4370832" y="2569464"/>
+            <a:ext cx="1828800" cy="201168"/>
           </a:xfrm>
           <a:prstGeom prst="rect">
             <a:avLst/>
@@ -16090,7 +15734,7 @@
                 <a:ea typeface="Calibri" pitchFamily="34" charset="-122"/>
                 <a:cs typeface="Calibri" pitchFamily="34" charset="-120"/>
               </a:rPr>
-              <a:t>go, act</a:t>
+              <a:t>connecting vowel</a:t>
             </a:r>
             <a:endParaRPr lang="en-US" sz="850" dirty="0"/>
           </a:p>
@@ -16098,14 +15742,53 @@
       </p:sp>
       <p:sp>
         <p:nvSpPr>
-          <p:cNvPr id="22" name="Shape 20"/>
-          <p:cNvSpPr/>
-          <p:nvPr/>
-        </p:nvSpPr>
-        <p:spPr>
-          <a:xfrm>
-            <a:off x="5329123" y="2258568"/>
-            <a:ext cx="1581912" cy="292608"/>
+          <p:cNvPr id="22" name="Text 20"/>
+          <p:cNvSpPr/>
+          <p:nvPr/>
+        </p:nvSpPr>
+        <p:spPr>
+          <a:xfrm>
+            <a:off x="4370832" y="2752344"/>
+            <a:ext cx="1828800" cy="182880"/>
+          </a:xfrm>
+          <a:prstGeom prst="rect">
+            <a:avLst/>
+          </a:prstGeom>
+          <a:noFill/>
+          <a:ln/>
+        </p:spPr>
+        <p:txBody>
+          <a:bodyPr wrap="square" lIns="0" tIns="0" rIns="0" bIns="0" rtlCol="0" anchor="t"/>
+          <a:lstStyle/>
+          <a:p>
+            <a:pPr algn="ctr" indent="0" marL="0">
+              <a:buNone/>
+            </a:pPr>
+            <a:r>
+              <a:rPr lang="en-US" sz="700" i="1" dirty="0">
+                <a:solidFill>
+                  <a:srgbClr val="94A3B8"/>
+                </a:solidFill>
+                <a:latin typeface="Calibri" pitchFamily="34" charset="0"/>
+                <a:ea typeface="Calibri" pitchFamily="34" charset="-122"/>
+                <a:cs typeface="Calibri" pitchFamily="34" charset="-120"/>
+              </a:rPr>
+              <a:t>links base to suffix</a:t>
+            </a:r>
+            <a:endParaRPr lang="en-US" sz="700" dirty="0"/>
+          </a:p>
+        </p:txBody>
+      </p:sp>
+      <p:sp>
+        <p:nvSpPr>
+          <p:cNvPr id="23" name="Shape 21"/>
+          <p:cNvSpPr/>
+          <p:nvPr/>
+        </p:nvSpPr>
+        <p:spPr>
+          <a:xfrm>
+            <a:off x="6519672" y="2258568"/>
+            <a:ext cx="1828800" cy="292608"/>
           </a:xfrm>
           <a:prstGeom prst="rect">
             <a:avLst>
@@ -16132,14 +15815,14 @@
       </p:sp>
       <p:sp>
         <p:nvSpPr>
-          <p:cNvPr id="23" name="Text 21"/>
-          <p:cNvSpPr/>
-          <p:nvPr/>
-        </p:nvSpPr>
-        <p:spPr>
-          <a:xfrm>
-            <a:off x="5329123" y="2258568"/>
-            <a:ext cx="1581912" cy="292608"/>
+          <p:cNvPr id="24" name="Text 22"/>
+          <p:cNvSpPr/>
+          <p:nvPr/>
+        </p:nvSpPr>
+        <p:spPr>
+          <a:xfrm>
+            <a:off x="6519672" y="2258568"/>
+            <a:ext cx="1828800" cy="292608"/>
           </a:xfrm>
           <a:prstGeom prst="rect">
             <a:avLst/>
@@ -16163,7 +15846,7 @@
                 <a:ea typeface="Trebuchet MS" pitchFamily="34" charset="-122"/>
                 <a:cs typeface="Trebuchet MS" pitchFamily="34" charset="-120"/>
               </a:rPr>
-              <a:t>or</a:t>
+              <a:t>ence</a:t>
             </a:r>
             <a:endParaRPr lang="en-US" sz="1300" dirty="0"/>
           </a:p>
@@ -16171,14 +15854,14 @@
       </p:sp>
       <p:sp>
         <p:nvSpPr>
-          <p:cNvPr id="24" name="Text 22"/>
-          <p:cNvSpPr/>
-          <p:nvPr/>
-        </p:nvSpPr>
-        <p:spPr>
-          <a:xfrm>
-            <a:off x="5329123" y="2569464"/>
-            <a:ext cx="1581912" cy="201168"/>
+          <p:cNvPr id="25" name="Text 23"/>
+          <p:cNvSpPr/>
+          <p:nvPr/>
+        </p:nvSpPr>
+        <p:spPr>
+          <a:xfrm>
+            <a:off x="6519672" y="2569464"/>
+            <a:ext cx="1828800" cy="201168"/>
           </a:xfrm>
           <a:prstGeom prst="rect">
             <a:avLst/>
@@ -16202,7 +15885,7 @@
                 <a:ea typeface="Calibri" pitchFamily="34" charset="-122"/>
                 <a:cs typeface="Calibri" pitchFamily="34" charset="-120"/>
               </a:rPr>
-              <a:t>one who</a:t>
+              <a:t>state or quality of</a:t>
             </a:r>
             <a:endParaRPr lang="en-US" sz="850" dirty="0"/>
           </a:p>
@@ -16210,87 +15893,872 @@
       </p:sp>
       <p:sp>
         <p:nvSpPr>
-          <p:cNvPr id="25" name="Shape 23"/>
-          <p:cNvSpPr/>
-          <p:nvPr/>
-        </p:nvSpPr>
-        <p:spPr>
-          <a:xfrm>
-            <a:off x="6998818" y="2258568"/>
-            <a:ext cx="1581912" cy="292608"/>
+          <p:cNvPr id="26" name="Shape 24"/>
+          <p:cNvSpPr/>
+          <p:nvPr/>
+        </p:nvSpPr>
+        <p:spPr>
+          <a:xfrm>
+            <a:off x="365760" y="3273552"/>
+            <a:ext cx="1371600" cy="658368"/>
           </a:xfrm>
           <a:prstGeom prst="rect">
             <a:avLst>
-              <a:gd name="adj" fmla="val 25000"/>
+              <a:gd name="adj" fmla="val 8333"/>
             </a:avLst>
           </a:prstGeom>
           <a:solidFill>
-            <a:srgbClr val="FCE7F3"/>
-          </a:solidFill>
-          <a:ln w="19050">
-            <a:solidFill>
-              <a:srgbClr val="DB2777"/>
-            </a:solidFill>
-            <a:prstDash val="solid"/>
-          </a:ln>
-          <a:effectLst>
-            <a:outerShdw sx="100000" sy="100000" kx="0" ky="0" algn="bl" rotWithShape="0" blurRad="101600" dist="38100" dir="8100000">
-              <a:srgbClr val="000000">
-                <a:alpha val="12000"/>
-              </a:srgbClr>
-            </a:outerShdw>
-          </a:effectLst>
-        </p:spPr>
-      </p:sp>
-      <p:sp>
-        <p:nvSpPr>
-          <p:cNvPr id="26" name="Text 24"/>
-          <p:cNvSpPr/>
-          <p:nvPr/>
-        </p:nvSpPr>
-        <p:spPr>
-          <a:xfrm>
-            <a:off x="6998818" y="2258568"/>
-            <a:ext cx="1581912" cy="292608"/>
-          </a:xfrm>
-          <a:prstGeom prst="rect">
-            <a:avLst/>
-          </a:prstGeom>
-          <a:noFill/>
-          <a:ln/>
-        </p:spPr>
-        <p:txBody>
-          <a:bodyPr wrap="square" lIns="0" tIns="0" rIns="0" bIns="0" rtlCol="0" anchor="ctr"/>
-          <a:lstStyle/>
-          <a:p>
-            <a:pPr algn="ctr" indent="0" marL="0">
-              <a:buNone/>
-            </a:pPr>
-            <a:r>
-              <a:rPr lang="en-US" sz="1300" b="1" dirty="0">
-                <a:solidFill>
-                  <a:srgbClr val="9D174D"/>
+            <a:srgbClr val="E2E8F0"/>
+          </a:solidFill>
+          <a:ln w="12700">
+            <a:solidFill>
+              <a:srgbClr val="E2E8F0"/>
+            </a:solidFill>
+            <a:prstDash val="solid"/>
+          </a:ln>
+        </p:spPr>
+      </p:sp>
+      <p:sp>
+        <p:nvSpPr>
+          <p:cNvPr id="27" name="Text 25"/>
+          <p:cNvSpPr/>
+          <p:nvPr/>
+        </p:nvSpPr>
+        <p:spPr>
+          <a:xfrm>
+            <a:off x="365760" y="3273552"/>
+            <a:ext cx="1371600" cy="658368"/>
+          </a:xfrm>
+          <a:prstGeom prst="rect">
+            <a:avLst/>
+          </a:prstGeom>
+          <a:noFill/>
+          <a:ln/>
+        </p:spPr>
+        <p:txBody>
+          <a:bodyPr wrap="square" lIns="0" tIns="0" rIns="0" bIns="0" rtlCol="0" anchor="ctr"/>
+          <a:lstStyle/>
+          <a:p>
+            <a:pPr algn="ctr" indent="0" marL="0">
+              <a:buNone/>
+            </a:pPr>
+            <a:r>
+              <a:rPr lang="en-US" sz="1100" b="1" dirty="0">
+                <a:solidFill>
+                  <a:srgbClr val="475569"/>
                 </a:solidFill>
                 <a:latin typeface="Trebuchet MS" pitchFamily="34" charset="0"/>
                 <a:ea typeface="Trebuchet MS" pitchFamily="34" charset="-122"/>
                 <a:cs typeface="Trebuchet MS" pitchFamily="34" charset="-120"/>
               </a:rPr>
-              <a:t>ium</a:t>
-            </a:r>
-            <a:endParaRPr lang="en-US" sz="1300" dirty="0"/>
-          </a:p>
-        </p:txBody>
-      </p:sp>
-      <p:sp>
-        <p:nvSpPr>
-          <p:cNvPr id="27" name="Text 25"/>
-          <p:cNvSpPr/>
-          <p:nvPr/>
-        </p:nvSpPr>
-        <p:spPr>
-          <a:xfrm>
-            <a:off x="6998818" y="2569464"/>
-            <a:ext cx="1581912" cy="201168"/>
+              <a:t>Syllables</a:t>
+            </a:r>
+            <a:endParaRPr lang="en-US" sz="1100" dirty="0"/>
+          </a:p>
+        </p:txBody>
+      </p:sp>
+      <p:sp>
+        <p:nvSpPr>
+          <p:cNvPr id="28" name="Shape 26"/>
+          <p:cNvSpPr/>
+          <p:nvPr/>
+        </p:nvSpPr>
+        <p:spPr>
+          <a:xfrm>
+            <a:off x="1874520" y="3273552"/>
+            <a:ext cx="6903720" cy="658368"/>
+          </a:xfrm>
+          <a:prstGeom prst="rect">
+            <a:avLst>
+              <a:gd name="adj" fmla="val 8333"/>
+            </a:avLst>
+          </a:prstGeom>
+          <a:solidFill>
+            <a:srgbClr val="CCFBF1"/>
+          </a:solidFill>
+          <a:ln w="12700">
+            <a:solidFill>
+              <a:srgbClr val="0D9488"/>
+            </a:solidFill>
+            <a:prstDash val="solid"/>
+          </a:ln>
+        </p:spPr>
+      </p:sp>
+      <p:sp>
+        <p:nvSpPr>
+          <p:cNvPr id="29" name="Shape 27"/>
+          <p:cNvSpPr/>
+          <p:nvPr/>
+        </p:nvSpPr>
+        <p:spPr>
+          <a:xfrm>
+            <a:off x="2313432" y="3364992"/>
+            <a:ext cx="1645920" cy="475488"/>
+          </a:xfrm>
+          <a:prstGeom prst="rect">
+            <a:avLst>
+              <a:gd name="adj" fmla="val 9615"/>
+            </a:avLst>
+          </a:prstGeom>
+          <a:solidFill>
+            <a:srgbClr val="FFFFFF"/>
+          </a:solidFill>
+          <a:ln w="12700">
+            <a:solidFill>
+              <a:srgbClr val="0D9488"/>
+            </a:solidFill>
+            <a:prstDash val="solid"/>
+          </a:ln>
+        </p:spPr>
+      </p:sp>
+      <p:sp>
+        <p:nvSpPr>
+          <p:cNvPr id="30" name="Text 28"/>
+          <p:cNvSpPr/>
+          <p:nvPr/>
+        </p:nvSpPr>
+        <p:spPr>
+          <a:xfrm>
+            <a:off x="2313432" y="3364992"/>
+            <a:ext cx="1645920" cy="475488"/>
+          </a:xfrm>
+          <a:prstGeom prst="rect">
+            <a:avLst/>
+          </a:prstGeom>
+          <a:noFill/>
+          <a:ln/>
+        </p:spPr>
+        <p:txBody>
+          <a:bodyPr wrap="square" lIns="0" tIns="0" rIns="0" bIns="0" rtlCol="0" anchor="ctr"/>
+          <a:lstStyle/>
+          <a:p>
+            <a:pPr algn="ctr" indent="0" marL="0">
+              <a:buNone/>
+            </a:pPr>
+            <a:r>
+              <a:rPr lang="en-US" sz="1400" b="1" dirty="0">
+                <a:solidFill>
+                  <a:srgbClr val="0D9488"/>
+                </a:solidFill>
+                <a:latin typeface="Trebuchet MS" pitchFamily="34" charset="0"/>
+                <a:ea typeface="Trebuchet MS" pitchFamily="34" charset="-122"/>
+                <a:cs typeface="Trebuchet MS" pitchFamily="34" charset="-120"/>
+              </a:rPr>
+              <a:t>au</a:t>
+            </a:r>
+            <a:endParaRPr lang="en-US" sz="1400" dirty="0"/>
+          </a:p>
+        </p:txBody>
+      </p:sp>
+      <p:sp>
+        <p:nvSpPr>
+          <p:cNvPr id="31" name="Text 29"/>
+          <p:cNvSpPr/>
+          <p:nvPr/>
+        </p:nvSpPr>
+        <p:spPr>
+          <a:xfrm>
+            <a:off x="3959352" y="3364992"/>
+            <a:ext cx="411480" cy="475488"/>
+          </a:xfrm>
+          <a:prstGeom prst="rect">
+            <a:avLst/>
+          </a:prstGeom>
+          <a:noFill/>
+          <a:ln/>
+        </p:spPr>
+        <p:txBody>
+          <a:bodyPr wrap="square" lIns="0" tIns="0" rIns="0" bIns="0" rtlCol="0" anchor="ctr"/>
+          <a:lstStyle/>
+          <a:p>
+            <a:pPr algn="ctr" indent="0" marL="0">
+              <a:buNone/>
+            </a:pPr>
+            <a:r>
+              <a:rPr lang="en-US" sz="1600" b="1" dirty="0">
+                <a:solidFill>
+                  <a:srgbClr val="0D9488"/>
+                </a:solidFill>
+                <a:latin typeface="Trebuchet MS" pitchFamily="34" charset="0"/>
+                <a:ea typeface="Trebuchet MS" pitchFamily="34" charset="-122"/>
+                <a:cs typeface="Trebuchet MS" pitchFamily="34" charset="-120"/>
+              </a:rPr>
+              <a:t>·</a:t>
+            </a:r>
+            <a:endParaRPr lang="en-US" sz="1600" dirty="0"/>
+          </a:p>
+        </p:txBody>
+      </p:sp>
+      <p:sp>
+        <p:nvSpPr>
+          <p:cNvPr id="32" name="Shape 30"/>
+          <p:cNvSpPr/>
+          <p:nvPr/>
+        </p:nvSpPr>
+        <p:spPr>
+          <a:xfrm>
+            <a:off x="4370832" y="3364992"/>
+            <a:ext cx="1645920" cy="475488"/>
+          </a:xfrm>
+          <a:prstGeom prst="rect">
+            <a:avLst>
+              <a:gd name="adj" fmla="val 9615"/>
+            </a:avLst>
+          </a:prstGeom>
+          <a:solidFill>
+            <a:srgbClr val="FFFFFF"/>
+          </a:solidFill>
+          <a:ln w="12700">
+            <a:solidFill>
+              <a:srgbClr val="0D9488"/>
+            </a:solidFill>
+            <a:prstDash val="solid"/>
+          </a:ln>
+        </p:spPr>
+      </p:sp>
+      <p:sp>
+        <p:nvSpPr>
+          <p:cNvPr id="33" name="Text 31"/>
+          <p:cNvSpPr/>
+          <p:nvPr/>
+        </p:nvSpPr>
+        <p:spPr>
+          <a:xfrm>
+            <a:off x="4370832" y="3364992"/>
+            <a:ext cx="1645920" cy="475488"/>
+          </a:xfrm>
+          <a:prstGeom prst="rect">
+            <a:avLst/>
+          </a:prstGeom>
+          <a:noFill/>
+          <a:ln/>
+        </p:spPr>
+        <p:txBody>
+          <a:bodyPr wrap="square" lIns="0" tIns="0" rIns="0" bIns="0" rtlCol="0" anchor="ctr"/>
+          <a:lstStyle/>
+          <a:p>
+            <a:pPr algn="ctr" indent="0" marL="0">
+              <a:buNone/>
+            </a:pPr>
+            <a:r>
+              <a:rPr lang="en-US" sz="1400" b="1" dirty="0">
+                <a:solidFill>
+                  <a:srgbClr val="0D9488"/>
+                </a:solidFill>
+                <a:latin typeface="Trebuchet MS" pitchFamily="34" charset="0"/>
+                <a:ea typeface="Trebuchet MS" pitchFamily="34" charset="-122"/>
+                <a:cs typeface="Trebuchet MS" pitchFamily="34" charset="-120"/>
+              </a:rPr>
+              <a:t>di</a:t>
+            </a:r>
+            <a:endParaRPr lang="en-US" sz="1400" dirty="0"/>
+          </a:p>
+        </p:txBody>
+      </p:sp>
+      <p:sp>
+        <p:nvSpPr>
+          <p:cNvPr id="34" name="Text 32"/>
+          <p:cNvSpPr/>
+          <p:nvPr/>
+        </p:nvSpPr>
+        <p:spPr>
+          <a:xfrm>
+            <a:off x="6016752" y="3364992"/>
+            <a:ext cx="411480" cy="475488"/>
+          </a:xfrm>
+          <a:prstGeom prst="rect">
+            <a:avLst/>
+          </a:prstGeom>
+          <a:noFill/>
+          <a:ln/>
+        </p:spPr>
+        <p:txBody>
+          <a:bodyPr wrap="square" lIns="0" tIns="0" rIns="0" bIns="0" rtlCol="0" anchor="ctr"/>
+          <a:lstStyle/>
+          <a:p>
+            <a:pPr algn="ctr" indent="0" marL="0">
+              <a:buNone/>
+            </a:pPr>
+            <a:r>
+              <a:rPr lang="en-US" sz="1600" b="1" dirty="0">
+                <a:solidFill>
+                  <a:srgbClr val="0D9488"/>
+                </a:solidFill>
+                <a:latin typeface="Trebuchet MS" pitchFamily="34" charset="0"/>
+                <a:ea typeface="Trebuchet MS" pitchFamily="34" charset="-122"/>
+                <a:cs typeface="Trebuchet MS" pitchFamily="34" charset="-120"/>
+              </a:rPr>
+              <a:t>·</a:t>
+            </a:r>
+            <a:endParaRPr lang="en-US" sz="1600" dirty="0"/>
+          </a:p>
+        </p:txBody>
+      </p:sp>
+      <p:sp>
+        <p:nvSpPr>
+          <p:cNvPr id="35" name="Shape 33"/>
+          <p:cNvSpPr/>
+          <p:nvPr/>
+        </p:nvSpPr>
+        <p:spPr>
+          <a:xfrm>
+            <a:off x="6428232" y="3364992"/>
+            <a:ext cx="1645920" cy="475488"/>
+          </a:xfrm>
+          <a:prstGeom prst="rect">
+            <a:avLst>
+              <a:gd name="adj" fmla="val 9615"/>
+            </a:avLst>
+          </a:prstGeom>
+          <a:solidFill>
+            <a:srgbClr val="FFFFFF"/>
+          </a:solidFill>
+          <a:ln w="12700">
+            <a:solidFill>
+              <a:srgbClr val="0D9488"/>
+            </a:solidFill>
+            <a:prstDash val="solid"/>
+          </a:ln>
+        </p:spPr>
+      </p:sp>
+      <p:sp>
+        <p:nvSpPr>
+          <p:cNvPr id="36" name="Text 34"/>
+          <p:cNvSpPr/>
+          <p:nvPr/>
+        </p:nvSpPr>
+        <p:spPr>
+          <a:xfrm>
+            <a:off x="6428232" y="3364992"/>
+            <a:ext cx="1645920" cy="475488"/>
+          </a:xfrm>
+          <a:prstGeom prst="rect">
+            <a:avLst/>
+          </a:prstGeom>
+          <a:noFill/>
+          <a:ln/>
+        </p:spPr>
+        <p:txBody>
+          <a:bodyPr wrap="square" lIns="0" tIns="0" rIns="0" bIns="0" rtlCol="0" anchor="ctr"/>
+          <a:lstStyle/>
+          <a:p>
+            <a:pPr algn="ctr" indent="0" marL="0">
+              <a:buNone/>
+            </a:pPr>
+            <a:r>
+              <a:rPr lang="en-US" sz="1400" b="1" dirty="0">
+                <a:solidFill>
+                  <a:srgbClr val="0D9488"/>
+                </a:solidFill>
+                <a:latin typeface="Trebuchet MS" pitchFamily="34" charset="0"/>
+                <a:ea typeface="Trebuchet MS" pitchFamily="34" charset="-122"/>
+                <a:cs typeface="Trebuchet MS" pitchFamily="34" charset="-120"/>
+              </a:rPr>
+              <a:t>ence</a:t>
+            </a:r>
+            <a:endParaRPr lang="en-US" sz="1400" dirty="0"/>
+          </a:p>
+        </p:txBody>
+      </p:sp>
+      <p:sp>
+        <p:nvSpPr>
+          <p:cNvPr id="37" name="Shape 35"/>
+          <p:cNvSpPr/>
+          <p:nvPr/>
+        </p:nvSpPr>
+        <p:spPr>
+          <a:xfrm>
+            <a:off x="365760" y="4096512"/>
+            <a:ext cx="1371600" cy="804672"/>
+          </a:xfrm>
+          <a:prstGeom prst="rect">
+            <a:avLst>
+              <a:gd name="adj" fmla="val 6818"/>
+            </a:avLst>
+          </a:prstGeom>
+          <a:solidFill>
+            <a:srgbClr val="E2E8F0"/>
+          </a:solidFill>
+          <a:ln w="12700">
+            <a:solidFill>
+              <a:srgbClr val="E2E8F0"/>
+            </a:solidFill>
+            <a:prstDash val="solid"/>
+          </a:ln>
+        </p:spPr>
+      </p:sp>
+      <p:sp>
+        <p:nvSpPr>
+          <p:cNvPr id="38" name="Text 36"/>
+          <p:cNvSpPr/>
+          <p:nvPr/>
+        </p:nvSpPr>
+        <p:spPr>
+          <a:xfrm>
+            <a:off x="365760" y="4096512"/>
+            <a:ext cx="1371600" cy="804672"/>
+          </a:xfrm>
+          <a:prstGeom prst="rect">
+            <a:avLst/>
+          </a:prstGeom>
+          <a:noFill/>
+          <a:ln/>
+        </p:spPr>
+        <p:txBody>
+          <a:bodyPr wrap="square" lIns="0" tIns="0" rIns="0" bIns="0" rtlCol="0" anchor="ctr"/>
+          <a:lstStyle/>
+          <a:p>
+            <a:pPr algn="ctr" indent="0" marL="0">
+              <a:buNone/>
+            </a:pPr>
+            <a:r>
+              <a:rPr lang="en-US" sz="1100" b="1" dirty="0">
+                <a:solidFill>
+                  <a:srgbClr val="475569"/>
+                </a:solidFill>
+                <a:latin typeface="Trebuchet MS" pitchFamily="34" charset="0"/>
+                <a:ea typeface="Trebuchet MS" pitchFamily="34" charset="-122"/>
+                <a:cs typeface="Trebuchet MS" pitchFamily="34" charset="-120"/>
+              </a:rPr>
+              <a:t>Phonemes</a:t>
+            </a:r>
+            <a:endParaRPr lang="en-US" sz="1100" dirty="0"/>
+          </a:p>
+        </p:txBody>
+      </p:sp>
+      <p:sp>
+        <p:nvSpPr>
+          <p:cNvPr id="39" name="Shape 37"/>
+          <p:cNvSpPr/>
+          <p:nvPr/>
+        </p:nvSpPr>
+        <p:spPr>
+          <a:xfrm>
+            <a:off x="1874520" y="4096512"/>
+            <a:ext cx="6903720" cy="804672"/>
+          </a:xfrm>
+          <a:prstGeom prst="rect">
+            <a:avLst>
+              <a:gd name="adj" fmla="val 6818"/>
+            </a:avLst>
+          </a:prstGeom>
+          <a:solidFill>
+            <a:srgbClr val="FCE7F3"/>
+          </a:solidFill>
+          <a:ln w="12700">
+            <a:solidFill>
+              <a:srgbClr val="DB2777"/>
+            </a:solidFill>
+            <a:prstDash val="solid"/>
+          </a:ln>
+        </p:spPr>
+      </p:sp>
+      <p:sp>
+        <p:nvSpPr>
+          <p:cNvPr id="40" name="Shape 38"/>
+          <p:cNvSpPr/>
+          <p:nvPr/>
+        </p:nvSpPr>
+        <p:spPr>
+          <a:xfrm>
+            <a:off x="2254649" y="4169664"/>
+            <a:ext cx="685800" cy="384048"/>
+          </a:xfrm>
+          <a:prstGeom prst="rect">
+            <a:avLst>
+              <a:gd name="adj" fmla="val 9524"/>
+            </a:avLst>
+          </a:prstGeom>
+          <a:solidFill>
+            <a:srgbClr val="FFFFFF"/>
+          </a:solidFill>
+          <a:ln w="12700">
+            <a:solidFill>
+              <a:srgbClr val="DB2777"/>
+            </a:solidFill>
+            <a:prstDash val="solid"/>
+          </a:ln>
+        </p:spPr>
+      </p:sp>
+      <p:sp>
+        <p:nvSpPr>
+          <p:cNvPr id="41" name="Text 39"/>
+          <p:cNvSpPr/>
+          <p:nvPr/>
+        </p:nvSpPr>
+        <p:spPr>
+          <a:xfrm>
+            <a:off x="2254649" y="4169664"/>
+            <a:ext cx="685800" cy="384048"/>
+          </a:xfrm>
+          <a:prstGeom prst="rect">
+            <a:avLst/>
+          </a:prstGeom>
+          <a:noFill/>
+          <a:ln/>
+        </p:spPr>
+        <p:txBody>
+          <a:bodyPr wrap="square" lIns="0" tIns="0" rIns="0" bIns="0" rtlCol="0" anchor="ctr"/>
+          <a:lstStyle/>
+          <a:p>
+            <a:pPr algn="ctr" indent="0" marL="0">
+              <a:buNone/>
+            </a:pPr>
+            <a:r>
+              <a:rPr lang="en-US" sz="900" b="1" dirty="0">
+                <a:solidFill>
+                  <a:srgbClr val="9D174D"/>
+                </a:solidFill>
+                <a:latin typeface="Trebuchet MS" pitchFamily="34" charset="0"/>
+                <a:ea typeface="Trebuchet MS" pitchFamily="34" charset="-122"/>
+                <a:cs typeface="Trebuchet MS" pitchFamily="34" charset="-120"/>
+              </a:rPr>
+              <a:t>au</a:t>
+            </a:r>
+            <a:endParaRPr lang="en-US" sz="900" dirty="0"/>
+          </a:p>
+        </p:txBody>
+      </p:sp>
+      <p:sp>
+        <p:nvSpPr>
+          <p:cNvPr id="42" name="Shape 40"/>
+          <p:cNvSpPr/>
+          <p:nvPr/>
+        </p:nvSpPr>
+        <p:spPr>
+          <a:xfrm>
+            <a:off x="3293146" y="4169664"/>
+            <a:ext cx="685800" cy="384048"/>
+          </a:xfrm>
+          <a:prstGeom prst="rect">
+            <a:avLst>
+              <a:gd name="adj" fmla="val 9524"/>
+            </a:avLst>
+          </a:prstGeom>
+          <a:solidFill>
+            <a:srgbClr val="FFFFFF"/>
+          </a:solidFill>
+          <a:ln w="12700">
+            <a:solidFill>
+              <a:srgbClr val="DB2777"/>
+            </a:solidFill>
+            <a:prstDash val="solid"/>
+          </a:ln>
+        </p:spPr>
+      </p:sp>
+      <p:sp>
+        <p:nvSpPr>
+          <p:cNvPr id="43" name="Text 41"/>
+          <p:cNvSpPr/>
+          <p:nvPr/>
+        </p:nvSpPr>
+        <p:spPr>
+          <a:xfrm>
+            <a:off x="3293146" y="4169664"/>
+            <a:ext cx="685800" cy="384048"/>
+          </a:xfrm>
+          <a:prstGeom prst="rect">
+            <a:avLst/>
+          </a:prstGeom>
+          <a:noFill/>
+          <a:ln/>
+        </p:spPr>
+        <p:txBody>
+          <a:bodyPr wrap="square" lIns="0" tIns="0" rIns="0" bIns="0" rtlCol="0" anchor="ctr"/>
+          <a:lstStyle/>
+          <a:p>
+            <a:pPr algn="ctr" indent="0" marL="0">
+              <a:buNone/>
+            </a:pPr>
+            <a:r>
+              <a:rPr lang="en-US" sz="900" b="1" dirty="0">
+                <a:solidFill>
+                  <a:srgbClr val="9D174D"/>
+                </a:solidFill>
+                <a:latin typeface="Trebuchet MS" pitchFamily="34" charset="0"/>
+                <a:ea typeface="Trebuchet MS" pitchFamily="34" charset="-122"/>
+                <a:cs typeface="Trebuchet MS" pitchFamily="34" charset="-120"/>
+              </a:rPr>
+              <a:t>d</a:t>
+            </a:r>
+            <a:endParaRPr lang="en-US" sz="900" dirty="0"/>
+          </a:p>
+        </p:txBody>
+      </p:sp>
+      <p:sp>
+        <p:nvSpPr>
+          <p:cNvPr id="44" name="Shape 42"/>
+          <p:cNvSpPr/>
+          <p:nvPr/>
+        </p:nvSpPr>
+        <p:spPr>
+          <a:xfrm>
+            <a:off x="4331643" y="4169664"/>
+            <a:ext cx="685800" cy="384048"/>
+          </a:xfrm>
+          <a:prstGeom prst="rect">
+            <a:avLst>
+              <a:gd name="adj" fmla="val 9524"/>
+            </a:avLst>
+          </a:prstGeom>
+          <a:solidFill>
+            <a:srgbClr val="FFFFFF"/>
+          </a:solidFill>
+          <a:ln w="12700">
+            <a:solidFill>
+              <a:srgbClr val="DB2777"/>
+            </a:solidFill>
+            <a:prstDash val="solid"/>
+          </a:ln>
+        </p:spPr>
+      </p:sp>
+      <p:sp>
+        <p:nvSpPr>
+          <p:cNvPr id="45" name="Text 43"/>
+          <p:cNvSpPr/>
+          <p:nvPr/>
+        </p:nvSpPr>
+        <p:spPr>
+          <a:xfrm>
+            <a:off x="4331643" y="4169664"/>
+            <a:ext cx="685800" cy="384048"/>
+          </a:xfrm>
+          <a:prstGeom prst="rect">
+            <a:avLst/>
+          </a:prstGeom>
+          <a:noFill/>
+          <a:ln/>
+        </p:spPr>
+        <p:txBody>
+          <a:bodyPr wrap="square" lIns="0" tIns="0" rIns="0" bIns="0" rtlCol="0" anchor="ctr"/>
+          <a:lstStyle/>
+          <a:p>
+            <a:pPr algn="ctr" indent="0" marL="0">
+              <a:buNone/>
+            </a:pPr>
+            <a:r>
+              <a:rPr lang="en-US" sz="900" b="1" dirty="0">
+                <a:solidFill>
+                  <a:srgbClr val="9D174D"/>
+                </a:solidFill>
+                <a:latin typeface="Trebuchet MS" pitchFamily="34" charset="0"/>
+                <a:ea typeface="Trebuchet MS" pitchFamily="34" charset="-122"/>
+                <a:cs typeface="Trebuchet MS" pitchFamily="34" charset="-120"/>
+              </a:rPr>
+              <a:t>i</a:t>
+            </a:r>
+            <a:endParaRPr lang="en-US" sz="900" dirty="0"/>
+          </a:p>
+        </p:txBody>
+      </p:sp>
+      <p:sp>
+        <p:nvSpPr>
+          <p:cNvPr id="46" name="Shape 44"/>
+          <p:cNvSpPr/>
+          <p:nvPr/>
+        </p:nvSpPr>
+        <p:spPr>
+          <a:xfrm>
+            <a:off x="5370141" y="4169664"/>
+            <a:ext cx="685800" cy="384048"/>
+          </a:xfrm>
+          <a:prstGeom prst="rect">
+            <a:avLst>
+              <a:gd name="adj" fmla="val 9524"/>
+            </a:avLst>
+          </a:prstGeom>
+          <a:solidFill>
+            <a:srgbClr val="FFFFFF"/>
+          </a:solidFill>
+          <a:ln w="12700">
+            <a:solidFill>
+              <a:srgbClr val="DB2777"/>
+            </a:solidFill>
+            <a:prstDash val="solid"/>
+          </a:ln>
+        </p:spPr>
+      </p:sp>
+      <p:sp>
+        <p:nvSpPr>
+          <p:cNvPr id="47" name="Text 45"/>
+          <p:cNvSpPr/>
+          <p:nvPr/>
+        </p:nvSpPr>
+        <p:spPr>
+          <a:xfrm>
+            <a:off x="5370141" y="4169664"/>
+            <a:ext cx="685800" cy="384048"/>
+          </a:xfrm>
+          <a:prstGeom prst="rect">
+            <a:avLst/>
+          </a:prstGeom>
+          <a:noFill/>
+          <a:ln/>
+        </p:spPr>
+        <p:txBody>
+          <a:bodyPr wrap="square" lIns="0" tIns="0" rIns="0" bIns="0" rtlCol="0" anchor="ctr"/>
+          <a:lstStyle/>
+          <a:p>
+            <a:pPr algn="ctr" indent="0" marL="0">
+              <a:buNone/>
+            </a:pPr>
+            <a:r>
+              <a:rPr lang="en-US" sz="900" b="1" dirty="0">
+                <a:solidFill>
+                  <a:srgbClr val="9D174D"/>
+                </a:solidFill>
+                <a:latin typeface="Trebuchet MS" pitchFamily="34" charset="0"/>
+                <a:ea typeface="Trebuchet MS" pitchFamily="34" charset="-122"/>
+                <a:cs typeface="Trebuchet MS" pitchFamily="34" charset="-120"/>
+              </a:rPr>
+              <a:t>e</a:t>
+            </a:r>
+            <a:endParaRPr lang="en-US" sz="900" dirty="0"/>
+          </a:p>
+        </p:txBody>
+      </p:sp>
+      <p:sp>
+        <p:nvSpPr>
+          <p:cNvPr id="48" name="Shape 46"/>
+          <p:cNvSpPr/>
+          <p:nvPr/>
+        </p:nvSpPr>
+        <p:spPr>
+          <a:xfrm>
+            <a:off x="6408638" y="4169664"/>
+            <a:ext cx="685800" cy="384048"/>
+          </a:xfrm>
+          <a:prstGeom prst="rect">
+            <a:avLst>
+              <a:gd name="adj" fmla="val 9524"/>
+            </a:avLst>
+          </a:prstGeom>
+          <a:solidFill>
+            <a:srgbClr val="FFFFFF"/>
+          </a:solidFill>
+          <a:ln w="12700">
+            <a:solidFill>
+              <a:srgbClr val="DB2777"/>
+            </a:solidFill>
+            <a:prstDash val="solid"/>
+          </a:ln>
+        </p:spPr>
+      </p:sp>
+      <p:sp>
+        <p:nvSpPr>
+          <p:cNvPr id="49" name="Text 47"/>
+          <p:cNvSpPr/>
+          <p:nvPr/>
+        </p:nvSpPr>
+        <p:spPr>
+          <a:xfrm>
+            <a:off x="6408638" y="4169664"/>
+            <a:ext cx="685800" cy="384048"/>
+          </a:xfrm>
+          <a:prstGeom prst="rect">
+            <a:avLst/>
+          </a:prstGeom>
+          <a:noFill/>
+          <a:ln/>
+        </p:spPr>
+        <p:txBody>
+          <a:bodyPr wrap="square" lIns="0" tIns="0" rIns="0" bIns="0" rtlCol="0" anchor="ctr"/>
+          <a:lstStyle/>
+          <a:p>
+            <a:pPr algn="ctr" indent="0" marL="0">
+              <a:buNone/>
+            </a:pPr>
+            <a:r>
+              <a:rPr lang="en-US" sz="900" b="1" dirty="0">
+                <a:solidFill>
+                  <a:srgbClr val="9D174D"/>
+                </a:solidFill>
+                <a:latin typeface="Trebuchet MS" pitchFamily="34" charset="0"/>
+                <a:ea typeface="Trebuchet MS" pitchFamily="34" charset="-122"/>
+                <a:cs typeface="Trebuchet MS" pitchFamily="34" charset="-120"/>
+              </a:rPr>
+              <a:t>n</a:t>
+            </a:r>
+            <a:endParaRPr lang="en-US" sz="900" dirty="0"/>
+          </a:p>
+        </p:txBody>
+      </p:sp>
+      <p:sp>
+        <p:nvSpPr>
+          <p:cNvPr id="50" name="Shape 48"/>
+          <p:cNvSpPr/>
+          <p:nvPr/>
+        </p:nvSpPr>
+        <p:spPr>
+          <a:xfrm>
+            <a:off x="7447135" y="4169664"/>
+            <a:ext cx="685800" cy="384048"/>
+          </a:xfrm>
+          <a:prstGeom prst="rect">
+            <a:avLst>
+              <a:gd name="adj" fmla="val 9524"/>
+            </a:avLst>
+          </a:prstGeom>
+          <a:solidFill>
+            <a:srgbClr val="FFFFFF"/>
+          </a:solidFill>
+          <a:ln w="12700">
+            <a:solidFill>
+              <a:srgbClr val="DB2777"/>
+            </a:solidFill>
+            <a:prstDash val="solid"/>
+          </a:ln>
+        </p:spPr>
+      </p:sp>
+      <p:sp>
+        <p:nvSpPr>
+          <p:cNvPr id="51" name="Text 49"/>
+          <p:cNvSpPr/>
+          <p:nvPr/>
+        </p:nvSpPr>
+        <p:spPr>
+          <a:xfrm>
+            <a:off x="7447135" y="4169664"/>
+            <a:ext cx="685800" cy="384048"/>
+          </a:xfrm>
+          <a:prstGeom prst="rect">
+            <a:avLst/>
+          </a:prstGeom>
+          <a:noFill/>
+          <a:ln/>
+        </p:spPr>
+        <p:txBody>
+          <a:bodyPr wrap="square" lIns="0" tIns="0" rIns="0" bIns="0" rtlCol="0" anchor="ctr"/>
+          <a:lstStyle/>
+          <a:p>
+            <a:pPr algn="ctr" indent="0" marL="0">
+              <a:buNone/>
+            </a:pPr>
+            <a:r>
+              <a:rPr lang="en-US" sz="900" b="1" dirty="0">
+                <a:solidFill>
+                  <a:srgbClr val="9D174D"/>
+                </a:solidFill>
+                <a:latin typeface="Trebuchet MS" pitchFamily="34" charset="0"/>
+                <a:ea typeface="Trebuchet MS" pitchFamily="34" charset="-122"/>
+                <a:cs typeface="Trebuchet MS" pitchFamily="34" charset="-120"/>
+              </a:rPr>
+              <a:t>ce</a:t>
+            </a:r>
+            <a:endParaRPr lang="en-US" sz="900" dirty="0"/>
+          </a:p>
+        </p:txBody>
+      </p:sp>
+      <p:sp>
+        <p:nvSpPr>
+          <p:cNvPr id="52" name="Text 50"/>
+          <p:cNvSpPr/>
+          <p:nvPr/>
+        </p:nvSpPr>
+        <p:spPr>
+          <a:xfrm>
+            <a:off x="7447135" y="4572000"/>
+            <a:ext cx="685800" cy="219456"/>
           </a:xfrm>
           <a:prstGeom prst="rect">
             <a:avLst/>
@@ -16306,1217 +16774,17 @@
               <a:buNone/>
             </a:pPr>
             <a:r>
-              <a:rPr lang="en-US" sz="850" dirty="0">
-                <a:solidFill>
-                  <a:srgbClr val="475569"/>
+              <a:rPr lang="en-US" sz="750" i="1" dirty="0">
+                <a:solidFill>
+                  <a:srgbClr val="94A3B8"/>
                 </a:solidFill>
                 <a:latin typeface="Calibri" pitchFamily="34" charset="0"/>
                 <a:ea typeface="Calibri" pitchFamily="34" charset="-122"/>
                 <a:cs typeface="Calibri" pitchFamily="34" charset="-120"/>
               </a:rPr>
-              <a:t>place or space</a:t>
-            </a:r>
-            <a:endParaRPr lang="en-US" sz="850" dirty="0"/>
-          </a:p>
-        </p:txBody>
-      </p:sp>
-      <p:sp>
-        <p:nvSpPr>
-          <p:cNvPr id="28" name="Shape 26"/>
-          <p:cNvSpPr/>
-          <p:nvPr/>
-        </p:nvSpPr>
-        <p:spPr>
-          <a:xfrm>
-            <a:off x="365760" y="3273552"/>
-            <a:ext cx="1371600" cy="658368"/>
-          </a:xfrm>
-          <a:prstGeom prst="rect">
-            <a:avLst>
-              <a:gd name="adj" fmla="val 8333"/>
-            </a:avLst>
-          </a:prstGeom>
-          <a:solidFill>
-            <a:srgbClr val="E2E8F0"/>
-          </a:solidFill>
-          <a:ln w="12700">
-            <a:solidFill>
-              <a:srgbClr val="E2E8F0"/>
-            </a:solidFill>
-            <a:prstDash val="solid"/>
-          </a:ln>
-        </p:spPr>
-      </p:sp>
-      <p:sp>
-        <p:nvSpPr>
-          <p:cNvPr id="29" name="Text 27"/>
-          <p:cNvSpPr/>
-          <p:nvPr/>
-        </p:nvSpPr>
-        <p:spPr>
-          <a:xfrm>
-            <a:off x="365760" y="3273552"/>
-            <a:ext cx="1371600" cy="658368"/>
-          </a:xfrm>
-          <a:prstGeom prst="rect">
-            <a:avLst/>
-          </a:prstGeom>
-          <a:noFill/>
-          <a:ln/>
-        </p:spPr>
-        <p:txBody>
-          <a:bodyPr wrap="square" lIns="0" tIns="0" rIns="0" bIns="0" rtlCol="0" anchor="ctr"/>
-          <a:lstStyle/>
-          <a:p>
-            <a:pPr algn="ctr" indent="0" marL="0">
-              <a:buNone/>
-            </a:pPr>
-            <a:r>
-              <a:rPr lang="en-US" sz="1100" b="1" dirty="0">
-                <a:solidFill>
-                  <a:srgbClr val="475569"/>
-                </a:solidFill>
-                <a:latin typeface="Trebuchet MS" pitchFamily="34" charset="0"/>
-                <a:ea typeface="Trebuchet MS" pitchFamily="34" charset="-122"/>
-                <a:cs typeface="Trebuchet MS" pitchFamily="34" charset="-120"/>
-              </a:rPr>
-              <a:t>Syllables</a:t>
-            </a:r>
-            <a:endParaRPr lang="en-US" sz="1100" dirty="0"/>
-          </a:p>
-        </p:txBody>
-      </p:sp>
-      <p:sp>
-        <p:nvSpPr>
-          <p:cNvPr id="30" name="Shape 28"/>
-          <p:cNvSpPr/>
-          <p:nvPr/>
-        </p:nvSpPr>
-        <p:spPr>
-          <a:xfrm>
-            <a:off x="1874520" y="3273552"/>
-            <a:ext cx="6903720" cy="658368"/>
-          </a:xfrm>
-          <a:prstGeom prst="rect">
-            <a:avLst>
-              <a:gd name="adj" fmla="val 8333"/>
-            </a:avLst>
-          </a:prstGeom>
-          <a:solidFill>
-            <a:srgbClr val="CCFBF1"/>
-          </a:solidFill>
-          <a:ln w="12700">
-            <a:solidFill>
-              <a:srgbClr val="0D9488"/>
-            </a:solidFill>
-            <a:prstDash val="solid"/>
-          </a:ln>
-        </p:spPr>
-      </p:sp>
-      <p:sp>
-        <p:nvSpPr>
-          <p:cNvPr id="31" name="Shape 29"/>
-          <p:cNvSpPr/>
-          <p:nvPr/>
-        </p:nvSpPr>
-        <p:spPr>
-          <a:xfrm>
-            <a:off x="1978152" y="3364992"/>
-            <a:ext cx="1225296" cy="475488"/>
-          </a:xfrm>
-          <a:prstGeom prst="rect">
-            <a:avLst>
-              <a:gd name="adj" fmla="val 9615"/>
-            </a:avLst>
-          </a:prstGeom>
-          <a:solidFill>
-            <a:srgbClr val="FFFFFF"/>
-          </a:solidFill>
-          <a:ln w="12700">
-            <a:solidFill>
-              <a:srgbClr val="0D9488"/>
-            </a:solidFill>
-            <a:prstDash val="solid"/>
-          </a:ln>
-        </p:spPr>
-      </p:sp>
-      <p:sp>
-        <p:nvSpPr>
-          <p:cNvPr id="32" name="Text 30"/>
-          <p:cNvSpPr/>
-          <p:nvPr/>
-        </p:nvSpPr>
-        <p:spPr>
-          <a:xfrm>
-            <a:off x="1978152" y="3364992"/>
-            <a:ext cx="1225296" cy="475488"/>
-          </a:xfrm>
-          <a:prstGeom prst="rect">
-            <a:avLst/>
-          </a:prstGeom>
-          <a:noFill/>
-          <a:ln/>
-        </p:spPr>
-        <p:txBody>
-          <a:bodyPr wrap="square" lIns="0" tIns="0" rIns="0" bIns="0" rtlCol="0" anchor="ctr"/>
-          <a:lstStyle/>
-          <a:p>
-            <a:pPr algn="ctr" indent="0" marL="0">
-              <a:buNone/>
-            </a:pPr>
-            <a:r>
-              <a:rPr lang="en-US" sz="1400" b="1" dirty="0">
-                <a:solidFill>
-                  <a:srgbClr val="0D9488"/>
-                </a:solidFill>
-                <a:latin typeface="Trebuchet MS" pitchFamily="34" charset="0"/>
-                <a:ea typeface="Trebuchet MS" pitchFamily="34" charset="-122"/>
-                <a:cs typeface="Trebuchet MS" pitchFamily="34" charset="-120"/>
-              </a:rPr>
-              <a:t>au</a:t>
-            </a:r>
-            <a:endParaRPr lang="en-US" sz="1400" dirty="0"/>
-          </a:p>
-        </p:txBody>
-      </p:sp>
-      <p:sp>
-        <p:nvSpPr>
-          <p:cNvPr id="33" name="Text 31"/>
-          <p:cNvSpPr/>
-          <p:nvPr/>
-        </p:nvSpPr>
-        <p:spPr>
-          <a:xfrm>
-            <a:off x="3203448" y="3364992"/>
-            <a:ext cx="76200" cy="475488"/>
-          </a:xfrm>
-          <a:prstGeom prst="rect">
-            <a:avLst/>
-          </a:prstGeom>
-          <a:noFill/>
-          <a:ln/>
-        </p:spPr>
-        <p:txBody>
-          <a:bodyPr wrap="square" lIns="0" tIns="0" rIns="0" bIns="0" rtlCol="0" anchor="ctr"/>
-          <a:lstStyle/>
-          <a:p>
-            <a:pPr algn="ctr" indent="0" marL="0">
-              <a:buNone/>
-            </a:pPr>
-            <a:r>
-              <a:rPr lang="en-US" sz="1600" b="1" dirty="0">
-                <a:solidFill>
-                  <a:srgbClr val="0D9488"/>
-                </a:solidFill>
-                <a:latin typeface="Trebuchet MS" pitchFamily="34" charset="0"/>
-                <a:ea typeface="Trebuchet MS" pitchFamily="34" charset="-122"/>
-                <a:cs typeface="Trebuchet MS" pitchFamily="34" charset="-120"/>
-              </a:rPr>
-              <a:t>·</a:t>
-            </a:r>
-            <a:endParaRPr lang="en-US" sz="1600" dirty="0"/>
-          </a:p>
-        </p:txBody>
-      </p:sp>
-      <p:sp>
-        <p:nvSpPr>
-          <p:cNvPr id="34" name="Shape 32"/>
-          <p:cNvSpPr/>
-          <p:nvPr/>
-        </p:nvSpPr>
-        <p:spPr>
-          <a:xfrm>
-            <a:off x="3279648" y="3364992"/>
-            <a:ext cx="1225296" cy="475488"/>
-          </a:xfrm>
-          <a:prstGeom prst="rect">
-            <a:avLst>
-              <a:gd name="adj" fmla="val 9615"/>
-            </a:avLst>
-          </a:prstGeom>
-          <a:solidFill>
-            <a:srgbClr val="FFFFFF"/>
-          </a:solidFill>
-          <a:ln w="12700">
-            <a:solidFill>
-              <a:srgbClr val="0D9488"/>
-            </a:solidFill>
-            <a:prstDash val="solid"/>
-          </a:ln>
-        </p:spPr>
-      </p:sp>
-      <p:sp>
-        <p:nvSpPr>
-          <p:cNvPr id="35" name="Text 33"/>
-          <p:cNvSpPr/>
-          <p:nvPr/>
-        </p:nvSpPr>
-        <p:spPr>
-          <a:xfrm>
-            <a:off x="3279648" y="3364992"/>
-            <a:ext cx="1225296" cy="475488"/>
-          </a:xfrm>
-          <a:prstGeom prst="rect">
-            <a:avLst/>
-          </a:prstGeom>
-          <a:noFill/>
-          <a:ln/>
-        </p:spPr>
-        <p:txBody>
-          <a:bodyPr wrap="square" lIns="0" tIns="0" rIns="0" bIns="0" rtlCol="0" anchor="ctr"/>
-          <a:lstStyle/>
-          <a:p>
-            <a:pPr algn="ctr" indent="0" marL="0">
-              <a:buNone/>
-            </a:pPr>
-            <a:r>
-              <a:rPr lang="en-US" sz="1400" b="1" dirty="0">
-                <a:solidFill>
-                  <a:srgbClr val="0D9488"/>
-                </a:solidFill>
-                <a:latin typeface="Trebuchet MS" pitchFamily="34" charset="0"/>
-                <a:ea typeface="Trebuchet MS" pitchFamily="34" charset="-122"/>
-                <a:cs typeface="Trebuchet MS" pitchFamily="34" charset="-120"/>
-              </a:rPr>
-              <a:t>di</a:t>
-            </a:r>
-            <a:endParaRPr lang="en-US" sz="1400" dirty="0"/>
-          </a:p>
-        </p:txBody>
-      </p:sp>
-      <p:sp>
-        <p:nvSpPr>
-          <p:cNvPr id="36" name="Text 34"/>
-          <p:cNvSpPr/>
-          <p:nvPr/>
-        </p:nvSpPr>
-        <p:spPr>
-          <a:xfrm>
-            <a:off x="4504944" y="3364992"/>
-            <a:ext cx="76200" cy="475488"/>
-          </a:xfrm>
-          <a:prstGeom prst="rect">
-            <a:avLst/>
-          </a:prstGeom>
-          <a:noFill/>
-          <a:ln/>
-        </p:spPr>
-        <p:txBody>
-          <a:bodyPr wrap="square" lIns="0" tIns="0" rIns="0" bIns="0" rtlCol="0" anchor="ctr"/>
-          <a:lstStyle/>
-          <a:p>
-            <a:pPr algn="ctr" indent="0" marL="0">
-              <a:buNone/>
-            </a:pPr>
-            <a:r>
-              <a:rPr lang="en-US" sz="1600" b="1" dirty="0">
-                <a:solidFill>
-                  <a:srgbClr val="0D9488"/>
-                </a:solidFill>
-                <a:latin typeface="Trebuchet MS" pitchFamily="34" charset="0"/>
-                <a:ea typeface="Trebuchet MS" pitchFamily="34" charset="-122"/>
-                <a:cs typeface="Trebuchet MS" pitchFamily="34" charset="-120"/>
-              </a:rPr>
-              <a:t>·</a:t>
-            </a:r>
-            <a:endParaRPr lang="en-US" sz="1600" dirty="0"/>
-          </a:p>
-        </p:txBody>
-      </p:sp>
-      <p:sp>
-        <p:nvSpPr>
-          <p:cNvPr id="37" name="Shape 35"/>
-          <p:cNvSpPr/>
-          <p:nvPr/>
-        </p:nvSpPr>
-        <p:spPr>
-          <a:xfrm>
-            <a:off x="4581144" y="3364992"/>
-            <a:ext cx="1225296" cy="475488"/>
-          </a:xfrm>
-          <a:prstGeom prst="rect">
-            <a:avLst>
-              <a:gd name="adj" fmla="val 9615"/>
-            </a:avLst>
-          </a:prstGeom>
-          <a:solidFill>
-            <a:srgbClr val="FFFFFF"/>
-          </a:solidFill>
-          <a:ln w="12700">
-            <a:solidFill>
-              <a:srgbClr val="0D9488"/>
-            </a:solidFill>
-            <a:prstDash val="solid"/>
-          </a:ln>
-        </p:spPr>
-      </p:sp>
-      <p:sp>
-        <p:nvSpPr>
-          <p:cNvPr id="38" name="Text 36"/>
-          <p:cNvSpPr/>
-          <p:nvPr/>
-        </p:nvSpPr>
-        <p:spPr>
-          <a:xfrm>
-            <a:off x="4581144" y="3364992"/>
-            <a:ext cx="1225296" cy="475488"/>
-          </a:xfrm>
-          <a:prstGeom prst="rect">
-            <a:avLst/>
-          </a:prstGeom>
-          <a:noFill/>
-          <a:ln/>
-        </p:spPr>
-        <p:txBody>
-          <a:bodyPr wrap="square" lIns="0" tIns="0" rIns="0" bIns="0" rtlCol="0" anchor="ctr"/>
-          <a:lstStyle/>
-          <a:p>
-            <a:pPr algn="ctr" indent="0" marL="0">
-              <a:buNone/>
-            </a:pPr>
-            <a:r>
-              <a:rPr lang="en-US" sz="1400" b="1" dirty="0">
-                <a:solidFill>
-                  <a:srgbClr val="0D9488"/>
-                </a:solidFill>
-                <a:latin typeface="Trebuchet MS" pitchFamily="34" charset="0"/>
-                <a:ea typeface="Trebuchet MS" pitchFamily="34" charset="-122"/>
-                <a:cs typeface="Trebuchet MS" pitchFamily="34" charset="-120"/>
-              </a:rPr>
-              <a:t>tor</a:t>
-            </a:r>
-            <a:endParaRPr lang="en-US" sz="1400" dirty="0"/>
-          </a:p>
-        </p:txBody>
-      </p:sp>
-      <p:sp>
-        <p:nvSpPr>
-          <p:cNvPr id="39" name="Text 37"/>
-          <p:cNvSpPr/>
-          <p:nvPr/>
-        </p:nvSpPr>
-        <p:spPr>
-          <a:xfrm>
-            <a:off x="5806440" y="3364992"/>
-            <a:ext cx="76200" cy="475488"/>
-          </a:xfrm>
-          <a:prstGeom prst="rect">
-            <a:avLst/>
-          </a:prstGeom>
-          <a:noFill/>
-          <a:ln/>
-        </p:spPr>
-        <p:txBody>
-          <a:bodyPr wrap="square" lIns="0" tIns="0" rIns="0" bIns="0" rtlCol="0" anchor="ctr"/>
-          <a:lstStyle/>
-          <a:p>
-            <a:pPr algn="ctr" indent="0" marL="0">
-              <a:buNone/>
-            </a:pPr>
-            <a:r>
-              <a:rPr lang="en-US" sz="1600" b="1" dirty="0">
-                <a:solidFill>
-                  <a:srgbClr val="0D9488"/>
-                </a:solidFill>
-                <a:latin typeface="Trebuchet MS" pitchFamily="34" charset="0"/>
-                <a:ea typeface="Trebuchet MS" pitchFamily="34" charset="-122"/>
-                <a:cs typeface="Trebuchet MS" pitchFamily="34" charset="-120"/>
-              </a:rPr>
-              <a:t>·</a:t>
-            </a:r>
-            <a:endParaRPr lang="en-US" sz="1600" dirty="0"/>
-          </a:p>
-        </p:txBody>
-      </p:sp>
-      <p:sp>
-        <p:nvSpPr>
-          <p:cNvPr id="40" name="Shape 38"/>
-          <p:cNvSpPr/>
-          <p:nvPr/>
-        </p:nvSpPr>
-        <p:spPr>
-          <a:xfrm>
-            <a:off x="5882640" y="3364992"/>
-            <a:ext cx="1225296" cy="475488"/>
-          </a:xfrm>
-          <a:prstGeom prst="rect">
-            <a:avLst>
-              <a:gd name="adj" fmla="val 9615"/>
-            </a:avLst>
-          </a:prstGeom>
-          <a:solidFill>
-            <a:srgbClr val="FFFFFF"/>
-          </a:solidFill>
-          <a:ln w="12700">
-            <a:solidFill>
-              <a:srgbClr val="0D9488"/>
-            </a:solidFill>
-            <a:prstDash val="solid"/>
-          </a:ln>
-        </p:spPr>
-      </p:sp>
-      <p:sp>
-        <p:nvSpPr>
-          <p:cNvPr id="41" name="Text 39"/>
-          <p:cNvSpPr/>
-          <p:nvPr/>
-        </p:nvSpPr>
-        <p:spPr>
-          <a:xfrm>
-            <a:off x="5882640" y="3364992"/>
-            <a:ext cx="1225296" cy="475488"/>
-          </a:xfrm>
-          <a:prstGeom prst="rect">
-            <a:avLst/>
-          </a:prstGeom>
-          <a:noFill/>
-          <a:ln/>
-        </p:spPr>
-        <p:txBody>
-          <a:bodyPr wrap="square" lIns="0" tIns="0" rIns="0" bIns="0" rtlCol="0" anchor="ctr"/>
-          <a:lstStyle/>
-          <a:p>
-            <a:pPr algn="ctr" indent="0" marL="0">
-              <a:buNone/>
-            </a:pPr>
-            <a:r>
-              <a:rPr lang="en-US" sz="1400" b="1" dirty="0">
-                <a:solidFill>
-                  <a:srgbClr val="0D9488"/>
-                </a:solidFill>
-                <a:latin typeface="Trebuchet MS" pitchFamily="34" charset="0"/>
-                <a:ea typeface="Trebuchet MS" pitchFamily="34" charset="-122"/>
-                <a:cs typeface="Trebuchet MS" pitchFamily="34" charset="-120"/>
-              </a:rPr>
-              <a:t>i</a:t>
-            </a:r>
-            <a:endParaRPr lang="en-US" sz="1400" dirty="0"/>
-          </a:p>
-        </p:txBody>
-      </p:sp>
-      <p:sp>
-        <p:nvSpPr>
-          <p:cNvPr id="42" name="Text 40"/>
-          <p:cNvSpPr/>
-          <p:nvPr/>
-        </p:nvSpPr>
-        <p:spPr>
-          <a:xfrm>
-            <a:off x="7107936" y="3364992"/>
-            <a:ext cx="76200" cy="475488"/>
-          </a:xfrm>
-          <a:prstGeom prst="rect">
-            <a:avLst/>
-          </a:prstGeom>
-          <a:noFill/>
-          <a:ln/>
-        </p:spPr>
-        <p:txBody>
-          <a:bodyPr wrap="square" lIns="0" tIns="0" rIns="0" bIns="0" rtlCol="0" anchor="ctr"/>
-          <a:lstStyle/>
-          <a:p>
-            <a:pPr algn="ctr" indent="0" marL="0">
-              <a:buNone/>
-            </a:pPr>
-            <a:r>
-              <a:rPr lang="en-US" sz="1600" b="1" dirty="0">
-                <a:solidFill>
-                  <a:srgbClr val="0D9488"/>
-                </a:solidFill>
-                <a:latin typeface="Trebuchet MS" pitchFamily="34" charset="0"/>
-                <a:ea typeface="Trebuchet MS" pitchFamily="34" charset="-122"/>
-                <a:cs typeface="Trebuchet MS" pitchFamily="34" charset="-120"/>
-              </a:rPr>
-              <a:t>·</a:t>
-            </a:r>
-            <a:endParaRPr lang="en-US" sz="1600" dirty="0"/>
-          </a:p>
-        </p:txBody>
-      </p:sp>
-      <p:sp>
-        <p:nvSpPr>
-          <p:cNvPr id="43" name="Shape 41"/>
-          <p:cNvSpPr/>
-          <p:nvPr/>
-        </p:nvSpPr>
-        <p:spPr>
-          <a:xfrm>
-            <a:off x="7184136" y="3364992"/>
-            <a:ext cx="1225296" cy="475488"/>
-          </a:xfrm>
-          <a:prstGeom prst="rect">
-            <a:avLst>
-              <a:gd name="adj" fmla="val 9615"/>
-            </a:avLst>
-          </a:prstGeom>
-          <a:solidFill>
-            <a:srgbClr val="FFFFFF"/>
-          </a:solidFill>
-          <a:ln w="12700">
-            <a:solidFill>
-              <a:srgbClr val="0D9488"/>
-            </a:solidFill>
-            <a:prstDash val="solid"/>
-          </a:ln>
-        </p:spPr>
-      </p:sp>
-      <p:sp>
-        <p:nvSpPr>
-          <p:cNvPr id="44" name="Text 42"/>
-          <p:cNvSpPr/>
-          <p:nvPr/>
-        </p:nvSpPr>
-        <p:spPr>
-          <a:xfrm>
-            <a:off x="7184136" y="3364992"/>
-            <a:ext cx="1225296" cy="475488"/>
-          </a:xfrm>
-          <a:prstGeom prst="rect">
-            <a:avLst/>
-          </a:prstGeom>
-          <a:noFill/>
-          <a:ln/>
-        </p:spPr>
-        <p:txBody>
-          <a:bodyPr wrap="square" lIns="0" tIns="0" rIns="0" bIns="0" rtlCol="0" anchor="ctr"/>
-          <a:lstStyle/>
-          <a:p>
-            <a:pPr algn="ctr" indent="0" marL="0">
-              <a:buNone/>
-            </a:pPr>
-            <a:r>
-              <a:rPr lang="en-US" sz="1400" b="1" dirty="0">
-                <a:solidFill>
-                  <a:srgbClr val="0D9488"/>
-                </a:solidFill>
-                <a:latin typeface="Trebuchet MS" pitchFamily="34" charset="0"/>
-                <a:ea typeface="Trebuchet MS" pitchFamily="34" charset="-122"/>
-                <a:cs typeface="Trebuchet MS" pitchFamily="34" charset="-120"/>
-              </a:rPr>
-              <a:t>um</a:t>
-            </a:r>
-            <a:endParaRPr lang="en-US" sz="1400" dirty="0"/>
-          </a:p>
-        </p:txBody>
-      </p:sp>
-      <p:sp>
-        <p:nvSpPr>
-          <p:cNvPr id="45" name="Shape 43"/>
-          <p:cNvSpPr/>
-          <p:nvPr/>
-        </p:nvSpPr>
-        <p:spPr>
-          <a:xfrm>
-            <a:off x="365760" y="4096512"/>
-            <a:ext cx="1371600" cy="804672"/>
-          </a:xfrm>
-          <a:prstGeom prst="rect">
-            <a:avLst>
-              <a:gd name="adj" fmla="val 6818"/>
-            </a:avLst>
-          </a:prstGeom>
-          <a:solidFill>
-            <a:srgbClr val="E2E8F0"/>
-          </a:solidFill>
-          <a:ln w="12700">
-            <a:solidFill>
-              <a:srgbClr val="E2E8F0"/>
-            </a:solidFill>
-            <a:prstDash val="solid"/>
-          </a:ln>
-        </p:spPr>
-      </p:sp>
-      <p:sp>
-        <p:nvSpPr>
-          <p:cNvPr id="46" name="Text 44"/>
-          <p:cNvSpPr/>
-          <p:nvPr/>
-        </p:nvSpPr>
-        <p:spPr>
-          <a:xfrm>
-            <a:off x="365760" y="4096512"/>
-            <a:ext cx="1371600" cy="804672"/>
-          </a:xfrm>
-          <a:prstGeom prst="rect">
-            <a:avLst/>
-          </a:prstGeom>
-          <a:noFill/>
-          <a:ln/>
-        </p:spPr>
-        <p:txBody>
-          <a:bodyPr wrap="square" lIns="0" tIns="0" rIns="0" bIns="0" rtlCol="0" anchor="ctr"/>
-          <a:lstStyle/>
-          <a:p>
-            <a:pPr algn="ctr" indent="0" marL="0">
-              <a:buNone/>
-            </a:pPr>
-            <a:r>
-              <a:rPr lang="en-US" sz="1100" b="1" dirty="0">
-                <a:solidFill>
-                  <a:srgbClr val="475569"/>
-                </a:solidFill>
-                <a:latin typeface="Trebuchet MS" pitchFamily="34" charset="0"/>
-                <a:ea typeface="Trebuchet MS" pitchFamily="34" charset="-122"/>
-                <a:cs typeface="Trebuchet MS" pitchFamily="34" charset="-120"/>
-              </a:rPr>
-              <a:t>Phonemes</a:t>
-            </a:r>
-            <a:endParaRPr lang="en-US" sz="1100" dirty="0"/>
-          </a:p>
-        </p:txBody>
-      </p:sp>
-      <p:sp>
-        <p:nvSpPr>
-          <p:cNvPr id="47" name="Shape 45"/>
-          <p:cNvSpPr/>
-          <p:nvPr/>
-        </p:nvSpPr>
-        <p:spPr>
-          <a:xfrm>
-            <a:off x="1874520" y="4096512"/>
-            <a:ext cx="6903720" cy="658368"/>
-          </a:xfrm>
-          <a:prstGeom prst="rect">
-            <a:avLst>
-              <a:gd name="adj" fmla="val 8333"/>
-            </a:avLst>
-          </a:prstGeom>
-          <a:solidFill>
-            <a:srgbClr val="FCE7F3"/>
-          </a:solidFill>
-          <a:ln w="12700">
-            <a:solidFill>
-              <a:srgbClr val="DB2777"/>
-            </a:solidFill>
-            <a:prstDash val="solid"/>
-          </a:ln>
-        </p:spPr>
-      </p:sp>
-      <p:sp>
-        <p:nvSpPr>
-          <p:cNvPr id="48" name="Shape 46"/>
-          <p:cNvSpPr/>
-          <p:nvPr/>
-        </p:nvSpPr>
-        <p:spPr>
-          <a:xfrm>
-            <a:off x="2023872" y="4169664"/>
-            <a:ext cx="685800" cy="475488"/>
-          </a:xfrm>
-          <a:prstGeom prst="rect">
-            <a:avLst>
-              <a:gd name="adj" fmla="val 7692"/>
-            </a:avLst>
-          </a:prstGeom>
-          <a:solidFill>
-            <a:srgbClr val="FFFFFF"/>
-          </a:solidFill>
-          <a:ln w="12700">
-            <a:solidFill>
-              <a:srgbClr val="DB2777"/>
-            </a:solidFill>
-            <a:prstDash val="solid"/>
-          </a:ln>
-        </p:spPr>
-      </p:sp>
-      <p:sp>
-        <p:nvSpPr>
-          <p:cNvPr id="49" name="Text 47"/>
-          <p:cNvSpPr/>
-          <p:nvPr/>
-        </p:nvSpPr>
-        <p:spPr>
-          <a:xfrm>
-            <a:off x="2023872" y="4169664"/>
-            <a:ext cx="685800" cy="475488"/>
-          </a:xfrm>
-          <a:prstGeom prst="rect">
-            <a:avLst/>
-          </a:prstGeom>
-          <a:noFill/>
-          <a:ln/>
-        </p:spPr>
-        <p:txBody>
-          <a:bodyPr wrap="square" lIns="0" tIns="0" rIns="0" bIns="0" rtlCol="0" anchor="ctr"/>
-          <a:lstStyle/>
-          <a:p>
-            <a:pPr algn="ctr" indent="0" marL="0">
-              <a:buNone/>
-            </a:pPr>
-            <a:r>
-              <a:rPr lang="en-US" sz="900" b="1" dirty="0">
-                <a:solidFill>
-                  <a:srgbClr val="9D174D"/>
-                </a:solidFill>
-                <a:latin typeface="Trebuchet MS" pitchFamily="34" charset="0"/>
-                <a:ea typeface="Trebuchet MS" pitchFamily="34" charset="-122"/>
-                <a:cs typeface="Trebuchet MS" pitchFamily="34" charset="-120"/>
-              </a:rPr>
-              <a:t>au</a:t>
-            </a:r>
-            <a:endParaRPr lang="en-US" sz="900" dirty="0"/>
-          </a:p>
-        </p:txBody>
-      </p:sp>
-      <p:sp>
-        <p:nvSpPr>
-          <p:cNvPr id="50" name="Shape 48"/>
-          <p:cNvSpPr/>
-          <p:nvPr/>
-        </p:nvSpPr>
-        <p:spPr>
-          <a:xfrm>
-            <a:off x="2831592" y="4169664"/>
-            <a:ext cx="685800" cy="475488"/>
-          </a:xfrm>
-          <a:prstGeom prst="rect">
-            <a:avLst>
-              <a:gd name="adj" fmla="val 7692"/>
-            </a:avLst>
-          </a:prstGeom>
-          <a:solidFill>
-            <a:srgbClr val="FFFFFF"/>
-          </a:solidFill>
-          <a:ln w="12700">
-            <a:solidFill>
-              <a:srgbClr val="DB2777"/>
-            </a:solidFill>
-            <a:prstDash val="solid"/>
-          </a:ln>
-        </p:spPr>
-      </p:sp>
-      <p:sp>
-        <p:nvSpPr>
-          <p:cNvPr id="51" name="Text 49"/>
-          <p:cNvSpPr/>
-          <p:nvPr/>
-        </p:nvSpPr>
-        <p:spPr>
-          <a:xfrm>
-            <a:off x="2831592" y="4169664"/>
-            <a:ext cx="685800" cy="475488"/>
-          </a:xfrm>
-          <a:prstGeom prst="rect">
-            <a:avLst/>
-          </a:prstGeom>
-          <a:noFill/>
-          <a:ln/>
-        </p:spPr>
-        <p:txBody>
-          <a:bodyPr wrap="square" lIns="0" tIns="0" rIns="0" bIns="0" rtlCol="0" anchor="ctr"/>
-          <a:lstStyle/>
-          <a:p>
-            <a:pPr algn="ctr" indent="0" marL="0">
-              <a:buNone/>
-            </a:pPr>
-            <a:r>
-              <a:rPr lang="en-US" sz="900" b="1" dirty="0">
-                <a:solidFill>
-                  <a:srgbClr val="9D174D"/>
-                </a:solidFill>
-                <a:latin typeface="Trebuchet MS" pitchFamily="34" charset="0"/>
-                <a:ea typeface="Trebuchet MS" pitchFamily="34" charset="-122"/>
-                <a:cs typeface="Trebuchet MS" pitchFamily="34" charset="-120"/>
-              </a:rPr>
-              <a:t>d</a:t>
-            </a:r>
-            <a:endParaRPr lang="en-US" sz="900" dirty="0"/>
-          </a:p>
-        </p:txBody>
-      </p:sp>
-      <p:sp>
-        <p:nvSpPr>
-          <p:cNvPr id="52" name="Shape 50"/>
-          <p:cNvSpPr/>
-          <p:nvPr/>
-        </p:nvSpPr>
-        <p:spPr>
-          <a:xfrm>
-            <a:off x="3639312" y="4169664"/>
-            <a:ext cx="685800" cy="475488"/>
-          </a:xfrm>
-          <a:prstGeom prst="rect">
-            <a:avLst>
-              <a:gd name="adj" fmla="val 7692"/>
-            </a:avLst>
-          </a:prstGeom>
-          <a:solidFill>
-            <a:srgbClr val="FFFFFF"/>
-          </a:solidFill>
-          <a:ln w="12700">
-            <a:solidFill>
-              <a:srgbClr val="DB2777"/>
-            </a:solidFill>
-            <a:prstDash val="solid"/>
-          </a:ln>
-        </p:spPr>
-      </p:sp>
-      <p:sp>
-        <p:nvSpPr>
-          <p:cNvPr id="53" name="Text 51"/>
-          <p:cNvSpPr/>
-          <p:nvPr/>
-        </p:nvSpPr>
-        <p:spPr>
-          <a:xfrm>
-            <a:off x="3639312" y="4169664"/>
-            <a:ext cx="685800" cy="475488"/>
-          </a:xfrm>
-          <a:prstGeom prst="rect">
-            <a:avLst/>
-          </a:prstGeom>
-          <a:noFill/>
-          <a:ln/>
-        </p:spPr>
-        <p:txBody>
-          <a:bodyPr wrap="square" lIns="0" tIns="0" rIns="0" bIns="0" rtlCol="0" anchor="ctr"/>
-          <a:lstStyle/>
-          <a:p>
-            <a:pPr algn="ctr" indent="0" marL="0">
-              <a:buNone/>
-            </a:pPr>
-            <a:r>
-              <a:rPr lang="en-US" sz="900" b="1" dirty="0">
-                <a:solidFill>
-                  <a:srgbClr val="9D174D"/>
-                </a:solidFill>
-                <a:latin typeface="Trebuchet MS" pitchFamily="34" charset="0"/>
-                <a:ea typeface="Trebuchet MS" pitchFamily="34" charset="-122"/>
-                <a:cs typeface="Trebuchet MS" pitchFamily="34" charset="-120"/>
-              </a:rPr>
-              <a:t>i</a:t>
-            </a:r>
-            <a:endParaRPr lang="en-US" sz="900" dirty="0"/>
-          </a:p>
-        </p:txBody>
-      </p:sp>
-      <p:sp>
-        <p:nvSpPr>
-          <p:cNvPr id="54" name="Shape 52"/>
-          <p:cNvSpPr/>
-          <p:nvPr/>
-        </p:nvSpPr>
-        <p:spPr>
-          <a:xfrm>
-            <a:off x="4447032" y="4169664"/>
-            <a:ext cx="685800" cy="475488"/>
-          </a:xfrm>
-          <a:prstGeom prst="rect">
-            <a:avLst>
-              <a:gd name="adj" fmla="val 7692"/>
-            </a:avLst>
-          </a:prstGeom>
-          <a:solidFill>
-            <a:srgbClr val="FFFFFF"/>
-          </a:solidFill>
-          <a:ln w="12700">
-            <a:solidFill>
-              <a:srgbClr val="DB2777"/>
-            </a:solidFill>
-            <a:prstDash val="solid"/>
-          </a:ln>
-        </p:spPr>
-      </p:sp>
-      <p:sp>
-        <p:nvSpPr>
-          <p:cNvPr id="55" name="Text 53"/>
-          <p:cNvSpPr/>
-          <p:nvPr/>
-        </p:nvSpPr>
-        <p:spPr>
-          <a:xfrm>
-            <a:off x="4447032" y="4169664"/>
-            <a:ext cx="685800" cy="475488"/>
-          </a:xfrm>
-          <a:prstGeom prst="rect">
-            <a:avLst/>
-          </a:prstGeom>
-          <a:noFill/>
-          <a:ln/>
-        </p:spPr>
-        <p:txBody>
-          <a:bodyPr wrap="square" lIns="0" tIns="0" rIns="0" bIns="0" rtlCol="0" anchor="ctr"/>
-          <a:lstStyle/>
-          <a:p>
-            <a:pPr algn="ctr" indent="0" marL="0">
-              <a:buNone/>
-            </a:pPr>
-            <a:r>
-              <a:rPr lang="en-US" sz="900" b="1" dirty="0">
-                <a:solidFill>
-                  <a:srgbClr val="9D174D"/>
-                </a:solidFill>
-                <a:latin typeface="Trebuchet MS" pitchFamily="34" charset="0"/>
-                <a:ea typeface="Trebuchet MS" pitchFamily="34" charset="-122"/>
-                <a:cs typeface="Trebuchet MS" pitchFamily="34" charset="-120"/>
-              </a:rPr>
-              <a:t>t</a:t>
-            </a:r>
-            <a:endParaRPr lang="en-US" sz="900" dirty="0"/>
-          </a:p>
-        </p:txBody>
-      </p:sp>
-      <p:sp>
-        <p:nvSpPr>
-          <p:cNvPr id="56" name="Shape 54"/>
-          <p:cNvSpPr/>
-          <p:nvPr/>
-        </p:nvSpPr>
-        <p:spPr>
-          <a:xfrm>
-            <a:off x="5254752" y="4169664"/>
-            <a:ext cx="685800" cy="475488"/>
-          </a:xfrm>
-          <a:prstGeom prst="rect">
-            <a:avLst>
-              <a:gd name="adj" fmla="val 7692"/>
-            </a:avLst>
-          </a:prstGeom>
-          <a:solidFill>
-            <a:srgbClr val="FFFFFF"/>
-          </a:solidFill>
-          <a:ln w="12700">
-            <a:solidFill>
-              <a:srgbClr val="DB2777"/>
-            </a:solidFill>
-            <a:prstDash val="solid"/>
-          </a:ln>
-        </p:spPr>
-      </p:sp>
-      <p:sp>
-        <p:nvSpPr>
-          <p:cNvPr id="57" name="Text 55"/>
-          <p:cNvSpPr/>
-          <p:nvPr/>
-        </p:nvSpPr>
-        <p:spPr>
-          <a:xfrm>
-            <a:off x="5254752" y="4169664"/>
-            <a:ext cx="685800" cy="475488"/>
-          </a:xfrm>
-          <a:prstGeom prst="rect">
-            <a:avLst/>
-          </a:prstGeom>
-          <a:noFill/>
-          <a:ln/>
-        </p:spPr>
-        <p:txBody>
-          <a:bodyPr wrap="square" lIns="0" tIns="0" rIns="0" bIns="0" rtlCol="0" anchor="ctr"/>
-          <a:lstStyle/>
-          <a:p>
-            <a:pPr algn="ctr" indent="0" marL="0">
-              <a:buNone/>
-            </a:pPr>
-            <a:r>
-              <a:rPr lang="en-US" sz="900" b="1" dirty="0">
-                <a:solidFill>
-                  <a:srgbClr val="9D174D"/>
-                </a:solidFill>
-                <a:latin typeface="Trebuchet MS" pitchFamily="34" charset="0"/>
-                <a:ea typeface="Trebuchet MS" pitchFamily="34" charset="-122"/>
-                <a:cs typeface="Trebuchet MS" pitchFamily="34" charset="-120"/>
-              </a:rPr>
-              <a:t>or</a:t>
-            </a:r>
-            <a:endParaRPr lang="en-US" sz="900" dirty="0"/>
-          </a:p>
-        </p:txBody>
-      </p:sp>
-      <p:sp>
-        <p:nvSpPr>
-          <p:cNvPr id="58" name="Shape 56"/>
-          <p:cNvSpPr/>
-          <p:nvPr/>
-        </p:nvSpPr>
-        <p:spPr>
-          <a:xfrm>
-            <a:off x="6062472" y="4169664"/>
-            <a:ext cx="685800" cy="475488"/>
-          </a:xfrm>
-          <a:prstGeom prst="rect">
-            <a:avLst>
-              <a:gd name="adj" fmla="val 7692"/>
-            </a:avLst>
-          </a:prstGeom>
-          <a:solidFill>
-            <a:srgbClr val="FFFFFF"/>
-          </a:solidFill>
-          <a:ln w="12700">
-            <a:solidFill>
-              <a:srgbClr val="DB2777"/>
-            </a:solidFill>
-            <a:prstDash val="solid"/>
-          </a:ln>
-        </p:spPr>
-      </p:sp>
-      <p:sp>
-        <p:nvSpPr>
-          <p:cNvPr id="59" name="Text 57"/>
-          <p:cNvSpPr/>
-          <p:nvPr/>
-        </p:nvSpPr>
-        <p:spPr>
-          <a:xfrm>
-            <a:off x="6062472" y="4169664"/>
-            <a:ext cx="685800" cy="475488"/>
-          </a:xfrm>
-          <a:prstGeom prst="rect">
-            <a:avLst/>
-          </a:prstGeom>
-          <a:noFill/>
-          <a:ln/>
-        </p:spPr>
-        <p:txBody>
-          <a:bodyPr wrap="square" lIns="0" tIns="0" rIns="0" bIns="0" rtlCol="0" anchor="ctr"/>
-          <a:lstStyle/>
-          <a:p>
-            <a:pPr algn="ctr" indent="0" marL="0">
-              <a:buNone/>
-            </a:pPr>
-            <a:r>
-              <a:rPr lang="en-US" sz="900" b="1" dirty="0">
-                <a:solidFill>
-                  <a:srgbClr val="9D174D"/>
-                </a:solidFill>
-                <a:latin typeface="Trebuchet MS" pitchFamily="34" charset="0"/>
-                <a:ea typeface="Trebuchet MS" pitchFamily="34" charset="-122"/>
-                <a:cs typeface="Trebuchet MS" pitchFamily="34" charset="-120"/>
-              </a:rPr>
-              <a:t>i</a:t>
-            </a:r>
-            <a:endParaRPr lang="en-US" sz="900" dirty="0"/>
-          </a:p>
-        </p:txBody>
-      </p:sp>
-      <p:sp>
-        <p:nvSpPr>
-          <p:cNvPr id="60" name="Shape 58"/>
-          <p:cNvSpPr/>
-          <p:nvPr/>
-        </p:nvSpPr>
-        <p:spPr>
-          <a:xfrm>
-            <a:off x="6870192" y="4169664"/>
-            <a:ext cx="685800" cy="475488"/>
-          </a:xfrm>
-          <a:prstGeom prst="rect">
-            <a:avLst>
-              <a:gd name="adj" fmla="val 7692"/>
-            </a:avLst>
-          </a:prstGeom>
-          <a:solidFill>
-            <a:srgbClr val="FFFFFF"/>
-          </a:solidFill>
-          <a:ln w="12700">
-            <a:solidFill>
-              <a:srgbClr val="DB2777"/>
-            </a:solidFill>
-            <a:prstDash val="solid"/>
-          </a:ln>
-        </p:spPr>
-      </p:sp>
-      <p:sp>
-        <p:nvSpPr>
-          <p:cNvPr id="61" name="Text 59"/>
-          <p:cNvSpPr/>
-          <p:nvPr/>
-        </p:nvSpPr>
-        <p:spPr>
-          <a:xfrm>
-            <a:off x="6870192" y="4169664"/>
-            <a:ext cx="685800" cy="475488"/>
-          </a:xfrm>
-          <a:prstGeom prst="rect">
-            <a:avLst/>
-          </a:prstGeom>
-          <a:noFill/>
-          <a:ln/>
-        </p:spPr>
-        <p:txBody>
-          <a:bodyPr wrap="square" lIns="0" tIns="0" rIns="0" bIns="0" rtlCol="0" anchor="ctr"/>
-          <a:lstStyle/>
-          <a:p>
-            <a:pPr algn="ctr" indent="0" marL="0">
-              <a:buNone/>
-            </a:pPr>
-            <a:r>
-              <a:rPr lang="en-US" sz="900" b="1" dirty="0">
-                <a:solidFill>
-                  <a:srgbClr val="9D174D"/>
-                </a:solidFill>
-                <a:latin typeface="Trebuchet MS" pitchFamily="34" charset="0"/>
-                <a:ea typeface="Trebuchet MS" pitchFamily="34" charset="-122"/>
-                <a:cs typeface="Trebuchet MS" pitchFamily="34" charset="-120"/>
-              </a:rPr>
-              <a:t>u</a:t>
-            </a:r>
-            <a:endParaRPr lang="en-US" sz="900" dirty="0"/>
-          </a:p>
-        </p:txBody>
-      </p:sp>
-      <p:sp>
-        <p:nvSpPr>
-          <p:cNvPr id="62" name="Shape 60"/>
-          <p:cNvSpPr/>
-          <p:nvPr/>
-        </p:nvSpPr>
-        <p:spPr>
-          <a:xfrm>
-            <a:off x="7677912" y="4169664"/>
-            <a:ext cx="685800" cy="475488"/>
-          </a:xfrm>
-          <a:prstGeom prst="rect">
-            <a:avLst>
-              <a:gd name="adj" fmla="val 7692"/>
-            </a:avLst>
-          </a:prstGeom>
-          <a:solidFill>
-            <a:srgbClr val="FFFFFF"/>
-          </a:solidFill>
-          <a:ln w="12700">
-            <a:solidFill>
-              <a:srgbClr val="DB2777"/>
-            </a:solidFill>
-            <a:prstDash val="solid"/>
-          </a:ln>
-        </p:spPr>
-      </p:sp>
-      <p:sp>
-        <p:nvSpPr>
-          <p:cNvPr id="63" name="Text 61"/>
-          <p:cNvSpPr/>
-          <p:nvPr/>
-        </p:nvSpPr>
-        <p:spPr>
-          <a:xfrm>
-            <a:off x="7677912" y="4169664"/>
-            <a:ext cx="685800" cy="475488"/>
-          </a:xfrm>
-          <a:prstGeom prst="rect">
-            <a:avLst/>
-          </a:prstGeom>
-          <a:noFill/>
-          <a:ln/>
-        </p:spPr>
-        <p:txBody>
-          <a:bodyPr wrap="square" lIns="0" tIns="0" rIns="0" bIns="0" rtlCol="0" anchor="ctr"/>
-          <a:lstStyle/>
-          <a:p>
-            <a:pPr algn="ctr" indent="0" marL="0">
-              <a:buNone/>
-            </a:pPr>
-            <a:r>
-              <a:rPr lang="en-US" sz="900" b="1" dirty="0">
-                <a:solidFill>
-                  <a:srgbClr val="9D174D"/>
-                </a:solidFill>
-                <a:latin typeface="Trebuchet MS" pitchFamily="34" charset="0"/>
-                <a:ea typeface="Trebuchet MS" pitchFamily="34" charset="-122"/>
-                <a:cs typeface="Trebuchet MS" pitchFamily="34" charset="-120"/>
-              </a:rPr>
-              <a:t>m</a:t>
-            </a:r>
-            <a:endParaRPr lang="en-US" sz="900" dirty="0"/>
+              <a:t>/s/</a:t>
+            </a:r>
+            <a:endParaRPr lang="en-US" sz="750" dirty="0"/>
           </a:p>
         </p:txBody>
       </p:sp>
@@ -18422,7 +17690,7 @@
                 <a:ea typeface="Trebuchet MS" pitchFamily="34" charset="-122"/>
                 <a:cs typeface="Trebuchet MS" pitchFamily="34" charset="-120"/>
               </a:rPr>
-              <a:t>2</a:t>
+              <a:t>1</a:t>
             </a:r>
             <a:pPr algn="ctr" indent="0" marL="0">
               <a:buNone/>
@@ -18436,7 +17704,7 @@
                 <a:ea typeface="Trebuchet MS" pitchFamily="34" charset="-122"/>
                 <a:cs typeface="Trebuchet MS" pitchFamily="34" charset="-120"/>
               </a:rPr>
-              <a:t>  punctuation marks</a:t>
+              <a:t>  punctuation mark</a:t>
             </a:r>
             <a:endParaRPr lang="en-US" sz="2800" dirty="0"/>
           </a:p>
@@ -18871,7 +18139,7 @@
                 <a:ea typeface="Calibri" pitchFamily="34" charset="-122"/>
                 <a:cs typeface="Calibri" pitchFamily="34" charset="-120"/>
               </a:rPr>
-              <a:t> recording of the </a:t>
+              <a:t> recording was clearly </a:t>
             </a:r>
             <a:pPr algn="l" indent="0" marL="0">
               <a:buNone/>
@@ -18888,7 +18156,7 @@
                 <a:ea typeface="Calibri" pitchFamily="34" charset="-122"/>
                 <a:cs typeface="Calibri" pitchFamily="34" charset="-120"/>
               </a:rPr>
-              <a:t>audition</a:t>
+              <a:t>audible</a:t>
             </a:r>
             <a:pPr algn="l" indent="0" marL="0">
               <a:buNone/>
@@ -18902,7 +18170,7 @@
                 <a:ea typeface="Calibri" pitchFamily="34" charset="-122"/>
                 <a:cs typeface="Calibri" pitchFamily="34" charset="-120"/>
               </a:rPr>
-              <a:t> was played to the </a:t>
+              <a:t> to everyone, but the </a:t>
             </a:r>
             <a:pPr algn="l" indent="0" marL="0">
               <a:buNone/>
@@ -18919,7 +18187,7 @@
                 <a:ea typeface="Calibri" pitchFamily="34" charset="-122"/>
                 <a:cs typeface="Calibri" pitchFamily="34" charset="-120"/>
               </a:rPr>
-              <a:t>audience</a:t>
+              <a:t>auditory</a:t>
             </a:r>
             <a:pPr algn="l" indent="0" marL="0">
               <a:buNone/>
@@ -18933,7 +18201,7 @@
                 <a:ea typeface="Calibri" pitchFamily="34" charset="-122"/>
                 <a:cs typeface="Calibri" pitchFamily="34" charset="-120"/>
               </a:rPr>
-              <a:t>, who responded with great applause.</a:t>
+              <a:t> specialist wanted to check the levels again.</a:t>
             </a:r>
             <a:endParaRPr lang="en-US" sz="1800" dirty="0"/>
           </a:p>
@@ -19216,7 +18484,7 @@
                 <a:ea typeface="Trebuchet MS" pitchFamily="34" charset="-122"/>
                 <a:cs typeface="Trebuchet MS" pitchFamily="34" charset="-120"/>
               </a:rPr>
-              <a:t>audition</a:t>
+              <a:t>audible</a:t>
             </a:r>
             <a:endParaRPr lang="en-US" sz="1400" dirty="0"/>
           </a:p>
@@ -19344,7 +18612,7 @@
                 <a:ea typeface="Trebuchet MS" pitchFamily="34" charset="-122"/>
                 <a:cs typeface="Trebuchet MS" pitchFamily="34" charset="-120"/>
               </a:rPr>
-              <a:t>audience</a:t>
+              <a:t>auditory</a:t>
             </a:r>
             <a:endParaRPr lang="en-US" sz="1400" dirty="0"/>
           </a:p>
@@ -20819,7 +20087,7 @@
                 <a:ea typeface="Calibri" pitchFamily="34" charset="-122"/>
                 <a:cs typeface="Calibri" pitchFamily="34" charset="-120"/>
               </a:rPr>
-              <a:t>hear</a:t>
+              <a:t>hear / listen</a:t>
             </a:r>
             <a:endParaRPr lang="en-US" sz="850" dirty="0"/>
           </a:p>
@@ -21804,7 +21072,7 @@
                 <a:ea typeface="Calibri" pitchFamily="34" charset="-122"/>
                 <a:cs typeface="Calibri" pitchFamily="34" charset="-120"/>
               </a:rPr>
-              <a:t>hear</a:t>
+              <a:t>hear / listen</a:t>
             </a:r>
             <a:endParaRPr lang="en-US" sz="850" dirty="0"/>
           </a:p>
@@ -23026,7 +22294,7 @@
                 <a:ea typeface="Calibri" pitchFamily="34" charset="-122"/>
                 <a:cs typeface="Calibri" pitchFamily="34" charset="-120"/>
               </a:rPr>
-              <a:t>hear</a:t>
+              <a:t>hear / listen</a:t>
             </a:r>
             <a:endParaRPr lang="en-US" sz="850" dirty="0"/>
           </a:p>
@@ -24295,7 +23563,7 @@
                 <a:ea typeface="Trebuchet MS" pitchFamily="34" charset="-122"/>
                 <a:cs typeface="Trebuchet MS" pitchFamily="34" charset="-120"/>
               </a:rPr>
-              <a:t>audition</a:t>
+              <a:t>audible</a:t>
             </a:r>
             <a:endParaRPr lang="en-US" sz="2800" dirty="0"/>
           </a:p>
@@ -25122,7 +24390,7 @@
                 <a:ea typeface="Trebuchet MS" pitchFamily="34" charset="-122"/>
                 <a:cs typeface="Trebuchet MS" pitchFamily="34" charset="-120"/>
               </a:rPr>
-              <a:t>audition</a:t>
+              <a:t>audible</a:t>
             </a:r>
             <a:endParaRPr lang="en-US" sz="2800" dirty="0"/>
           </a:p>
@@ -25202,7 +24470,7 @@
         </p:nvSpPr>
         <p:spPr>
           <a:xfrm>
-            <a:off x="2221992" y="2258568"/>
+            <a:off x="2938272" y="2258568"/>
             <a:ext cx="1828800" cy="292608"/>
           </a:xfrm>
           <a:prstGeom prst="rect">
@@ -25236,7 +24504,7 @@
         </p:nvSpPr>
         <p:spPr>
           <a:xfrm>
-            <a:off x="2221992" y="2258568"/>
+            <a:off x="2938272" y="2258568"/>
             <a:ext cx="1828800" cy="292608"/>
           </a:xfrm>
           <a:prstGeom prst="rect">
@@ -25275,7 +24543,7 @@
         </p:nvSpPr>
         <p:spPr>
           <a:xfrm>
-            <a:off x="2221992" y="2569464"/>
+            <a:off x="2938272" y="2569464"/>
             <a:ext cx="1828800" cy="201168"/>
           </a:xfrm>
           <a:prstGeom prst="rect">
@@ -25300,7 +24568,7 @@
                 <a:ea typeface="Calibri" pitchFamily="34" charset="-122"/>
                 <a:cs typeface="Calibri" pitchFamily="34" charset="-120"/>
               </a:rPr>
-              <a:t>hear</a:t>
+              <a:t>hear / listen</a:t>
             </a:r>
             <a:endParaRPr lang="en-US" sz="850" dirty="0"/>
           </a:p>
@@ -25314,7 +24582,7 @@
         </p:nvSpPr>
         <p:spPr>
           <a:xfrm>
-            <a:off x="4370832" y="2258568"/>
+            <a:off x="5803392" y="2258568"/>
             <a:ext cx="1828800" cy="292608"/>
           </a:xfrm>
           <a:prstGeom prst="rect">
@@ -25348,7 +24616,7 @@
         </p:nvSpPr>
         <p:spPr>
           <a:xfrm>
-            <a:off x="4370832" y="2258568"/>
+            <a:off x="5803392" y="2258568"/>
             <a:ext cx="1828800" cy="292608"/>
           </a:xfrm>
           <a:prstGeom prst="rect">
@@ -25373,7 +24641,7 @@
                 <a:ea typeface="Trebuchet MS" pitchFamily="34" charset="-122"/>
                 <a:cs typeface="Trebuchet MS" pitchFamily="34" charset="-120"/>
               </a:rPr>
-              <a:t>it</a:t>
+              <a:t>ible</a:t>
             </a:r>
             <a:endParaRPr lang="en-US" sz="1300" dirty="0"/>
           </a:p>
@@ -25387,7 +24655,7 @@
         </p:nvSpPr>
         <p:spPr>
           <a:xfrm>
-            <a:off x="4370832" y="2569464"/>
+            <a:off x="5803392" y="2569464"/>
             <a:ext cx="1828800" cy="201168"/>
           </a:xfrm>
           <a:prstGeom prst="rect">
@@ -25412,7 +24680,7 @@
                 <a:ea typeface="Calibri" pitchFamily="34" charset="-122"/>
                 <a:cs typeface="Calibri" pitchFamily="34" charset="-120"/>
               </a:rPr>
-              <a:t>go, act</a:t>
+              <a:t>able to be</a:t>
             </a:r>
             <a:endParaRPr lang="en-US" sz="850" dirty="0"/>
           </a:p>
@@ -25426,30 +24694,23 @@
         </p:nvSpPr>
         <p:spPr>
           <a:xfrm>
-            <a:off x="6519672" y="2258568"/>
-            <a:ext cx="1828800" cy="292608"/>
+            <a:off x="365760" y="3273552"/>
+            <a:ext cx="1371600" cy="658368"/>
           </a:xfrm>
           <a:prstGeom prst="rect">
             <a:avLst>
-              <a:gd name="adj" fmla="val 25000"/>
+              <a:gd name="adj" fmla="val 8333"/>
             </a:avLst>
           </a:prstGeom>
           <a:solidFill>
-            <a:srgbClr val="FCE7F3"/>
-          </a:solidFill>
-          <a:ln w="19050">
-            <a:solidFill>
-              <a:srgbClr val="DB2777"/>
-            </a:solidFill>
-            <a:prstDash val="solid"/>
-          </a:ln>
-          <a:effectLst>
-            <a:outerShdw sx="100000" sy="100000" kx="0" ky="0" algn="bl" rotWithShape="0" blurRad="101600" dist="38100" dir="8100000">
-              <a:srgbClr val="000000">
-                <a:alpha val="12000"/>
-              </a:srgbClr>
-            </a:outerShdw>
-          </a:effectLst>
+            <a:srgbClr val="E2E8F0"/>
+          </a:solidFill>
+          <a:ln w="12700">
+            <a:solidFill>
+              <a:srgbClr val="E2E8F0"/>
+            </a:solidFill>
+            <a:prstDash val="solid"/>
+          </a:ln>
         </p:spPr>
       </p:sp>
       <p:sp>
@@ -25460,90 +24721,117 @@
         </p:nvSpPr>
         <p:spPr>
           <a:xfrm>
-            <a:off x="6519672" y="2258568"/>
-            <a:ext cx="1828800" cy="292608"/>
-          </a:xfrm>
-          <a:prstGeom prst="rect">
-            <a:avLst/>
-          </a:prstGeom>
-          <a:noFill/>
-          <a:ln/>
-        </p:spPr>
-        <p:txBody>
-          <a:bodyPr wrap="square" lIns="0" tIns="0" rIns="0" bIns="0" rtlCol="0" anchor="ctr"/>
-          <a:lstStyle/>
-          <a:p>
-            <a:pPr algn="ctr" indent="0" marL="0">
-              <a:buNone/>
-            </a:pPr>
-            <a:r>
-              <a:rPr lang="en-US" sz="1300" b="1" dirty="0">
-                <a:solidFill>
-                  <a:srgbClr val="9D174D"/>
+            <a:off x="365760" y="3273552"/>
+            <a:ext cx="1371600" cy="658368"/>
+          </a:xfrm>
+          <a:prstGeom prst="rect">
+            <a:avLst/>
+          </a:prstGeom>
+          <a:noFill/>
+          <a:ln/>
+        </p:spPr>
+        <p:txBody>
+          <a:bodyPr wrap="square" lIns="0" tIns="0" rIns="0" bIns="0" rtlCol="0" anchor="ctr"/>
+          <a:lstStyle/>
+          <a:p>
+            <a:pPr algn="ctr" indent="0" marL="0">
+              <a:buNone/>
+            </a:pPr>
+            <a:r>
+              <a:rPr lang="en-US" sz="1100" b="1" dirty="0">
+                <a:solidFill>
+                  <a:srgbClr val="475569"/>
                 </a:solidFill>
                 <a:latin typeface="Trebuchet MS" pitchFamily="34" charset="0"/>
                 <a:ea typeface="Trebuchet MS" pitchFamily="34" charset="-122"/>
                 <a:cs typeface="Trebuchet MS" pitchFamily="34" charset="-120"/>
               </a:rPr>
-              <a:t>ion</a:t>
-            </a:r>
-            <a:endParaRPr lang="en-US" sz="1300" dirty="0"/>
-          </a:p>
-        </p:txBody>
-      </p:sp>
-      <p:sp>
-        <p:nvSpPr>
-          <p:cNvPr id="24" name="Text 22"/>
-          <p:cNvSpPr/>
-          <p:nvPr/>
-        </p:nvSpPr>
-        <p:spPr>
-          <a:xfrm>
-            <a:off x="6519672" y="2569464"/>
-            <a:ext cx="1828800" cy="201168"/>
-          </a:xfrm>
-          <a:prstGeom prst="rect">
-            <a:avLst/>
-          </a:prstGeom>
-          <a:noFill/>
-          <a:ln/>
-        </p:spPr>
-        <p:txBody>
-          <a:bodyPr wrap="square" lIns="0" tIns="0" rIns="0" bIns="0" rtlCol="0" anchor="t"/>
-          <a:lstStyle/>
-          <a:p>
-            <a:pPr algn="ctr" indent="0" marL="0">
-              <a:buNone/>
-            </a:pPr>
-            <a:r>
-              <a:rPr lang="en-US" sz="850" dirty="0">
-                <a:solidFill>
-                  <a:srgbClr val="475569"/>
+              <a:t>Syllables</a:t>
+            </a:r>
+            <a:endParaRPr lang="en-US" sz="1100" dirty="0"/>
+          </a:p>
+        </p:txBody>
+      </p:sp>
+      <p:sp>
+        <p:nvSpPr>
+          <p:cNvPr id="24" name="Shape 22"/>
+          <p:cNvSpPr/>
+          <p:nvPr/>
+        </p:nvSpPr>
+        <p:spPr>
+          <a:xfrm>
+            <a:off x="1874520" y="3273552"/>
+            <a:ext cx="6903720" cy="658368"/>
+          </a:xfrm>
+          <a:prstGeom prst="rect">
+            <a:avLst>
+              <a:gd name="adj" fmla="val 8333"/>
+            </a:avLst>
+          </a:prstGeom>
+          <a:solidFill>
+            <a:srgbClr val="F8FAFC"/>
+          </a:solidFill>
+          <a:ln w="12700">
+            <a:solidFill>
+              <a:srgbClr val="E2E8F0"/>
+            </a:solidFill>
+            <a:prstDash val="dash"/>
+          </a:ln>
+        </p:spPr>
+      </p:sp>
+      <p:sp>
+        <p:nvSpPr>
+          <p:cNvPr id="25" name="Text 23"/>
+          <p:cNvSpPr/>
+          <p:nvPr/>
+        </p:nvSpPr>
+        <p:spPr>
+          <a:xfrm>
+            <a:off x="1874520" y="3273552"/>
+            <a:ext cx="6903720" cy="658368"/>
+          </a:xfrm>
+          <a:prstGeom prst="rect">
+            <a:avLst/>
+          </a:prstGeom>
+          <a:noFill/>
+          <a:ln/>
+        </p:spPr>
+        <p:txBody>
+          <a:bodyPr wrap="square" rtlCol="0" anchor="ctr"/>
+          <a:lstStyle/>
+          <a:p>
+            <a:pPr algn="ctr" indent="0" marL="0">
+              <a:buNone/>
+            </a:pPr>
+            <a:r>
+              <a:rPr lang="en-US" sz="1100" i="1" dirty="0">
+                <a:solidFill>
+                  <a:srgbClr val="CBD5E1"/>
                 </a:solidFill>
                 <a:latin typeface="Calibri" pitchFamily="34" charset="0"/>
                 <a:ea typeface="Calibri" pitchFamily="34" charset="-122"/>
                 <a:cs typeface="Calibri" pitchFamily="34" charset="-120"/>
               </a:rPr>
-              <a:t>action or process</a:t>
-            </a:r>
-            <a:endParaRPr lang="en-US" sz="850" dirty="0"/>
-          </a:p>
-        </p:txBody>
-      </p:sp>
-      <p:sp>
-        <p:nvSpPr>
-          <p:cNvPr id="25" name="Shape 23"/>
-          <p:cNvSpPr/>
-          <p:nvPr/>
-        </p:nvSpPr>
-        <p:spPr>
-          <a:xfrm>
-            <a:off x="365760" y="3273552"/>
-            <a:ext cx="1371600" cy="658368"/>
+              <a:t>Write here...</a:t>
+            </a:r>
+            <a:endParaRPr lang="en-US" sz="1100" dirty="0"/>
+          </a:p>
+        </p:txBody>
+      </p:sp>
+      <p:sp>
+        <p:nvSpPr>
+          <p:cNvPr id="26" name="Shape 24"/>
+          <p:cNvSpPr/>
+          <p:nvPr/>
+        </p:nvSpPr>
+        <p:spPr>
+          <a:xfrm>
+            <a:off x="365760" y="4096512"/>
+            <a:ext cx="1371600" cy="804672"/>
           </a:xfrm>
           <a:prstGeom prst="rect">
             <a:avLst>
-              <a:gd name="adj" fmla="val 8333"/>
+              <a:gd name="adj" fmla="val 6818"/>
             </a:avLst>
           </a:prstGeom>
           <a:solidFill>
@@ -25559,14 +24847,14 @@
       </p:sp>
       <p:sp>
         <p:nvSpPr>
-          <p:cNvPr id="26" name="Text 24"/>
-          <p:cNvSpPr/>
-          <p:nvPr/>
-        </p:nvSpPr>
-        <p:spPr>
-          <a:xfrm>
-            <a:off x="365760" y="3273552"/>
-            <a:ext cx="1371600" cy="658368"/>
+          <p:cNvPr id="27" name="Text 25"/>
+          <p:cNvSpPr/>
+          <p:nvPr/>
+        </p:nvSpPr>
+        <p:spPr>
+          <a:xfrm>
+            <a:off x="365760" y="4096512"/>
+            <a:ext cx="1371600" cy="804672"/>
           </a:xfrm>
           <a:prstGeom prst="rect">
             <a:avLst/>
@@ -25590,7 +24878,7 @@
                 <a:ea typeface="Trebuchet MS" pitchFamily="34" charset="-122"/>
                 <a:cs typeface="Trebuchet MS" pitchFamily="34" charset="-120"/>
               </a:rPr>
-              <a:t>Syllables</a:t>
+              <a:t>Phonemes</a:t>
             </a:r>
             <a:endParaRPr lang="en-US" sz="1100" dirty="0"/>
           </a:p>
@@ -25598,80 +24886,14 @@
       </p:sp>
       <p:sp>
         <p:nvSpPr>
-          <p:cNvPr id="27" name="Shape 25"/>
-          <p:cNvSpPr/>
-          <p:nvPr/>
-        </p:nvSpPr>
-        <p:spPr>
-          <a:xfrm>
-            <a:off x="1874520" y="3273552"/>
-            <a:ext cx="6903720" cy="658368"/>
-          </a:xfrm>
-          <a:prstGeom prst="rect">
-            <a:avLst>
-              <a:gd name="adj" fmla="val 8333"/>
-            </a:avLst>
-          </a:prstGeom>
-          <a:solidFill>
-            <a:srgbClr val="F8FAFC"/>
-          </a:solidFill>
-          <a:ln w="12700">
-            <a:solidFill>
-              <a:srgbClr val="E2E8F0"/>
-            </a:solidFill>
-            <a:prstDash val="dash"/>
-          </a:ln>
-        </p:spPr>
-      </p:sp>
-      <p:sp>
-        <p:nvSpPr>
-          <p:cNvPr id="28" name="Text 26"/>
-          <p:cNvSpPr/>
-          <p:nvPr/>
-        </p:nvSpPr>
-        <p:spPr>
-          <a:xfrm>
-            <a:off x="1874520" y="3273552"/>
-            <a:ext cx="6903720" cy="658368"/>
-          </a:xfrm>
-          <a:prstGeom prst="rect">
-            <a:avLst/>
-          </a:prstGeom>
-          <a:noFill/>
-          <a:ln/>
-        </p:spPr>
-        <p:txBody>
-          <a:bodyPr wrap="square" rtlCol="0" anchor="ctr"/>
-          <a:lstStyle/>
-          <a:p>
-            <a:pPr algn="ctr" indent="0" marL="0">
-              <a:buNone/>
-            </a:pPr>
-            <a:r>
-              <a:rPr lang="en-US" sz="1100" i="1" dirty="0">
-                <a:solidFill>
-                  <a:srgbClr val="CBD5E1"/>
-                </a:solidFill>
-                <a:latin typeface="Calibri" pitchFamily="34" charset="0"/>
-                <a:ea typeface="Calibri" pitchFamily="34" charset="-122"/>
-                <a:cs typeface="Calibri" pitchFamily="34" charset="-120"/>
-              </a:rPr>
-              <a:t>Write here...</a:t>
-            </a:r>
-            <a:endParaRPr lang="en-US" sz="1100" dirty="0"/>
-          </a:p>
-        </p:txBody>
-      </p:sp>
-      <p:sp>
-        <p:nvSpPr>
-          <p:cNvPr id="29" name="Shape 27"/>
-          <p:cNvSpPr/>
-          <p:nvPr/>
-        </p:nvSpPr>
-        <p:spPr>
-          <a:xfrm>
-            <a:off x="365760" y="4096512"/>
-            <a:ext cx="1371600" cy="804672"/>
+          <p:cNvPr id="28" name="Shape 26"/>
+          <p:cNvSpPr/>
+          <p:nvPr/>
+        </p:nvSpPr>
+        <p:spPr>
+          <a:xfrm>
+            <a:off x="1874520" y="4096512"/>
+            <a:ext cx="6903720" cy="804672"/>
           </a:xfrm>
           <a:prstGeom prst="rect">
             <a:avLst>
@@ -25679,85 +24901,19 @@
             </a:avLst>
           </a:prstGeom>
           <a:solidFill>
-            <a:srgbClr val="E2E8F0"/>
+            <a:srgbClr val="F8FAFC"/>
           </a:solidFill>
           <a:ln w="12700">
             <a:solidFill>
               <a:srgbClr val="E2E8F0"/>
             </a:solidFill>
-            <a:prstDash val="solid"/>
-          </a:ln>
-        </p:spPr>
-      </p:sp>
-      <p:sp>
-        <p:nvSpPr>
-          <p:cNvPr id="30" name="Text 28"/>
-          <p:cNvSpPr/>
-          <p:nvPr/>
-        </p:nvSpPr>
-        <p:spPr>
-          <a:xfrm>
-            <a:off x="365760" y="4096512"/>
-            <a:ext cx="1371600" cy="804672"/>
-          </a:xfrm>
-          <a:prstGeom prst="rect">
-            <a:avLst/>
-          </a:prstGeom>
-          <a:noFill/>
-          <a:ln/>
-        </p:spPr>
-        <p:txBody>
-          <a:bodyPr wrap="square" lIns="0" tIns="0" rIns="0" bIns="0" rtlCol="0" anchor="ctr"/>
-          <a:lstStyle/>
-          <a:p>
-            <a:pPr algn="ctr" indent="0" marL="0">
-              <a:buNone/>
-            </a:pPr>
-            <a:r>
-              <a:rPr lang="en-US" sz="1100" b="1" dirty="0">
-                <a:solidFill>
-                  <a:srgbClr val="475569"/>
-                </a:solidFill>
-                <a:latin typeface="Trebuchet MS" pitchFamily="34" charset="0"/>
-                <a:ea typeface="Trebuchet MS" pitchFamily="34" charset="-122"/>
-                <a:cs typeface="Trebuchet MS" pitchFamily="34" charset="-120"/>
-              </a:rPr>
-              <a:t>Phonemes</a:t>
-            </a:r>
-            <a:endParaRPr lang="en-US" sz="1100" dirty="0"/>
-          </a:p>
-        </p:txBody>
-      </p:sp>
-      <p:sp>
-        <p:nvSpPr>
-          <p:cNvPr id="31" name="Shape 29"/>
-          <p:cNvSpPr/>
-          <p:nvPr/>
-        </p:nvSpPr>
-        <p:spPr>
-          <a:xfrm>
-            <a:off x="1874520" y="4096512"/>
-            <a:ext cx="6903720" cy="804672"/>
-          </a:xfrm>
-          <a:prstGeom prst="rect">
-            <a:avLst>
-              <a:gd name="adj" fmla="val 6818"/>
-            </a:avLst>
-          </a:prstGeom>
-          <a:solidFill>
-            <a:srgbClr val="F8FAFC"/>
-          </a:solidFill>
-          <a:ln w="12700">
-            <a:solidFill>
-              <a:srgbClr val="E2E8F0"/>
-            </a:solidFill>
             <a:prstDash val="dash"/>
           </a:ln>
         </p:spPr>
       </p:sp>
       <p:sp>
         <p:nvSpPr>
-          <p:cNvPr id="32" name="Text 30"/>
+          <p:cNvPr id="29" name="Text 27"/>
           <p:cNvSpPr/>
           <p:nvPr/>
         </p:nvSpPr>
@@ -26938,7 +26094,7 @@
                 <a:ea typeface="Trebuchet MS" pitchFamily="34" charset="-122"/>
                 <a:cs typeface="Trebuchet MS" pitchFamily="34" charset="-120"/>
               </a:rPr>
-              <a:t>audition</a:t>
+              <a:t>audible</a:t>
             </a:r>
             <a:endParaRPr lang="en-US" sz="2800" dirty="0"/>
           </a:p>
@@ -27018,7 +26174,7 @@
         </p:nvSpPr>
         <p:spPr>
           <a:xfrm>
-            <a:off x="2221992" y="2258568"/>
+            <a:off x="2938272" y="2258568"/>
             <a:ext cx="1828800" cy="292608"/>
           </a:xfrm>
           <a:prstGeom prst="rect">
@@ -27052,7 +26208,7 @@
         </p:nvSpPr>
         <p:spPr>
           <a:xfrm>
-            <a:off x="2221992" y="2258568"/>
+            <a:off x="2938272" y="2258568"/>
             <a:ext cx="1828800" cy="292608"/>
           </a:xfrm>
           <a:prstGeom prst="rect">
@@ -27091,7 +26247,7 @@
         </p:nvSpPr>
         <p:spPr>
           <a:xfrm>
-            <a:off x="2221992" y="2569464"/>
+            <a:off x="2938272" y="2569464"/>
             <a:ext cx="1828800" cy="201168"/>
           </a:xfrm>
           <a:prstGeom prst="rect">
@@ -27116,7 +26272,7 @@
                 <a:ea typeface="Calibri" pitchFamily="34" charset="-122"/>
                 <a:cs typeface="Calibri" pitchFamily="34" charset="-120"/>
               </a:rPr>
-              <a:t>hear</a:t>
+              <a:t>hear / listen</a:t>
             </a:r>
             <a:endParaRPr lang="en-US" sz="850" dirty="0"/>
           </a:p>
@@ -27130,7 +26286,7 @@
         </p:nvSpPr>
         <p:spPr>
           <a:xfrm>
-            <a:off x="4370832" y="2258568"/>
+            <a:off x="5803392" y="2258568"/>
             <a:ext cx="1828800" cy="292608"/>
           </a:xfrm>
           <a:prstGeom prst="rect">
@@ -27164,7 +26320,7 @@
         </p:nvSpPr>
         <p:spPr>
           <a:xfrm>
-            <a:off x="4370832" y="2258568"/>
+            <a:off x="5803392" y="2258568"/>
             <a:ext cx="1828800" cy="292608"/>
           </a:xfrm>
           <a:prstGeom prst="rect">
@@ -27189,7 +26345,7 @@
                 <a:ea typeface="Trebuchet MS" pitchFamily="34" charset="-122"/>
                 <a:cs typeface="Trebuchet MS" pitchFamily="34" charset="-120"/>
               </a:rPr>
-              <a:t>it</a:t>
+              <a:t>ible</a:t>
             </a:r>
             <a:endParaRPr lang="en-US" sz="1300" dirty="0"/>
           </a:p>
@@ -27203,7 +26359,7 @@
         </p:nvSpPr>
         <p:spPr>
           <a:xfrm>
-            <a:off x="4370832" y="2569464"/>
+            <a:off x="5803392" y="2569464"/>
             <a:ext cx="1828800" cy="201168"/>
           </a:xfrm>
           <a:prstGeom prst="rect">
@@ -27228,7 +26384,7 @@
                 <a:ea typeface="Calibri" pitchFamily="34" charset="-122"/>
                 <a:cs typeface="Calibri" pitchFamily="34" charset="-120"/>
               </a:rPr>
-              <a:t>go, act</a:t>
+              <a:t>able to be</a:t>
             </a:r>
             <a:endParaRPr lang="en-US" sz="850" dirty="0"/>
           </a:p>
@@ -27242,30 +26398,23 @@
         </p:nvSpPr>
         <p:spPr>
           <a:xfrm>
-            <a:off x="6519672" y="2258568"/>
-            <a:ext cx="1828800" cy="292608"/>
+            <a:off x="365760" y="3273552"/>
+            <a:ext cx="1371600" cy="658368"/>
           </a:xfrm>
           <a:prstGeom prst="rect">
             <a:avLst>
-              <a:gd name="adj" fmla="val 25000"/>
+              <a:gd name="adj" fmla="val 8333"/>
             </a:avLst>
           </a:prstGeom>
           <a:solidFill>
-            <a:srgbClr val="FCE7F3"/>
-          </a:solidFill>
-          <a:ln w="19050">
-            <a:solidFill>
-              <a:srgbClr val="DB2777"/>
-            </a:solidFill>
-            <a:prstDash val="solid"/>
-          </a:ln>
-          <a:effectLst>
-            <a:outerShdw sx="100000" sy="100000" kx="0" ky="0" algn="bl" rotWithShape="0" blurRad="101600" dist="38100" dir="8100000">
-              <a:srgbClr val="000000">
-                <a:alpha val="12000"/>
-              </a:srgbClr>
-            </a:outerShdw>
-          </a:effectLst>
+            <a:srgbClr val="E2E8F0"/>
+          </a:solidFill>
+          <a:ln w="12700">
+            <a:solidFill>
+              <a:srgbClr val="E2E8F0"/>
+            </a:solidFill>
+            <a:prstDash val="solid"/>
+          </a:ln>
         </p:spPr>
       </p:sp>
       <p:sp>
@@ -27276,86 +26425,47 @@
         </p:nvSpPr>
         <p:spPr>
           <a:xfrm>
-            <a:off x="6519672" y="2258568"/>
-            <a:ext cx="1828800" cy="292608"/>
-          </a:xfrm>
-          <a:prstGeom prst="rect">
-            <a:avLst/>
-          </a:prstGeom>
-          <a:noFill/>
-          <a:ln/>
-        </p:spPr>
-        <p:txBody>
-          <a:bodyPr wrap="square" lIns="0" tIns="0" rIns="0" bIns="0" rtlCol="0" anchor="ctr"/>
-          <a:lstStyle/>
-          <a:p>
-            <a:pPr algn="ctr" indent="0" marL="0">
-              <a:buNone/>
-            </a:pPr>
-            <a:r>
-              <a:rPr lang="en-US" sz="1300" b="1" dirty="0">
-                <a:solidFill>
-                  <a:srgbClr val="9D174D"/>
+            <a:off x="365760" y="3273552"/>
+            <a:ext cx="1371600" cy="658368"/>
+          </a:xfrm>
+          <a:prstGeom prst="rect">
+            <a:avLst/>
+          </a:prstGeom>
+          <a:noFill/>
+          <a:ln/>
+        </p:spPr>
+        <p:txBody>
+          <a:bodyPr wrap="square" lIns="0" tIns="0" rIns="0" bIns="0" rtlCol="0" anchor="ctr"/>
+          <a:lstStyle/>
+          <a:p>
+            <a:pPr algn="ctr" indent="0" marL="0">
+              <a:buNone/>
+            </a:pPr>
+            <a:r>
+              <a:rPr lang="en-US" sz="1100" b="1" dirty="0">
+                <a:solidFill>
+                  <a:srgbClr val="475569"/>
                 </a:solidFill>
                 <a:latin typeface="Trebuchet MS" pitchFamily="34" charset="0"/>
                 <a:ea typeface="Trebuchet MS" pitchFamily="34" charset="-122"/>
                 <a:cs typeface="Trebuchet MS" pitchFamily="34" charset="-120"/>
               </a:rPr>
-              <a:t>ion</a:t>
-            </a:r>
-            <a:endParaRPr lang="en-US" sz="1300" dirty="0"/>
-          </a:p>
-        </p:txBody>
-      </p:sp>
-      <p:sp>
-        <p:nvSpPr>
-          <p:cNvPr id="24" name="Text 22"/>
-          <p:cNvSpPr/>
-          <p:nvPr/>
-        </p:nvSpPr>
-        <p:spPr>
-          <a:xfrm>
-            <a:off x="6519672" y="2569464"/>
-            <a:ext cx="1828800" cy="201168"/>
-          </a:xfrm>
-          <a:prstGeom prst="rect">
-            <a:avLst/>
-          </a:prstGeom>
-          <a:noFill/>
-          <a:ln/>
-        </p:spPr>
-        <p:txBody>
-          <a:bodyPr wrap="square" lIns="0" tIns="0" rIns="0" bIns="0" rtlCol="0" anchor="t"/>
-          <a:lstStyle/>
-          <a:p>
-            <a:pPr algn="ctr" indent="0" marL="0">
-              <a:buNone/>
-            </a:pPr>
-            <a:r>
-              <a:rPr lang="en-US" sz="850" dirty="0">
-                <a:solidFill>
-                  <a:srgbClr val="475569"/>
-                </a:solidFill>
-                <a:latin typeface="Calibri" pitchFamily="34" charset="0"/>
-                <a:ea typeface="Calibri" pitchFamily="34" charset="-122"/>
-                <a:cs typeface="Calibri" pitchFamily="34" charset="-120"/>
-              </a:rPr>
-              <a:t>action or process</a:t>
-            </a:r>
-            <a:endParaRPr lang="en-US" sz="850" dirty="0"/>
-          </a:p>
-        </p:txBody>
-      </p:sp>
-      <p:sp>
-        <p:nvSpPr>
-          <p:cNvPr id="25" name="Shape 23"/>
-          <p:cNvSpPr/>
-          <p:nvPr/>
-        </p:nvSpPr>
-        <p:spPr>
-          <a:xfrm>
-            <a:off x="365760" y="3273552"/>
-            <a:ext cx="1371600" cy="658368"/>
+              <a:t>Syllables</a:t>
+            </a:r>
+            <a:endParaRPr lang="en-US" sz="1100" dirty="0"/>
+          </a:p>
+        </p:txBody>
+      </p:sp>
+      <p:sp>
+        <p:nvSpPr>
+          <p:cNvPr id="24" name="Shape 22"/>
+          <p:cNvSpPr/>
+          <p:nvPr/>
+        </p:nvSpPr>
+        <p:spPr>
+          <a:xfrm>
+            <a:off x="1874520" y="3273552"/>
+            <a:ext cx="6903720" cy="658368"/>
           </a:xfrm>
           <a:prstGeom prst="rect">
             <a:avLst>
@@ -27363,11 +26473,38 @@
             </a:avLst>
           </a:prstGeom>
           <a:solidFill>
-            <a:srgbClr val="E2E8F0"/>
-          </a:solidFill>
-          <a:ln w="12700">
-            <a:solidFill>
-              <a:srgbClr val="E2E8F0"/>
+            <a:srgbClr val="CCFBF1"/>
+          </a:solidFill>
+          <a:ln w="12700">
+            <a:solidFill>
+              <a:srgbClr val="0D9488"/>
+            </a:solidFill>
+            <a:prstDash val="solid"/>
+          </a:ln>
+        </p:spPr>
+      </p:sp>
+      <p:sp>
+        <p:nvSpPr>
+          <p:cNvPr id="25" name="Shape 23"/>
+          <p:cNvSpPr/>
+          <p:nvPr/>
+        </p:nvSpPr>
+        <p:spPr>
+          <a:xfrm>
+            <a:off x="2313432" y="3364992"/>
+            <a:ext cx="1645920" cy="475488"/>
+          </a:xfrm>
+          <a:prstGeom prst="rect">
+            <a:avLst>
+              <a:gd name="adj" fmla="val 9615"/>
+            </a:avLst>
+          </a:prstGeom>
+          <a:solidFill>
+            <a:srgbClr val="FFFFFF"/>
+          </a:solidFill>
+          <a:ln w="12700">
+            <a:solidFill>
+              <a:srgbClr val="0D9488"/>
             </a:solidFill>
             <a:prstDash val="solid"/>
           </a:ln>
@@ -27381,63 +26518,75 @@
         </p:nvSpPr>
         <p:spPr>
           <a:xfrm>
-            <a:off x="365760" y="3273552"/>
-            <a:ext cx="1371600" cy="658368"/>
-          </a:xfrm>
-          <a:prstGeom prst="rect">
-            <a:avLst/>
-          </a:prstGeom>
-          <a:noFill/>
-          <a:ln/>
-        </p:spPr>
-        <p:txBody>
-          <a:bodyPr wrap="square" lIns="0" tIns="0" rIns="0" bIns="0" rtlCol="0" anchor="ctr"/>
-          <a:lstStyle/>
-          <a:p>
-            <a:pPr algn="ctr" indent="0" marL="0">
-              <a:buNone/>
-            </a:pPr>
-            <a:r>
-              <a:rPr lang="en-US" sz="1100" b="1" dirty="0">
-                <a:solidFill>
-                  <a:srgbClr val="475569"/>
+            <a:off x="2313432" y="3364992"/>
+            <a:ext cx="1645920" cy="475488"/>
+          </a:xfrm>
+          <a:prstGeom prst="rect">
+            <a:avLst/>
+          </a:prstGeom>
+          <a:noFill/>
+          <a:ln/>
+        </p:spPr>
+        <p:txBody>
+          <a:bodyPr wrap="square" lIns="0" tIns="0" rIns="0" bIns="0" rtlCol="0" anchor="ctr"/>
+          <a:lstStyle/>
+          <a:p>
+            <a:pPr algn="ctr" indent="0" marL="0">
+              <a:buNone/>
+            </a:pPr>
+            <a:r>
+              <a:rPr lang="en-US" sz="1400" b="1" dirty="0">
+                <a:solidFill>
+                  <a:srgbClr val="0D9488"/>
                 </a:solidFill>
                 <a:latin typeface="Trebuchet MS" pitchFamily="34" charset="0"/>
                 <a:ea typeface="Trebuchet MS" pitchFamily="34" charset="-122"/>
                 <a:cs typeface="Trebuchet MS" pitchFamily="34" charset="-120"/>
               </a:rPr>
-              <a:t>Syllables</a:t>
-            </a:r>
-            <a:endParaRPr lang="en-US" sz="1100" dirty="0"/>
-          </a:p>
-        </p:txBody>
-      </p:sp>
-      <p:sp>
-        <p:nvSpPr>
-          <p:cNvPr id="27" name="Shape 25"/>
-          <p:cNvSpPr/>
-          <p:nvPr/>
-        </p:nvSpPr>
-        <p:spPr>
-          <a:xfrm>
-            <a:off x="1874520" y="3273552"/>
-            <a:ext cx="6903720" cy="658368"/>
-          </a:xfrm>
-          <a:prstGeom prst="rect">
-            <a:avLst>
-              <a:gd name="adj" fmla="val 8333"/>
-            </a:avLst>
-          </a:prstGeom>
-          <a:solidFill>
-            <a:srgbClr val="CCFBF1"/>
-          </a:solidFill>
-          <a:ln w="12700">
-            <a:solidFill>
-              <a:srgbClr val="0D9488"/>
-            </a:solidFill>
-            <a:prstDash val="solid"/>
-          </a:ln>
-        </p:spPr>
+              <a:t>au</a:t>
+            </a:r>
+            <a:endParaRPr lang="en-US" sz="1400" dirty="0"/>
+          </a:p>
+        </p:txBody>
+      </p:sp>
+      <p:sp>
+        <p:nvSpPr>
+          <p:cNvPr id="27" name="Text 25"/>
+          <p:cNvSpPr/>
+          <p:nvPr/>
+        </p:nvSpPr>
+        <p:spPr>
+          <a:xfrm>
+            <a:off x="3959352" y="3364992"/>
+            <a:ext cx="411480" cy="475488"/>
+          </a:xfrm>
+          <a:prstGeom prst="rect">
+            <a:avLst/>
+          </a:prstGeom>
+          <a:noFill/>
+          <a:ln/>
+        </p:spPr>
+        <p:txBody>
+          <a:bodyPr wrap="square" lIns="0" tIns="0" rIns="0" bIns="0" rtlCol="0" anchor="ctr"/>
+          <a:lstStyle/>
+          <a:p>
+            <a:pPr algn="ctr" indent="0" marL="0">
+              <a:buNone/>
+            </a:pPr>
+            <a:r>
+              <a:rPr lang="en-US" sz="1600" b="1" dirty="0">
+                <a:solidFill>
+                  <a:srgbClr val="0D9488"/>
+                </a:solidFill>
+                <a:latin typeface="Trebuchet MS" pitchFamily="34" charset="0"/>
+                <a:ea typeface="Trebuchet MS" pitchFamily="34" charset="-122"/>
+                <a:cs typeface="Trebuchet MS" pitchFamily="34" charset="-120"/>
+              </a:rPr>
+              <a:t>·</a:t>
+            </a:r>
+            <a:endParaRPr lang="en-US" sz="1600" dirty="0"/>
+          </a:p>
+        </p:txBody>
       </p:sp>
       <p:sp>
         <p:nvSpPr>
@@ -27447,7 +26596,7 @@
         </p:nvSpPr>
         <p:spPr>
           <a:xfrm>
-            <a:off x="2313432" y="3364992"/>
+            <a:off x="4370832" y="3364992"/>
             <a:ext cx="1645920" cy="475488"/>
           </a:xfrm>
           <a:prstGeom prst="rect">
@@ -27474,7 +26623,7 @@
         </p:nvSpPr>
         <p:spPr>
           <a:xfrm>
-            <a:off x="2313432" y="3364992"/>
+            <a:off x="4370832" y="3364992"/>
             <a:ext cx="1645920" cy="475488"/>
           </a:xfrm>
           <a:prstGeom prst="rect">
@@ -27499,7 +26648,7 @@
                 <a:ea typeface="Trebuchet MS" pitchFamily="34" charset="-122"/>
                 <a:cs typeface="Trebuchet MS" pitchFamily="34" charset="-120"/>
               </a:rPr>
-              <a:t>au</a:t>
+              <a:t>di</a:t>
             </a:r>
             <a:endParaRPr lang="en-US" sz="1400" dirty="0"/>
           </a:p>
@@ -27513,7 +26662,7 @@
         </p:nvSpPr>
         <p:spPr>
           <a:xfrm>
-            <a:off x="3959352" y="3364992"/>
+            <a:off x="6016752" y="3364992"/>
             <a:ext cx="411480" cy="475488"/>
           </a:xfrm>
           <a:prstGeom prst="rect">
@@ -27552,7 +26701,7 @@
         </p:nvSpPr>
         <p:spPr>
           <a:xfrm>
-            <a:off x="4370832" y="3364992"/>
+            <a:off x="6428232" y="3364992"/>
             <a:ext cx="1645920" cy="475488"/>
           </a:xfrm>
           <a:prstGeom prst="rect">
@@ -27579,7 +26728,7 @@
         </p:nvSpPr>
         <p:spPr>
           <a:xfrm>
-            <a:off x="4370832" y="3364992"/>
+            <a:off x="6428232" y="3364992"/>
             <a:ext cx="1645920" cy="475488"/>
           </a:xfrm>
           <a:prstGeom prst="rect">
@@ -27604,7 +26753,7 @@
                 <a:ea typeface="Trebuchet MS" pitchFamily="34" charset="-122"/>
                 <a:cs typeface="Trebuchet MS" pitchFamily="34" charset="-120"/>
               </a:rPr>
-              <a:t>di</a:t>
+              <a:t>ble</a:t>
             </a:r>
             <a:endParaRPr lang="en-US" sz="1400" dirty="0"/>
           </a:p>
@@ -27612,119 +26761,80 @@
       </p:sp>
       <p:sp>
         <p:nvSpPr>
-          <p:cNvPr id="33" name="Text 31"/>
-          <p:cNvSpPr/>
-          <p:nvPr/>
-        </p:nvSpPr>
-        <p:spPr>
-          <a:xfrm>
-            <a:off x="6016752" y="3364992"/>
-            <a:ext cx="411480" cy="475488"/>
-          </a:xfrm>
-          <a:prstGeom prst="rect">
-            <a:avLst/>
-          </a:prstGeom>
-          <a:noFill/>
-          <a:ln/>
-        </p:spPr>
-        <p:txBody>
-          <a:bodyPr wrap="square" lIns="0" tIns="0" rIns="0" bIns="0" rtlCol="0" anchor="ctr"/>
-          <a:lstStyle/>
-          <a:p>
-            <a:pPr algn="ctr" indent="0" marL="0">
-              <a:buNone/>
-            </a:pPr>
-            <a:r>
-              <a:rPr lang="en-US" sz="1600" b="1" dirty="0">
-                <a:solidFill>
-                  <a:srgbClr val="0D9488"/>
+          <p:cNvPr id="33" name="Shape 31"/>
+          <p:cNvSpPr/>
+          <p:nvPr/>
+        </p:nvSpPr>
+        <p:spPr>
+          <a:xfrm>
+            <a:off x="365760" y="4096512"/>
+            <a:ext cx="1371600" cy="804672"/>
+          </a:xfrm>
+          <a:prstGeom prst="rect">
+            <a:avLst>
+              <a:gd name="adj" fmla="val 6818"/>
+            </a:avLst>
+          </a:prstGeom>
+          <a:solidFill>
+            <a:srgbClr val="E2E8F0"/>
+          </a:solidFill>
+          <a:ln w="12700">
+            <a:solidFill>
+              <a:srgbClr val="E2E8F0"/>
+            </a:solidFill>
+            <a:prstDash val="solid"/>
+          </a:ln>
+        </p:spPr>
+      </p:sp>
+      <p:sp>
+        <p:nvSpPr>
+          <p:cNvPr id="34" name="Text 32"/>
+          <p:cNvSpPr/>
+          <p:nvPr/>
+        </p:nvSpPr>
+        <p:spPr>
+          <a:xfrm>
+            <a:off x="365760" y="4096512"/>
+            <a:ext cx="1371600" cy="804672"/>
+          </a:xfrm>
+          <a:prstGeom prst="rect">
+            <a:avLst/>
+          </a:prstGeom>
+          <a:noFill/>
+          <a:ln/>
+        </p:spPr>
+        <p:txBody>
+          <a:bodyPr wrap="square" lIns="0" tIns="0" rIns="0" bIns="0" rtlCol="0" anchor="ctr"/>
+          <a:lstStyle/>
+          <a:p>
+            <a:pPr algn="ctr" indent="0" marL="0">
+              <a:buNone/>
+            </a:pPr>
+            <a:r>
+              <a:rPr lang="en-US" sz="1100" b="1" dirty="0">
+                <a:solidFill>
+                  <a:srgbClr val="475569"/>
                 </a:solidFill>
                 <a:latin typeface="Trebuchet MS" pitchFamily="34" charset="0"/>
                 <a:ea typeface="Trebuchet MS" pitchFamily="34" charset="-122"/>
                 <a:cs typeface="Trebuchet MS" pitchFamily="34" charset="-120"/>
               </a:rPr>
-              <a:t>·</a:t>
-            </a:r>
-            <a:endParaRPr lang="en-US" sz="1600" dirty="0"/>
-          </a:p>
-        </p:txBody>
-      </p:sp>
-      <p:sp>
-        <p:nvSpPr>
-          <p:cNvPr id="34" name="Shape 32"/>
-          <p:cNvSpPr/>
-          <p:nvPr/>
-        </p:nvSpPr>
-        <p:spPr>
-          <a:xfrm>
-            <a:off x="6428232" y="3364992"/>
-            <a:ext cx="1645920" cy="475488"/>
-          </a:xfrm>
-          <a:prstGeom prst="rect">
-            <a:avLst>
-              <a:gd name="adj" fmla="val 9615"/>
-            </a:avLst>
-          </a:prstGeom>
-          <a:solidFill>
-            <a:srgbClr val="FFFFFF"/>
-          </a:solidFill>
-          <a:ln w="12700">
-            <a:solidFill>
-              <a:srgbClr val="0D9488"/>
-            </a:solidFill>
-            <a:prstDash val="solid"/>
-          </a:ln>
-        </p:spPr>
-      </p:sp>
-      <p:sp>
-        <p:nvSpPr>
-          <p:cNvPr id="35" name="Text 33"/>
-          <p:cNvSpPr/>
-          <p:nvPr/>
-        </p:nvSpPr>
-        <p:spPr>
-          <a:xfrm>
-            <a:off x="6428232" y="3364992"/>
-            <a:ext cx="1645920" cy="475488"/>
-          </a:xfrm>
-          <a:prstGeom prst="rect">
-            <a:avLst/>
-          </a:prstGeom>
-          <a:noFill/>
-          <a:ln/>
-        </p:spPr>
-        <p:txBody>
-          <a:bodyPr wrap="square" lIns="0" tIns="0" rIns="0" bIns="0" rtlCol="0" anchor="ctr"/>
-          <a:lstStyle/>
-          <a:p>
-            <a:pPr algn="ctr" indent="0" marL="0">
-              <a:buNone/>
-            </a:pPr>
-            <a:r>
-              <a:rPr lang="en-US" sz="1400" b="1" dirty="0">
-                <a:solidFill>
-                  <a:srgbClr val="0D9488"/>
-                </a:solidFill>
-                <a:latin typeface="Trebuchet MS" pitchFamily="34" charset="0"/>
-                <a:ea typeface="Trebuchet MS" pitchFamily="34" charset="-122"/>
-                <a:cs typeface="Trebuchet MS" pitchFamily="34" charset="-120"/>
-              </a:rPr>
-              <a:t>tion</a:t>
-            </a:r>
-            <a:endParaRPr lang="en-US" sz="1400" dirty="0"/>
-          </a:p>
-        </p:txBody>
-      </p:sp>
-      <p:sp>
-        <p:nvSpPr>
-          <p:cNvPr id="36" name="Shape 34"/>
-          <p:cNvSpPr/>
-          <p:nvPr/>
-        </p:nvSpPr>
-        <p:spPr>
-          <a:xfrm>
-            <a:off x="365760" y="4096512"/>
-            <a:ext cx="1371600" cy="804672"/>
+              <a:t>Phonemes</a:t>
+            </a:r>
+            <a:endParaRPr lang="en-US" sz="1100" dirty="0"/>
+          </a:p>
+        </p:txBody>
+      </p:sp>
+      <p:sp>
+        <p:nvSpPr>
+          <p:cNvPr id="35" name="Shape 33"/>
+          <p:cNvSpPr/>
+          <p:nvPr/>
+        </p:nvSpPr>
+        <p:spPr>
+          <a:xfrm>
+            <a:off x="1874520" y="4096512"/>
+            <a:ext cx="6903720" cy="804672"/>
           </a:xfrm>
           <a:prstGeom prst="rect">
             <a:avLst>
@@ -27732,85 +26842,19 @@
             </a:avLst>
           </a:prstGeom>
           <a:solidFill>
-            <a:srgbClr val="E2E8F0"/>
+            <a:srgbClr val="F8FAFC"/>
           </a:solidFill>
           <a:ln w="12700">
             <a:solidFill>
               <a:srgbClr val="E2E8F0"/>
             </a:solidFill>
-            <a:prstDash val="solid"/>
-          </a:ln>
-        </p:spPr>
-      </p:sp>
-      <p:sp>
-        <p:nvSpPr>
-          <p:cNvPr id="37" name="Text 35"/>
-          <p:cNvSpPr/>
-          <p:nvPr/>
-        </p:nvSpPr>
-        <p:spPr>
-          <a:xfrm>
-            <a:off x="365760" y="4096512"/>
-            <a:ext cx="1371600" cy="804672"/>
-          </a:xfrm>
-          <a:prstGeom prst="rect">
-            <a:avLst/>
-          </a:prstGeom>
-          <a:noFill/>
-          <a:ln/>
-        </p:spPr>
-        <p:txBody>
-          <a:bodyPr wrap="square" lIns="0" tIns="0" rIns="0" bIns="0" rtlCol="0" anchor="ctr"/>
-          <a:lstStyle/>
-          <a:p>
-            <a:pPr algn="ctr" indent="0" marL="0">
-              <a:buNone/>
-            </a:pPr>
-            <a:r>
-              <a:rPr lang="en-US" sz="1100" b="1" dirty="0">
-                <a:solidFill>
-                  <a:srgbClr val="475569"/>
-                </a:solidFill>
-                <a:latin typeface="Trebuchet MS" pitchFamily="34" charset="0"/>
-                <a:ea typeface="Trebuchet MS" pitchFamily="34" charset="-122"/>
-                <a:cs typeface="Trebuchet MS" pitchFamily="34" charset="-120"/>
-              </a:rPr>
-              <a:t>Phonemes</a:t>
-            </a:r>
-            <a:endParaRPr lang="en-US" sz="1100" dirty="0"/>
-          </a:p>
-        </p:txBody>
-      </p:sp>
-      <p:sp>
-        <p:nvSpPr>
-          <p:cNvPr id="38" name="Shape 36"/>
-          <p:cNvSpPr/>
-          <p:nvPr/>
-        </p:nvSpPr>
-        <p:spPr>
-          <a:xfrm>
-            <a:off x="1874520" y="4096512"/>
-            <a:ext cx="6903720" cy="804672"/>
-          </a:xfrm>
-          <a:prstGeom prst="rect">
-            <a:avLst>
-              <a:gd name="adj" fmla="val 6818"/>
-            </a:avLst>
-          </a:prstGeom>
-          <a:solidFill>
-            <a:srgbClr val="F8FAFC"/>
-          </a:solidFill>
-          <a:ln w="12700">
-            <a:solidFill>
-              <a:srgbClr val="E2E8F0"/>
-            </a:solidFill>
             <a:prstDash val="dash"/>
           </a:ln>
         </p:spPr>
       </p:sp>
       <p:sp>
         <p:nvSpPr>
-          <p:cNvPr id="39" name="Text 37"/>
+          <p:cNvPr id="36" name="Text 34"/>
           <p:cNvSpPr/>
           <p:nvPr/>
         </p:nvSpPr>
@@ -28272,7 +27316,7 @@
                 <a:ea typeface="Trebuchet MS" pitchFamily="34" charset="-122"/>
                 <a:cs typeface="Trebuchet MS" pitchFamily="34" charset="-120"/>
               </a:rPr>
-              <a:t>audition</a:t>
+              <a:t>audible</a:t>
             </a:r>
             <a:endParaRPr lang="en-US" sz="2800" dirty="0"/>
           </a:p>
@@ -28352,7 +27396,7 @@
         </p:nvSpPr>
         <p:spPr>
           <a:xfrm>
-            <a:off x="2221992" y="2258568"/>
+            <a:off x="2938272" y="2258568"/>
             <a:ext cx="1828800" cy="292608"/>
           </a:xfrm>
           <a:prstGeom prst="rect">
@@ -28386,7 +27430,7 @@
         </p:nvSpPr>
         <p:spPr>
           <a:xfrm>
-            <a:off x="2221992" y="2258568"/>
+            <a:off x="2938272" y="2258568"/>
             <a:ext cx="1828800" cy="292608"/>
           </a:xfrm>
           <a:prstGeom prst="rect">
@@ -28425,7 +27469,7 @@
         </p:nvSpPr>
         <p:spPr>
           <a:xfrm>
-            <a:off x="2221992" y="2569464"/>
+            <a:off x="2938272" y="2569464"/>
             <a:ext cx="1828800" cy="201168"/>
           </a:xfrm>
           <a:prstGeom prst="rect">
@@ -28450,7 +27494,7 @@
                 <a:ea typeface="Calibri" pitchFamily="34" charset="-122"/>
                 <a:cs typeface="Calibri" pitchFamily="34" charset="-120"/>
               </a:rPr>
-              <a:t>hear</a:t>
+              <a:t>hear / listen</a:t>
             </a:r>
             <a:endParaRPr lang="en-US" sz="850" dirty="0"/>
           </a:p>
@@ -28464,7 +27508,7 @@
         </p:nvSpPr>
         <p:spPr>
           <a:xfrm>
-            <a:off x="4370832" y="2258568"/>
+            <a:off x="5803392" y="2258568"/>
             <a:ext cx="1828800" cy="292608"/>
           </a:xfrm>
           <a:prstGeom prst="rect">
@@ -28498,7 +27542,7 @@
         </p:nvSpPr>
         <p:spPr>
           <a:xfrm>
-            <a:off x="4370832" y="2258568"/>
+            <a:off x="5803392" y="2258568"/>
             <a:ext cx="1828800" cy="292608"/>
           </a:xfrm>
           <a:prstGeom prst="rect">
@@ -28523,7 +27567,7 @@
                 <a:ea typeface="Trebuchet MS" pitchFamily="34" charset="-122"/>
                 <a:cs typeface="Trebuchet MS" pitchFamily="34" charset="-120"/>
               </a:rPr>
-              <a:t>it</a:t>
+              <a:t>ible</a:t>
             </a:r>
             <a:endParaRPr lang="en-US" sz="1300" dirty="0"/>
           </a:p>
@@ -28537,7 +27581,7 @@
         </p:nvSpPr>
         <p:spPr>
           <a:xfrm>
-            <a:off x="4370832" y="2569464"/>
+            <a:off x="5803392" y="2569464"/>
             <a:ext cx="1828800" cy="201168"/>
           </a:xfrm>
           <a:prstGeom prst="rect">
@@ -28562,7 +27606,7 @@
                 <a:ea typeface="Calibri" pitchFamily="34" charset="-122"/>
                 <a:cs typeface="Calibri" pitchFamily="34" charset="-120"/>
               </a:rPr>
-              <a:t>go, act</a:t>
+              <a:t>able to be</a:t>
             </a:r>
             <a:endParaRPr lang="en-US" sz="850" dirty="0"/>
           </a:p>
@@ -28576,30 +27620,23 @@
         </p:nvSpPr>
         <p:spPr>
           <a:xfrm>
-            <a:off x="6519672" y="2258568"/>
-            <a:ext cx="1828800" cy="292608"/>
+            <a:off x="365760" y="3273552"/>
+            <a:ext cx="1371600" cy="658368"/>
           </a:xfrm>
           <a:prstGeom prst="rect">
             <a:avLst>
-              <a:gd name="adj" fmla="val 25000"/>
+              <a:gd name="adj" fmla="val 8333"/>
             </a:avLst>
           </a:prstGeom>
           <a:solidFill>
-            <a:srgbClr val="FCE7F3"/>
-          </a:solidFill>
-          <a:ln w="19050">
-            <a:solidFill>
-              <a:srgbClr val="DB2777"/>
-            </a:solidFill>
-            <a:prstDash val="solid"/>
-          </a:ln>
-          <a:effectLst>
-            <a:outerShdw sx="100000" sy="100000" kx="0" ky="0" algn="bl" rotWithShape="0" blurRad="101600" dist="38100" dir="8100000">
-              <a:srgbClr val="000000">
-                <a:alpha val="12000"/>
-              </a:srgbClr>
-            </a:outerShdw>
-          </a:effectLst>
+            <a:srgbClr val="E2E8F0"/>
+          </a:solidFill>
+          <a:ln w="12700">
+            <a:solidFill>
+              <a:srgbClr val="E2E8F0"/>
+            </a:solidFill>
+            <a:prstDash val="solid"/>
+          </a:ln>
         </p:spPr>
       </p:sp>
       <p:sp>
@@ -28610,86 +27647,47 @@
         </p:nvSpPr>
         <p:spPr>
           <a:xfrm>
-            <a:off x="6519672" y="2258568"/>
-            <a:ext cx="1828800" cy="292608"/>
-          </a:xfrm>
-          <a:prstGeom prst="rect">
-            <a:avLst/>
-          </a:prstGeom>
-          <a:noFill/>
-          <a:ln/>
-        </p:spPr>
-        <p:txBody>
-          <a:bodyPr wrap="square" lIns="0" tIns="0" rIns="0" bIns="0" rtlCol="0" anchor="ctr"/>
-          <a:lstStyle/>
-          <a:p>
-            <a:pPr algn="ctr" indent="0" marL="0">
-              <a:buNone/>
-            </a:pPr>
-            <a:r>
-              <a:rPr lang="en-US" sz="1300" b="1" dirty="0">
-                <a:solidFill>
-                  <a:srgbClr val="9D174D"/>
+            <a:off x="365760" y="3273552"/>
+            <a:ext cx="1371600" cy="658368"/>
+          </a:xfrm>
+          <a:prstGeom prst="rect">
+            <a:avLst/>
+          </a:prstGeom>
+          <a:noFill/>
+          <a:ln/>
+        </p:spPr>
+        <p:txBody>
+          <a:bodyPr wrap="square" lIns="0" tIns="0" rIns="0" bIns="0" rtlCol="0" anchor="ctr"/>
+          <a:lstStyle/>
+          <a:p>
+            <a:pPr algn="ctr" indent="0" marL="0">
+              <a:buNone/>
+            </a:pPr>
+            <a:r>
+              <a:rPr lang="en-US" sz="1100" b="1" dirty="0">
+                <a:solidFill>
+                  <a:srgbClr val="475569"/>
                 </a:solidFill>
                 <a:latin typeface="Trebuchet MS" pitchFamily="34" charset="0"/>
                 <a:ea typeface="Trebuchet MS" pitchFamily="34" charset="-122"/>
                 <a:cs typeface="Trebuchet MS" pitchFamily="34" charset="-120"/>
               </a:rPr>
-              <a:t>ion</a:t>
-            </a:r>
-            <a:endParaRPr lang="en-US" sz="1300" dirty="0"/>
-          </a:p>
-        </p:txBody>
-      </p:sp>
-      <p:sp>
-        <p:nvSpPr>
-          <p:cNvPr id="24" name="Text 22"/>
-          <p:cNvSpPr/>
-          <p:nvPr/>
-        </p:nvSpPr>
-        <p:spPr>
-          <a:xfrm>
-            <a:off x="6519672" y="2569464"/>
-            <a:ext cx="1828800" cy="201168"/>
-          </a:xfrm>
-          <a:prstGeom prst="rect">
-            <a:avLst/>
-          </a:prstGeom>
-          <a:noFill/>
-          <a:ln/>
-        </p:spPr>
-        <p:txBody>
-          <a:bodyPr wrap="square" lIns="0" tIns="0" rIns="0" bIns="0" rtlCol="0" anchor="t"/>
-          <a:lstStyle/>
-          <a:p>
-            <a:pPr algn="ctr" indent="0" marL="0">
-              <a:buNone/>
-            </a:pPr>
-            <a:r>
-              <a:rPr lang="en-US" sz="850" dirty="0">
-                <a:solidFill>
-                  <a:srgbClr val="475569"/>
-                </a:solidFill>
-                <a:latin typeface="Calibri" pitchFamily="34" charset="0"/>
-                <a:ea typeface="Calibri" pitchFamily="34" charset="-122"/>
-                <a:cs typeface="Calibri" pitchFamily="34" charset="-120"/>
-              </a:rPr>
-              <a:t>action or process</a:t>
-            </a:r>
-            <a:endParaRPr lang="en-US" sz="850" dirty="0"/>
-          </a:p>
-        </p:txBody>
-      </p:sp>
-      <p:sp>
-        <p:nvSpPr>
-          <p:cNvPr id="25" name="Shape 23"/>
-          <p:cNvSpPr/>
-          <p:nvPr/>
-        </p:nvSpPr>
-        <p:spPr>
-          <a:xfrm>
-            <a:off x="365760" y="3273552"/>
-            <a:ext cx="1371600" cy="658368"/>
+              <a:t>Syllables</a:t>
+            </a:r>
+            <a:endParaRPr lang="en-US" sz="1100" dirty="0"/>
+          </a:p>
+        </p:txBody>
+      </p:sp>
+      <p:sp>
+        <p:nvSpPr>
+          <p:cNvPr id="24" name="Shape 22"/>
+          <p:cNvSpPr/>
+          <p:nvPr/>
+        </p:nvSpPr>
+        <p:spPr>
+          <a:xfrm>
+            <a:off x="1874520" y="3273552"/>
+            <a:ext cx="6903720" cy="658368"/>
           </a:xfrm>
           <a:prstGeom prst="rect">
             <a:avLst>
@@ -28697,11 +27695,38 @@
             </a:avLst>
           </a:prstGeom>
           <a:solidFill>
-            <a:srgbClr val="E2E8F0"/>
-          </a:solidFill>
-          <a:ln w="12700">
-            <a:solidFill>
-              <a:srgbClr val="E2E8F0"/>
+            <a:srgbClr val="CCFBF1"/>
+          </a:solidFill>
+          <a:ln w="12700">
+            <a:solidFill>
+              <a:srgbClr val="0D9488"/>
+            </a:solidFill>
+            <a:prstDash val="solid"/>
+          </a:ln>
+        </p:spPr>
+      </p:sp>
+      <p:sp>
+        <p:nvSpPr>
+          <p:cNvPr id="25" name="Shape 23"/>
+          <p:cNvSpPr/>
+          <p:nvPr/>
+        </p:nvSpPr>
+        <p:spPr>
+          <a:xfrm>
+            <a:off x="2313432" y="3364992"/>
+            <a:ext cx="1645920" cy="475488"/>
+          </a:xfrm>
+          <a:prstGeom prst="rect">
+            <a:avLst>
+              <a:gd name="adj" fmla="val 9615"/>
+            </a:avLst>
+          </a:prstGeom>
+          <a:solidFill>
+            <a:srgbClr val="FFFFFF"/>
+          </a:solidFill>
+          <a:ln w="12700">
+            <a:solidFill>
+              <a:srgbClr val="0D9488"/>
             </a:solidFill>
             <a:prstDash val="solid"/>
           </a:ln>
@@ -28715,32 +27740,308 @@
         </p:nvSpPr>
         <p:spPr>
           <a:xfrm>
-            <a:off x="365760" y="3273552"/>
-            <a:ext cx="1371600" cy="658368"/>
-          </a:xfrm>
-          <a:prstGeom prst="rect">
-            <a:avLst/>
-          </a:prstGeom>
-          <a:noFill/>
-          <a:ln/>
-        </p:spPr>
-        <p:txBody>
-          <a:bodyPr wrap="square" lIns="0" tIns="0" rIns="0" bIns="0" rtlCol="0" anchor="ctr"/>
-          <a:lstStyle/>
-          <a:p>
-            <a:pPr algn="ctr" indent="0" marL="0">
-              <a:buNone/>
-            </a:pPr>
-            <a:r>
-              <a:rPr lang="en-US" sz="1100" b="1" dirty="0">
-                <a:solidFill>
-                  <a:srgbClr val="475569"/>
+            <a:off x="2313432" y="3364992"/>
+            <a:ext cx="1645920" cy="475488"/>
+          </a:xfrm>
+          <a:prstGeom prst="rect">
+            <a:avLst/>
+          </a:prstGeom>
+          <a:noFill/>
+          <a:ln/>
+        </p:spPr>
+        <p:txBody>
+          <a:bodyPr wrap="square" lIns="0" tIns="0" rIns="0" bIns="0" rtlCol="0" anchor="ctr"/>
+          <a:lstStyle/>
+          <a:p>
+            <a:pPr algn="ctr" indent="0" marL="0">
+              <a:buNone/>
+            </a:pPr>
+            <a:r>
+              <a:rPr lang="en-US" sz="1400" b="1" dirty="0">
+                <a:solidFill>
+                  <a:srgbClr val="0D9488"/>
                 </a:solidFill>
                 <a:latin typeface="Trebuchet MS" pitchFamily="34" charset="0"/>
                 <a:ea typeface="Trebuchet MS" pitchFamily="34" charset="-122"/>
                 <a:cs typeface="Trebuchet MS" pitchFamily="34" charset="-120"/>
               </a:rPr>
-              <a:t>Syllables</a:t>
+              <a:t>au</a:t>
+            </a:r>
+            <a:endParaRPr lang="en-US" sz="1400" dirty="0"/>
+          </a:p>
+        </p:txBody>
+      </p:sp>
+      <p:sp>
+        <p:nvSpPr>
+          <p:cNvPr id="27" name="Text 25"/>
+          <p:cNvSpPr/>
+          <p:nvPr/>
+        </p:nvSpPr>
+        <p:spPr>
+          <a:xfrm>
+            <a:off x="3959352" y="3364992"/>
+            <a:ext cx="411480" cy="475488"/>
+          </a:xfrm>
+          <a:prstGeom prst="rect">
+            <a:avLst/>
+          </a:prstGeom>
+          <a:noFill/>
+          <a:ln/>
+        </p:spPr>
+        <p:txBody>
+          <a:bodyPr wrap="square" lIns="0" tIns="0" rIns="0" bIns="0" rtlCol="0" anchor="ctr"/>
+          <a:lstStyle/>
+          <a:p>
+            <a:pPr algn="ctr" indent="0" marL="0">
+              <a:buNone/>
+            </a:pPr>
+            <a:r>
+              <a:rPr lang="en-US" sz="1600" b="1" dirty="0">
+                <a:solidFill>
+                  <a:srgbClr val="0D9488"/>
+                </a:solidFill>
+                <a:latin typeface="Trebuchet MS" pitchFamily="34" charset="0"/>
+                <a:ea typeface="Trebuchet MS" pitchFamily="34" charset="-122"/>
+                <a:cs typeface="Trebuchet MS" pitchFamily="34" charset="-120"/>
+              </a:rPr>
+              <a:t>·</a:t>
+            </a:r>
+            <a:endParaRPr lang="en-US" sz="1600" dirty="0"/>
+          </a:p>
+        </p:txBody>
+      </p:sp>
+      <p:sp>
+        <p:nvSpPr>
+          <p:cNvPr id="28" name="Shape 26"/>
+          <p:cNvSpPr/>
+          <p:nvPr/>
+        </p:nvSpPr>
+        <p:spPr>
+          <a:xfrm>
+            <a:off x="4370832" y="3364992"/>
+            <a:ext cx="1645920" cy="475488"/>
+          </a:xfrm>
+          <a:prstGeom prst="rect">
+            <a:avLst>
+              <a:gd name="adj" fmla="val 9615"/>
+            </a:avLst>
+          </a:prstGeom>
+          <a:solidFill>
+            <a:srgbClr val="FFFFFF"/>
+          </a:solidFill>
+          <a:ln w="12700">
+            <a:solidFill>
+              <a:srgbClr val="0D9488"/>
+            </a:solidFill>
+            <a:prstDash val="solid"/>
+          </a:ln>
+        </p:spPr>
+      </p:sp>
+      <p:sp>
+        <p:nvSpPr>
+          <p:cNvPr id="29" name="Text 27"/>
+          <p:cNvSpPr/>
+          <p:nvPr/>
+        </p:nvSpPr>
+        <p:spPr>
+          <a:xfrm>
+            <a:off x="4370832" y="3364992"/>
+            <a:ext cx="1645920" cy="475488"/>
+          </a:xfrm>
+          <a:prstGeom prst="rect">
+            <a:avLst/>
+          </a:prstGeom>
+          <a:noFill/>
+          <a:ln/>
+        </p:spPr>
+        <p:txBody>
+          <a:bodyPr wrap="square" lIns="0" tIns="0" rIns="0" bIns="0" rtlCol="0" anchor="ctr"/>
+          <a:lstStyle/>
+          <a:p>
+            <a:pPr algn="ctr" indent="0" marL="0">
+              <a:buNone/>
+            </a:pPr>
+            <a:r>
+              <a:rPr lang="en-US" sz="1400" b="1" dirty="0">
+                <a:solidFill>
+                  <a:srgbClr val="0D9488"/>
+                </a:solidFill>
+                <a:latin typeface="Trebuchet MS" pitchFamily="34" charset="0"/>
+                <a:ea typeface="Trebuchet MS" pitchFamily="34" charset="-122"/>
+                <a:cs typeface="Trebuchet MS" pitchFamily="34" charset="-120"/>
+              </a:rPr>
+              <a:t>di</a:t>
+            </a:r>
+            <a:endParaRPr lang="en-US" sz="1400" dirty="0"/>
+          </a:p>
+        </p:txBody>
+      </p:sp>
+      <p:sp>
+        <p:nvSpPr>
+          <p:cNvPr id="30" name="Text 28"/>
+          <p:cNvSpPr/>
+          <p:nvPr/>
+        </p:nvSpPr>
+        <p:spPr>
+          <a:xfrm>
+            <a:off x="6016752" y="3364992"/>
+            <a:ext cx="411480" cy="475488"/>
+          </a:xfrm>
+          <a:prstGeom prst="rect">
+            <a:avLst/>
+          </a:prstGeom>
+          <a:noFill/>
+          <a:ln/>
+        </p:spPr>
+        <p:txBody>
+          <a:bodyPr wrap="square" lIns="0" tIns="0" rIns="0" bIns="0" rtlCol="0" anchor="ctr"/>
+          <a:lstStyle/>
+          <a:p>
+            <a:pPr algn="ctr" indent="0" marL="0">
+              <a:buNone/>
+            </a:pPr>
+            <a:r>
+              <a:rPr lang="en-US" sz="1600" b="1" dirty="0">
+                <a:solidFill>
+                  <a:srgbClr val="0D9488"/>
+                </a:solidFill>
+                <a:latin typeface="Trebuchet MS" pitchFamily="34" charset="0"/>
+                <a:ea typeface="Trebuchet MS" pitchFamily="34" charset="-122"/>
+                <a:cs typeface="Trebuchet MS" pitchFamily="34" charset="-120"/>
+              </a:rPr>
+              <a:t>·</a:t>
+            </a:r>
+            <a:endParaRPr lang="en-US" sz="1600" dirty="0"/>
+          </a:p>
+        </p:txBody>
+      </p:sp>
+      <p:sp>
+        <p:nvSpPr>
+          <p:cNvPr id="31" name="Shape 29"/>
+          <p:cNvSpPr/>
+          <p:nvPr/>
+        </p:nvSpPr>
+        <p:spPr>
+          <a:xfrm>
+            <a:off x="6428232" y="3364992"/>
+            <a:ext cx="1645920" cy="475488"/>
+          </a:xfrm>
+          <a:prstGeom prst="rect">
+            <a:avLst>
+              <a:gd name="adj" fmla="val 9615"/>
+            </a:avLst>
+          </a:prstGeom>
+          <a:solidFill>
+            <a:srgbClr val="FFFFFF"/>
+          </a:solidFill>
+          <a:ln w="12700">
+            <a:solidFill>
+              <a:srgbClr val="0D9488"/>
+            </a:solidFill>
+            <a:prstDash val="solid"/>
+          </a:ln>
+        </p:spPr>
+      </p:sp>
+      <p:sp>
+        <p:nvSpPr>
+          <p:cNvPr id="32" name="Text 30"/>
+          <p:cNvSpPr/>
+          <p:nvPr/>
+        </p:nvSpPr>
+        <p:spPr>
+          <a:xfrm>
+            <a:off x="6428232" y="3364992"/>
+            <a:ext cx="1645920" cy="475488"/>
+          </a:xfrm>
+          <a:prstGeom prst="rect">
+            <a:avLst/>
+          </a:prstGeom>
+          <a:noFill/>
+          <a:ln/>
+        </p:spPr>
+        <p:txBody>
+          <a:bodyPr wrap="square" lIns="0" tIns="0" rIns="0" bIns="0" rtlCol="0" anchor="ctr"/>
+          <a:lstStyle/>
+          <a:p>
+            <a:pPr algn="ctr" indent="0" marL="0">
+              <a:buNone/>
+            </a:pPr>
+            <a:r>
+              <a:rPr lang="en-US" sz="1400" b="1" dirty="0">
+                <a:solidFill>
+                  <a:srgbClr val="0D9488"/>
+                </a:solidFill>
+                <a:latin typeface="Trebuchet MS" pitchFamily="34" charset="0"/>
+                <a:ea typeface="Trebuchet MS" pitchFamily="34" charset="-122"/>
+                <a:cs typeface="Trebuchet MS" pitchFamily="34" charset="-120"/>
+              </a:rPr>
+              <a:t>ble</a:t>
+            </a:r>
+            <a:endParaRPr lang="en-US" sz="1400" dirty="0"/>
+          </a:p>
+        </p:txBody>
+      </p:sp>
+      <p:sp>
+        <p:nvSpPr>
+          <p:cNvPr id="33" name="Shape 31"/>
+          <p:cNvSpPr/>
+          <p:nvPr/>
+        </p:nvSpPr>
+        <p:spPr>
+          <a:xfrm>
+            <a:off x="365760" y="4096512"/>
+            <a:ext cx="1371600" cy="804672"/>
+          </a:xfrm>
+          <a:prstGeom prst="rect">
+            <a:avLst>
+              <a:gd name="adj" fmla="val 6818"/>
+            </a:avLst>
+          </a:prstGeom>
+          <a:solidFill>
+            <a:srgbClr val="E2E8F0"/>
+          </a:solidFill>
+          <a:ln w="12700">
+            <a:solidFill>
+              <a:srgbClr val="E2E8F0"/>
+            </a:solidFill>
+            <a:prstDash val="solid"/>
+          </a:ln>
+        </p:spPr>
+      </p:sp>
+      <p:sp>
+        <p:nvSpPr>
+          <p:cNvPr id="34" name="Text 32"/>
+          <p:cNvSpPr/>
+          <p:nvPr/>
+        </p:nvSpPr>
+        <p:spPr>
+          <a:xfrm>
+            <a:off x="365760" y="4096512"/>
+            <a:ext cx="1371600" cy="804672"/>
+          </a:xfrm>
+          <a:prstGeom prst="rect">
+            <a:avLst/>
+          </a:prstGeom>
+          <a:noFill/>
+          <a:ln/>
+        </p:spPr>
+        <p:txBody>
+          <a:bodyPr wrap="square" lIns="0" tIns="0" rIns="0" bIns="0" rtlCol="0" anchor="ctr"/>
+          <a:lstStyle/>
+          <a:p>
+            <a:pPr algn="ctr" indent="0" marL="0">
+              <a:buNone/>
+            </a:pPr>
+            <a:r>
+              <a:rPr lang="en-US" sz="1100" b="1" dirty="0">
+                <a:solidFill>
+                  <a:srgbClr val="475569"/>
+                </a:solidFill>
+                <a:latin typeface="Trebuchet MS" pitchFamily="34" charset="0"/>
+                <a:ea typeface="Trebuchet MS" pitchFamily="34" charset="-122"/>
+                <a:cs typeface="Trebuchet MS" pitchFamily="34" charset="-120"/>
+              </a:rPr>
+              <a:t>Phonemes</a:t>
             </a:r>
             <a:endParaRPr lang="en-US" sz="1100" dirty="0"/>
           </a:p>
@@ -28748,13 +28049,13 @@
       </p:sp>
       <p:sp>
         <p:nvSpPr>
-          <p:cNvPr id="27" name="Shape 25"/>
-          <p:cNvSpPr/>
-          <p:nvPr/>
-        </p:nvSpPr>
-        <p:spPr>
-          <a:xfrm>
-            <a:off x="1874520" y="3273552"/>
+          <p:cNvPr id="35" name="Shape 33"/>
+          <p:cNvSpPr/>
+          <p:nvPr/>
+        </p:nvSpPr>
+        <p:spPr>
+          <a:xfrm>
+            <a:off x="1874520" y="4096512"/>
             <a:ext cx="6903720" cy="658368"/>
           </a:xfrm>
           <a:prstGeom prst="rect">
@@ -28763,30 +28064,30 @@
             </a:avLst>
           </a:prstGeom>
           <a:solidFill>
-            <a:srgbClr val="CCFBF1"/>
-          </a:solidFill>
-          <a:ln w="12700">
-            <a:solidFill>
-              <a:srgbClr val="0D9488"/>
-            </a:solidFill>
-            <a:prstDash val="solid"/>
-          </a:ln>
-        </p:spPr>
-      </p:sp>
-      <p:sp>
-        <p:nvSpPr>
-          <p:cNvPr id="28" name="Shape 26"/>
-          <p:cNvSpPr/>
-          <p:nvPr/>
-        </p:nvSpPr>
-        <p:spPr>
-          <a:xfrm>
-            <a:off x="2313432" y="3364992"/>
-            <a:ext cx="1645920" cy="475488"/>
+            <a:srgbClr val="FCE7F3"/>
+          </a:solidFill>
+          <a:ln w="12700">
+            <a:solidFill>
+              <a:srgbClr val="DB2777"/>
+            </a:solidFill>
+            <a:prstDash val="solid"/>
+          </a:ln>
+        </p:spPr>
+      </p:sp>
+      <p:sp>
+        <p:nvSpPr>
+          <p:cNvPr id="36" name="Shape 34"/>
+          <p:cNvSpPr/>
+          <p:nvPr/>
+        </p:nvSpPr>
+        <p:spPr>
+          <a:xfrm>
+            <a:off x="2427732" y="4169664"/>
+            <a:ext cx="685800" cy="475488"/>
           </a:xfrm>
           <a:prstGeom prst="rect">
             <a:avLst>
-              <a:gd name="adj" fmla="val 9615"/>
+              <a:gd name="adj" fmla="val 7692"/>
             </a:avLst>
           </a:prstGeom>
           <a:solidFill>
@@ -28794,40 +28095,40 @@
           </a:solidFill>
           <a:ln w="12700">
             <a:solidFill>
-              <a:srgbClr val="0D9488"/>
-            </a:solidFill>
-            <a:prstDash val="solid"/>
-          </a:ln>
-        </p:spPr>
-      </p:sp>
-      <p:sp>
-        <p:nvSpPr>
-          <p:cNvPr id="29" name="Text 27"/>
-          <p:cNvSpPr/>
-          <p:nvPr/>
-        </p:nvSpPr>
-        <p:spPr>
-          <a:xfrm>
-            <a:off x="2313432" y="3364992"/>
-            <a:ext cx="1645920" cy="475488"/>
-          </a:xfrm>
-          <a:prstGeom prst="rect">
-            <a:avLst/>
-          </a:prstGeom>
-          <a:noFill/>
-          <a:ln/>
-        </p:spPr>
-        <p:txBody>
-          <a:bodyPr wrap="square" lIns="0" tIns="0" rIns="0" bIns="0" rtlCol="0" anchor="ctr"/>
-          <a:lstStyle/>
-          <a:p>
-            <a:pPr algn="ctr" indent="0" marL="0">
-              <a:buNone/>
-            </a:pPr>
-            <a:r>
-              <a:rPr lang="en-US" sz="1400" b="1" dirty="0">
-                <a:solidFill>
-                  <a:srgbClr val="0D9488"/>
+              <a:srgbClr val="DB2777"/>
+            </a:solidFill>
+            <a:prstDash val="solid"/>
+          </a:ln>
+        </p:spPr>
+      </p:sp>
+      <p:sp>
+        <p:nvSpPr>
+          <p:cNvPr id="37" name="Text 35"/>
+          <p:cNvSpPr/>
+          <p:nvPr/>
+        </p:nvSpPr>
+        <p:spPr>
+          <a:xfrm>
+            <a:off x="2427732" y="4169664"/>
+            <a:ext cx="685800" cy="475488"/>
+          </a:xfrm>
+          <a:prstGeom prst="rect">
+            <a:avLst/>
+          </a:prstGeom>
+          <a:noFill/>
+          <a:ln/>
+        </p:spPr>
+        <p:txBody>
+          <a:bodyPr wrap="square" lIns="0" tIns="0" rIns="0" bIns="0" rtlCol="0" anchor="ctr"/>
+          <a:lstStyle/>
+          <a:p>
+            <a:pPr algn="ctr" indent="0" marL="0">
+              <a:buNone/>
+            </a:pPr>
+            <a:r>
+              <a:rPr lang="en-US" sz="900" b="1" dirty="0">
+                <a:solidFill>
+                  <a:srgbClr val="9D174D"/>
                 </a:solidFill>
                 <a:latin typeface="Trebuchet MS" pitchFamily="34" charset="0"/>
                 <a:ea typeface="Trebuchet MS" pitchFamily="34" charset="-122"/>
@@ -28835,63 +28136,90 @@
               </a:rPr>
               <a:t>au</a:t>
             </a:r>
-            <a:endParaRPr lang="en-US" sz="1400" dirty="0"/>
-          </a:p>
-        </p:txBody>
-      </p:sp>
-      <p:sp>
-        <p:nvSpPr>
-          <p:cNvPr id="30" name="Text 28"/>
-          <p:cNvSpPr/>
-          <p:nvPr/>
-        </p:nvSpPr>
-        <p:spPr>
-          <a:xfrm>
-            <a:off x="3959352" y="3364992"/>
-            <a:ext cx="411480" cy="475488"/>
-          </a:xfrm>
-          <a:prstGeom prst="rect">
-            <a:avLst/>
-          </a:prstGeom>
-          <a:noFill/>
-          <a:ln/>
-        </p:spPr>
-        <p:txBody>
-          <a:bodyPr wrap="square" lIns="0" tIns="0" rIns="0" bIns="0" rtlCol="0" anchor="ctr"/>
-          <a:lstStyle/>
-          <a:p>
-            <a:pPr algn="ctr" indent="0" marL="0">
-              <a:buNone/>
-            </a:pPr>
-            <a:r>
-              <a:rPr lang="en-US" sz="1600" b="1" dirty="0">
-                <a:solidFill>
-                  <a:srgbClr val="0D9488"/>
+            <a:endParaRPr lang="en-US" sz="900" dirty="0"/>
+          </a:p>
+        </p:txBody>
+      </p:sp>
+      <p:sp>
+        <p:nvSpPr>
+          <p:cNvPr id="38" name="Shape 36"/>
+          <p:cNvSpPr/>
+          <p:nvPr/>
+        </p:nvSpPr>
+        <p:spPr>
+          <a:xfrm>
+            <a:off x="3639312" y="4169664"/>
+            <a:ext cx="685800" cy="475488"/>
+          </a:xfrm>
+          <a:prstGeom prst="rect">
+            <a:avLst>
+              <a:gd name="adj" fmla="val 7692"/>
+            </a:avLst>
+          </a:prstGeom>
+          <a:solidFill>
+            <a:srgbClr val="FFFFFF"/>
+          </a:solidFill>
+          <a:ln w="12700">
+            <a:solidFill>
+              <a:srgbClr val="DB2777"/>
+            </a:solidFill>
+            <a:prstDash val="solid"/>
+          </a:ln>
+        </p:spPr>
+      </p:sp>
+      <p:sp>
+        <p:nvSpPr>
+          <p:cNvPr id="39" name="Text 37"/>
+          <p:cNvSpPr/>
+          <p:nvPr/>
+        </p:nvSpPr>
+        <p:spPr>
+          <a:xfrm>
+            <a:off x="3639312" y="4169664"/>
+            <a:ext cx="685800" cy="475488"/>
+          </a:xfrm>
+          <a:prstGeom prst="rect">
+            <a:avLst/>
+          </a:prstGeom>
+          <a:noFill/>
+          <a:ln/>
+        </p:spPr>
+        <p:txBody>
+          <a:bodyPr wrap="square" lIns="0" tIns="0" rIns="0" bIns="0" rtlCol="0" anchor="ctr"/>
+          <a:lstStyle/>
+          <a:p>
+            <a:pPr algn="ctr" indent="0" marL="0">
+              <a:buNone/>
+            </a:pPr>
+            <a:r>
+              <a:rPr lang="en-US" sz="900" b="1" dirty="0">
+                <a:solidFill>
+                  <a:srgbClr val="9D174D"/>
                 </a:solidFill>
                 <a:latin typeface="Trebuchet MS" pitchFamily="34" charset="0"/>
                 <a:ea typeface="Trebuchet MS" pitchFamily="34" charset="-122"/>
                 <a:cs typeface="Trebuchet MS" pitchFamily="34" charset="-120"/>
               </a:rPr>
-              <a:t>·</a:t>
-            </a:r>
-            <a:endParaRPr lang="en-US" sz="1600" dirty="0"/>
-          </a:p>
-        </p:txBody>
-      </p:sp>
-      <p:sp>
-        <p:nvSpPr>
-          <p:cNvPr id="31" name="Shape 29"/>
-          <p:cNvSpPr/>
-          <p:nvPr/>
-        </p:nvSpPr>
-        <p:spPr>
-          <a:xfrm>
-            <a:off x="4370832" y="3364992"/>
-            <a:ext cx="1645920" cy="475488"/>
+              <a:t>d</a:t>
+            </a:r>
+            <a:endParaRPr lang="en-US" sz="900" dirty="0"/>
+          </a:p>
+        </p:txBody>
+      </p:sp>
+      <p:sp>
+        <p:nvSpPr>
+          <p:cNvPr id="40" name="Shape 38"/>
+          <p:cNvSpPr/>
+          <p:nvPr/>
+        </p:nvSpPr>
+        <p:spPr>
+          <a:xfrm>
+            <a:off x="4850892" y="4169664"/>
+            <a:ext cx="685800" cy="475488"/>
           </a:xfrm>
           <a:prstGeom prst="rect">
             <a:avLst>
-              <a:gd name="adj" fmla="val 9615"/>
+              <a:gd name="adj" fmla="val 7692"/>
             </a:avLst>
           </a:prstGeom>
           <a:solidFill>
@@ -28899,104 +28227,131 @@
           </a:solidFill>
           <a:ln w="12700">
             <a:solidFill>
-              <a:srgbClr val="0D9488"/>
-            </a:solidFill>
-            <a:prstDash val="solid"/>
-          </a:ln>
-        </p:spPr>
-      </p:sp>
-      <p:sp>
-        <p:nvSpPr>
-          <p:cNvPr id="32" name="Text 30"/>
-          <p:cNvSpPr/>
-          <p:nvPr/>
-        </p:nvSpPr>
-        <p:spPr>
-          <a:xfrm>
-            <a:off x="4370832" y="3364992"/>
-            <a:ext cx="1645920" cy="475488"/>
-          </a:xfrm>
-          <a:prstGeom prst="rect">
-            <a:avLst/>
-          </a:prstGeom>
-          <a:noFill/>
-          <a:ln/>
-        </p:spPr>
-        <p:txBody>
-          <a:bodyPr wrap="square" lIns="0" tIns="0" rIns="0" bIns="0" rtlCol="0" anchor="ctr"/>
-          <a:lstStyle/>
-          <a:p>
-            <a:pPr algn="ctr" indent="0" marL="0">
-              <a:buNone/>
-            </a:pPr>
-            <a:r>
-              <a:rPr lang="en-US" sz="1400" b="1" dirty="0">
-                <a:solidFill>
-                  <a:srgbClr val="0D9488"/>
+              <a:srgbClr val="DB2777"/>
+            </a:solidFill>
+            <a:prstDash val="solid"/>
+          </a:ln>
+        </p:spPr>
+      </p:sp>
+      <p:sp>
+        <p:nvSpPr>
+          <p:cNvPr id="41" name="Text 39"/>
+          <p:cNvSpPr/>
+          <p:nvPr/>
+        </p:nvSpPr>
+        <p:spPr>
+          <a:xfrm>
+            <a:off x="4850892" y="4169664"/>
+            <a:ext cx="685800" cy="475488"/>
+          </a:xfrm>
+          <a:prstGeom prst="rect">
+            <a:avLst/>
+          </a:prstGeom>
+          <a:noFill/>
+          <a:ln/>
+        </p:spPr>
+        <p:txBody>
+          <a:bodyPr wrap="square" lIns="0" tIns="0" rIns="0" bIns="0" rtlCol="0" anchor="ctr"/>
+          <a:lstStyle/>
+          <a:p>
+            <a:pPr algn="ctr" indent="0" marL="0">
+              <a:buNone/>
+            </a:pPr>
+            <a:r>
+              <a:rPr lang="en-US" sz="900" b="1" dirty="0">
+                <a:solidFill>
+                  <a:srgbClr val="9D174D"/>
                 </a:solidFill>
                 <a:latin typeface="Trebuchet MS" pitchFamily="34" charset="0"/>
                 <a:ea typeface="Trebuchet MS" pitchFamily="34" charset="-122"/>
                 <a:cs typeface="Trebuchet MS" pitchFamily="34" charset="-120"/>
               </a:rPr>
-              <a:t>di</a:t>
-            </a:r>
-            <a:endParaRPr lang="en-US" sz="1400" dirty="0"/>
-          </a:p>
-        </p:txBody>
-      </p:sp>
-      <p:sp>
-        <p:nvSpPr>
-          <p:cNvPr id="33" name="Text 31"/>
-          <p:cNvSpPr/>
-          <p:nvPr/>
-        </p:nvSpPr>
-        <p:spPr>
-          <a:xfrm>
-            <a:off x="6016752" y="3364992"/>
-            <a:ext cx="411480" cy="475488"/>
-          </a:xfrm>
-          <a:prstGeom prst="rect">
-            <a:avLst/>
-          </a:prstGeom>
-          <a:noFill/>
-          <a:ln/>
-        </p:spPr>
-        <p:txBody>
-          <a:bodyPr wrap="square" lIns="0" tIns="0" rIns="0" bIns="0" rtlCol="0" anchor="ctr"/>
-          <a:lstStyle/>
-          <a:p>
-            <a:pPr algn="ctr" indent="0" marL="0">
-              <a:buNone/>
-            </a:pPr>
-            <a:r>
-              <a:rPr lang="en-US" sz="1600" b="1" dirty="0">
-                <a:solidFill>
-                  <a:srgbClr val="0D9488"/>
+              <a:t>i</a:t>
+            </a:r>
+            <a:endParaRPr lang="en-US" sz="900" dirty="0"/>
+          </a:p>
+        </p:txBody>
+      </p:sp>
+      <p:sp>
+        <p:nvSpPr>
+          <p:cNvPr id="42" name="Shape 40"/>
+          <p:cNvSpPr/>
+          <p:nvPr/>
+        </p:nvSpPr>
+        <p:spPr>
+          <a:xfrm>
+            <a:off x="6062472" y="4169664"/>
+            <a:ext cx="685800" cy="475488"/>
+          </a:xfrm>
+          <a:prstGeom prst="rect">
+            <a:avLst>
+              <a:gd name="adj" fmla="val 7692"/>
+            </a:avLst>
+          </a:prstGeom>
+          <a:solidFill>
+            <a:srgbClr val="FFFFFF"/>
+          </a:solidFill>
+          <a:ln w="12700">
+            <a:solidFill>
+              <a:srgbClr val="DB2777"/>
+            </a:solidFill>
+            <a:prstDash val="solid"/>
+          </a:ln>
+        </p:spPr>
+      </p:sp>
+      <p:sp>
+        <p:nvSpPr>
+          <p:cNvPr id="43" name="Text 41"/>
+          <p:cNvSpPr/>
+          <p:nvPr/>
+        </p:nvSpPr>
+        <p:spPr>
+          <a:xfrm>
+            <a:off x="6062472" y="4169664"/>
+            <a:ext cx="685800" cy="475488"/>
+          </a:xfrm>
+          <a:prstGeom prst="rect">
+            <a:avLst/>
+          </a:prstGeom>
+          <a:noFill/>
+          <a:ln/>
+        </p:spPr>
+        <p:txBody>
+          <a:bodyPr wrap="square" lIns="0" tIns="0" rIns="0" bIns="0" rtlCol="0" anchor="ctr"/>
+          <a:lstStyle/>
+          <a:p>
+            <a:pPr algn="ctr" indent="0" marL="0">
+              <a:buNone/>
+            </a:pPr>
+            <a:r>
+              <a:rPr lang="en-US" sz="900" b="1" dirty="0">
+                <a:solidFill>
+                  <a:srgbClr val="9D174D"/>
                 </a:solidFill>
                 <a:latin typeface="Trebuchet MS" pitchFamily="34" charset="0"/>
                 <a:ea typeface="Trebuchet MS" pitchFamily="34" charset="-122"/>
                 <a:cs typeface="Trebuchet MS" pitchFamily="34" charset="-120"/>
               </a:rPr>
-              <a:t>·</a:t>
-            </a:r>
-            <a:endParaRPr lang="en-US" sz="1600" dirty="0"/>
-          </a:p>
-        </p:txBody>
-      </p:sp>
-      <p:sp>
-        <p:nvSpPr>
-          <p:cNvPr id="34" name="Shape 32"/>
-          <p:cNvSpPr/>
-          <p:nvPr/>
-        </p:nvSpPr>
-        <p:spPr>
-          <a:xfrm>
-            <a:off x="6428232" y="3364992"/>
-            <a:ext cx="1645920" cy="475488"/>
+              <a:t>b</a:t>
+            </a:r>
+            <a:endParaRPr lang="en-US" sz="900" dirty="0"/>
+          </a:p>
+        </p:txBody>
+      </p:sp>
+      <p:sp>
+        <p:nvSpPr>
+          <p:cNvPr id="44" name="Shape 42"/>
+          <p:cNvSpPr/>
+          <p:nvPr/>
+        </p:nvSpPr>
+        <p:spPr>
+          <a:xfrm>
+            <a:off x="7274052" y="4169664"/>
+            <a:ext cx="685800" cy="475488"/>
           </a:xfrm>
           <a:prstGeom prst="rect">
             <a:avLst>
-              <a:gd name="adj" fmla="val 9615"/>
+              <a:gd name="adj" fmla="val 7692"/>
             </a:avLst>
           </a:prstGeom>
           <a:solidFill>
@@ -29004,574 +28359,46 @@
           </a:solidFill>
           <a:ln w="12700">
             <a:solidFill>
-              <a:srgbClr val="0D9488"/>
-            </a:solidFill>
-            <a:prstDash val="solid"/>
-          </a:ln>
-        </p:spPr>
-      </p:sp>
-      <p:sp>
-        <p:nvSpPr>
-          <p:cNvPr id="35" name="Text 33"/>
-          <p:cNvSpPr/>
-          <p:nvPr/>
-        </p:nvSpPr>
-        <p:spPr>
-          <a:xfrm>
-            <a:off x="6428232" y="3364992"/>
-            <a:ext cx="1645920" cy="475488"/>
-          </a:xfrm>
-          <a:prstGeom prst="rect">
-            <a:avLst/>
-          </a:prstGeom>
-          <a:noFill/>
-          <a:ln/>
-        </p:spPr>
-        <p:txBody>
-          <a:bodyPr wrap="square" lIns="0" tIns="0" rIns="0" bIns="0" rtlCol="0" anchor="ctr"/>
-          <a:lstStyle/>
-          <a:p>
-            <a:pPr algn="ctr" indent="0" marL="0">
-              <a:buNone/>
-            </a:pPr>
-            <a:r>
-              <a:rPr lang="en-US" sz="1400" b="1" dirty="0">
-                <a:solidFill>
-                  <a:srgbClr val="0D9488"/>
+              <a:srgbClr val="DB2777"/>
+            </a:solidFill>
+            <a:prstDash val="solid"/>
+          </a:ln>
+        </p:spPr>
+      </p:sp>
+      <p:sp>
+        <p:nvSpPr>
+          <p:cNvPr id="45" name="Text 43"/>
+          <p:cNvSpPr/>
+          <p:nvPr/>
+        </p:nvSpPr>
+        <p:spPr>
+          <a:xfrm>
+            <a:off x="7274052" y="4169664"/>
+            <a:ext cx="685800" cy="475488"/>
+          </a:xfrm>
+          <a:prstGeom prst="rect">
+            <a:avLst/>
+          </a:prstGeom>
+          <a:noFill/>
+          <a:ln/>
+        </p:spPr>
+        <p:txBody>
+          <a:bodyPr wrap="square" lIns="0" tIns="0" rIns="0" bIns="0" rtlCol="0" anchor="ctr"/>
+          <a:lstStyle/>
+          <a:p>
+            <a:pPr algn="ctr" indent="0" marL="0">
+              <a:buNone/>
+            </a:pPr>
+            <a:r>
+              <a:rPr lang="en-US" sz="900" b="1" dirty="0">
+                <a:solidFill>
+                  <a:srgbClr val="9D174D"/>
                 </a:solidFill>
                 <a:latin typeface="Trebuchet MS" pitchFamily="34" charset="0"/>
                 <a:ea typeface="Trebuchet MS" pitchFamily="34" charset="-122"/>
                 <a:cs typeface="Trebuchet MS" pitchFamily="34" charset="-120"/>
               </a:rPr>
-              <a:t>tion</a:t>
-            </a:r>
-            <a:endParaRPr lang="en-US" sz="1400" dirty="0"/>
-          </a:p>
-        </p:txBody>
-      </p:sp>
-      <p:sp>
-        <p:nvSpPr>
-          <p:cNvPr id="36" name="Shape 34"/>
-          <p:cNvSpPr/>
-          <p:nvPr/>
-        </p:nvSpPr>
-        <p:spPr>
-          <a:xfrm>
-            <a:off x="365760" y="4096512"/>
-            <a:ext cx="1371600" cy="804672"/>
-          </a:xfrm>
-          <a:prstGeom prst="rect">
-            <a:avLst>
-              <a:gd name="adj" fmla="val 6818"/>
-            </a:avLst>
-          </a:prstGeom>
-          <a:solidFill>
-            <a:srgbClr val="E2E8F0"/>
-          </a:solidFill>
-          <a:ln w="12700">
-            <a:solidFill>
-              <a:srgbClr val="E2E8F0"/>
-            </a:solidFill>
-            <a:prstDash val="solid"/>
-          </a:ln>
-        </p:spPr>
-      </p:sp>
-      <p:sp>
-        <p:nvSpPr>
-          <p:cNvPr id="37" name="Text 35"/>
-          <p:cNvSpPr/>
-          <p:nvPr/>
-        </p:nvSpPr>
-        <p:spPr>
-          <a:xfrm>
-            <a:off x="365760" y="4096512"/>
-            <a:ext cx="1371600" cy="804672"/>
-          </a:xfrm>
-          <a:prstGeom prst="rect">
-            <a:avLst/>
-          </a:prstGeom>
-          <a:noFill/>
-          <a:ln/>
-        </p:spPr>
-        <p:txBody>
-          <a:bodyPr wrap="square" lIns="0" tIns="0" rIns="0" bIns="0" rtlCol="0" anchor="ctr"/>
-          <a:lstStyle/>
-          <a:p>
-            <a:pPr algn="ctr" indent="0" marL="0">
-              <a:buNone/>
-            </a:pPr>
-            <a:r>
-              <a:rPr lang="en-US" sz="1100" b="1" dirty="0">
-                <a:solidFill>
-                  <a:srgbClr val="475569"/>
-                </a:solidFill>
-                <a:latin typeface="Trebuchet MS" pitchFamily="34" charset="0"/>
-                <a:ea typeface="Trebuchet MS" pitchFamily="34" charset="-122"/>
-                <a:cs typeface="Trebuchet MS" pitchFamily="34" charset="-120"/>
-              </a:rPr>
-              <a:t>Phonemes</a:t>
-            </a:r>
-            <a:endParaRPr lang="en-US" sz="1100" dirty="0"/>
-          </a:p>
-        </p:txBody>
-      </p:sp>
-      <p:sp>
-        <p:nvSpPr>
-          <p:cNvPr id="38" name="Shape 36"/>
-          <p:cNvSpPr/>
-          <p:nvPr/>
-        </p:nvSpPr>
-        <p:spPr>
-          <a:xfrm>
-            <a:off x="1874520" y="4096512"/>
-            <a:ext cx="6903720" cy="804672"/>
-          </a:xfrm>
-          <a:prstGeom prst="rect">
-            <a:avLst>
-              <a:gd name="adj" fmla="val 6818"/>
-            </a:avLst>
-          </a:prstGeom>
-          <a:solidFill>
-            <a:srgbClr val="FCE7F3"/>
-          </a:solidFill>
-          <a:ln w="12700">
-            <a:solidFill>
-              <a:srgbClr val="DB2777"/>
-            </a:solidFill>
-            <a:prstDash val="solid"/>
-          </a:ln>
-        </p:spPr>
-      </p:sp>
-      <p:sp>
-        <p:nvSpPr>
-          <p:cNvPr id="39" name="Shape 37"/>
-          <p:cNvSpPr/>
-          <p:nvPr/>
-        </p:nvSpPr>
-        <p:spPr>
-          <a:xfrm>
-            <a:off x="2254649" y="4169664"/>
-            <a:ext cx="685800" cy="384048"/>
-          </a:xfrm>
-          <a:prstGeom prst="rect">
-            <a:avLst>
-              <a:gd name="adj" fmla="val 9524"/>
-            </a:avLst>
-          </a:prstGeom>
-          <a:solidFill>
-            <a:srgbClr val="FFFFFF"/>
-          </a:solidFill>
-          <a:ln w="12700">
-            <a:solidFill>
-              <a:srgbClr val="DB2777"/>
-            </a:solidFill>
-            <a:prstDash val="solid"/>
-          </a:ln>
-        </p:spPr>
-      </p:sp>
-      <p:sp>
-        <p:nvSpPr>
-          <p:cNvPr id="40" name="Text 38"/>
-          <p:cNvSpPr/>
-          <p:nvPr/>
-        </p:nvSpPr>
-        <p:spPr>
-          <a:xfrm>
-            <a:off x="2254649" y="4169664"/>
-            <a:ext cx="685800" cy="384048"/>
-          </a:xfrm>
-          <a:prstGeom prst="rect">
-            <a:avLst/>
-          </a:prstGeom>
-          <a:noFill/>
-          <a:ln/>
-        </p:spPr>
-        <p:txBody>
-          <a:bodyPr wrap="square" lIns="0" tIns="0" rIns="0" bIns="0" rtlCol="0" anchor="ctr"/>
-          <a:lstStyle/>
-          <a:p>
-            <a:pPr algn="ctr" indent="0" marL="0">
-              <a:buNone/>
-            </a:pPr>
-            <a:r>
-              <a:rPr lang="en-US" sz="900" b="1" dirty="0">
-                <a:solidFill>
-                  <a:srgbClr val="9D174D"/>
-                </a:solidFill>
-                <a:latin typeface="Trebuchet MS" pitchFamily="34" charset="0"/>
-                <a:ea typeface="Trebuchet MS" pitchFamily="34" charset="-122"/>
-                <a:cs typeface="Trebuchet MS" pitchFamily="34" charset="-120"/>
-              </a:rPr>
-              <a:t>au</a:t>
-            </a:r>
-            <a:endParaRPr lang="en-US" sz="900" dirty="0"/>
-          </a:p>
-        </p:txBody>
-      </p:sp>
-      <p:sp>
-        <p:nvSpPr>
-          <p:cNvPr id="41" name="Shape 39"/>
-          <p:cNvSpPr/>
-          <p:nvPr/>
-        </p:nvSpPr>
-        <p:spPr>
-          <a:xfrm>
-            <a:off x="3293146" y="4169664"/>
-            <a:ext cx="685800" cy="384048"/>
-          </a:xfrm>
-          <a:prstGeom prst="rect">
-            <a:avLst>
-              <a:gd name="adj" fmla="val 9524"/>
-            </a:avLst>
-          </a:prstGeom>
-          <a:solidFill>
-            <a:srgbClr val="FFFFFF"/>
-          </a:solidFill>
-          <a:ln w="12700">
-            <a:solidFill>
-              <a:srgbClr val="DB2777"/>
-            </a:solidFill>
-            <a:prstDash val="solid"/>
-          </a:ln>
-        </p:spPr>
-      </p:sp>
-      <p:sp>
-        <p:nvSpPr>
-          <p:cNvPr id="42" name="Text 40"/>
-          <p:cNvSpPr/>
-          <p:nvPr/>
-        </p:nvSpPr>
-        <p:spPr>
-          <a:xfrm>
-            <a:off x="3293146" y="4169664"/>
-            <a:ext cx="685800" cy="384048"/>
-          </a:xfrm>
-          <a:prstGeom prst="rect">
-            <a:avLst/>
-          </a:prstGeom>
-          <a:noFill/>
-          <a:ln/>
-        </p:spPr>
-        <p:txBody>
-          <a:bodyPr wrap="square" lIns="0" tIns="0" rIns="0" bIns="0" rtlCol="0" anchor="ctr"/>
-          <a:lstStyle/>
-          <a:p>
-            <a:pPr algn="ctr" indent="0" marL="0">
-              <a:buNone/>
-            </a:pPr>
-            <a:r>
-              <a:rPr lang="en-US" sz="900" b="1" dirty="0">
-                <a:solidFill>
-                  <a:srgbClr val="9D174D"/>
-                </a:solidFill>
-                <a:latin typeface="Trebuchet MS" pitchFamily="34" charset="0"/>
-                <a:ea typeface="Trebuchet MS" pitchFamily="34" charset="-122"/>
-                <a:cs typeface="Trebuchet MS" pitchFamily="34" charset="-120"/>
-              </a:rPr>
-              <a:t>d</a:t>
-            </a:r>
-            <a:endParaRPr lang="en-US" sz="900" dirty="0"/>
-          </a:p>
-        </p:txBody>
-      </p:sp>
-      <p:sp>
-        <p:nvSpPr>
-          <p:cNvPr id="43" name="Shape 41"/>
-          <p:cNvSpPr/>
-          <p:nvPr/>
-        </p:nvSpPr>
-        <p:spPr>
-          <a:xfrm>
-            <a:off x="4331643" y="4169664"/>
-            <a:ext cx="685800" cy="384048"/>
-          </a:xfrm>
-          <a:prstGeom prst="rect">
-            <a:avLst>
-              <a:gd name="adj" fmla="val 9524"/>
-            </a:avLst>
-          </a:prstGeom>
-          <a:solidFill>
-            <a:srgbClr val="FFFFFF"/>
-          </a:solidFill>
-          <a:ln w="12700">
-            <a:solidFill>
-              <a:srgbClr val="DB2777"/>
-            </a:solidFill>
-            <a:prstDash val="solid"/>
-          </a:ln>
-        </p:spPr>
-      </p:sp>
-      <p:sp>
-        <p:nvSpPr>
-          <p:cNvPr id="44" name="Text 42"/>
-          <p:cNvSpPr/>
-          <p:nvPr/>
-        </p:nvSpPr>
-        <p:spPr>
-          <a:xfrm>
-            <a:off x="4331643" y="4169664"/>
-            <a:ext cx="685800" cy="384048"/>
-          </a:xfrm>
-          <a:prstGeom prst="rect">
-            <a:avLst/>
-          </a:prstGeom>
-          <a:noFill/>
-          <a:ln/>
-        </p:spPr>
-        <p:txBody>
-          <a:bodyPr wrap="square" lIns="0" tIns="0" rIns="0" bIns="0" rtlCol="0" anchor="ctr"/>
-          <a:lstStyle/>
-          <a:p>
-            <a:pPr algn="ctr" indent="0" marL="0">
-              <a:buNone/>
-            </a:pPr>
-            <a:r>
-              <a:rPr lang="en-US" sz="900" b="1" dirty="0">
-                <a:solidFill>
-                  <a:srgbClr val="9D174D"/>
-                </a:solidFill>
-                <a:latin typeface="Trebuchet MS" pitchFamily="34" charset="0"/>
-                <a:ea typeface="Trebuchet MS" pitchFamily="34" charset="-122"/>
-                <a:cs typeface="Trebuchet MS" pitchFamily="34" charset="-120"/>
-              </a:rPr>
-              <a:t>i</a:t>
-            </a:r>
-            <a:endParaRPr lang="en-US" sz="900" dirty="0"/>
-          </a:p>
-        </p:txBody>
-      </p:sp>
-      <p:sp>
-        <p:nvSpPr>
-          <p:cNvPr id="45" name="Shape 43"/>
-          <p:cNvSpPr/>
-          <p:nvPr/>
-        </p:nvSpPr>
-        <p:spPr>
-          <a:xfrm>
-            <a:off x="5370141" y="4169664"/>
-            <a:ext cx="685800" cy="384048"/>
-          </a:xfrm>
-          <a:prstGeom prst="rect">
-            <a:avLst>
-              <a:gd name="adj" fmla="val 9524"/>
-            </a:avLst>
-          </a:prstGeom>
-          <a:solidFill>
-            <a:srgbClr val="FFFFFF"/>
-          </a:solidFill>
-          <a:ln w="12700">
-            <a:solidFill>
-              <a:srgbClr val="DB2777"/>
-            </a:solidFill>
-            <a:prstDash val="solid"/>
-          </a:ln>
-        </p:spPr>
-      </p:sp>
-      <p:sp>
-        <p:nvSpPr>
-          <p:cNvPr id="46" name="Text 44"/>
-          <p:cNvSpPr/>
-          <p:nvPr/>
-        </p:nvSpPr>
-        <p:spPr>
-          <a:xfrm>
-            <a:off x="5370141" y="4169664"/>
-            <a:ext cx="685800" cy="384048"/>
-          </a:xfrm>
-          <a:prstGeom prst="rect">
-            <a:avLst/>
-          </a:prstGeom>
-          <a:noFill/>
-          <a:ln/>
-        </p:spPr>
-        <p:txBody>
-          <a:bodyPr wrap="square" lIns="0" tIns="0" rIns="0" bIns="0" rtlCol="0" anchor="ctr"/>
-          <a:lstStyle/>
-          <a:p>
-            <a:pPr algn="ctr" indent="0" marL="0">
-              <a:buNone/>
-            </a:pPr>
-            <a:r>
-              <a:rPr lang="en-US" sz="900" b="1" dirty="0">
-                <a:solidFill>
-                  <a:srgbClr val="9D174D"/>
-                </a:solidFill>
-                <a:latin typeface="Trebuchet MS" pitchFamily="34" charset="0"/>
-                <a:ea typeface="Trebuchet MS" pitchFamily="34" charset="-122"/>
-                <a:cs typeface="Trebuchet MS" pitchFamily="34" charset="-120"/>
-              </a:rPr>
-              <a:t>t</a:t>
-            </a:r>
-            <a:endParaRPr lang="en-US" sz="900" dirty="0"/>
-          </a:p>
-        </p:txBody>
-      </p:sp>
-      <p:sp>
-        <p:nvSpPr>
-          <p:cNvPr id="47" name="Text 45"/>
-          <p:cNvSpPr/>
-          <p:nvPr/>
-        </p:nvSpPr>
-        <p:spPr>
-          <a:xfrm>
-            <a:off x="5370141" y="4572000"/>
-            <a:ext cx="685800" cy="219456"/>
-          </a:xfrm>
-          <a:prstGeom prst="rect">
-            <a:avLst/>
-          </a:prstGeom>
-          <a:noFill/>
-          <a:ln/>
-        </p:spPr>
-        <p:txBody>
-          <a:bodyPr wrap="square" lIns="0" tIns="0" rIns="0" bIns="0" rtlCol="0" anchor="t"/>
-          <a:lstStyle/>
-          <a:p>
-            <a:pPr algn="ctr" indent="0" marL="0">
-              <a:buNone/>
-            </a:pPr>
-            <a:r>
-              <a:rPr lang="en-US" sz="750" i="1" dirty="0">
-                <a:solidFill>
-                  <a:srgbClr val="94A3B8"/>
-                </a:solidFill>
-                <a:latin typeface="Calibri" pitchFamily="34" charset="0"/>
-                <a:ea typeface="Calibri" pitchFamily="34" charset="-122"/>
-                <a:cs typeface="Calibri" pitchFamily="34" charset="-120"/>
-              </a:rPr>
-              <a:t>/sh/</a:t>
-            </a:r>
-            <a:endParaRPr lang="en-US" sz="750" dirty="0"/>
-          </a:p>
-        </p:txBody>
-      </p:sp>
-      <p:sp>
-        <p:nvSpPr>
-          <p:cNvPr id="48" name="Shape 46"/>
-          <p:cNvSpPr/>
-          <p:nvPr/>
-        </p:nvSpPr>
-        <p:spPr>
-          <a:xfrm>
-            <a:off x="6408638" y="4169664"/>
-            <a:ext cx="685800" cy="384048"/>
-          </a:xfrm>
-          <a:prstGeom prst="rect">
-            <a:avLst>
-              <a:gd name="adj" fmla="val 9524"/>
-            </a:avLst>
-          </a:prstGeom>
-          <a:solidFill>
-            <a:srgbClr val="FFFFFF"/>
-          </a:solidFill>
-          <a:ln w="12700">
-            <a:solidFill>
-              <a:srgbClr val="DB2777"/>
-            </a:solidFill>
-            <a:prstDash val="solid"/>
-          </a:ln>
-        </p:spPr>
-      </p:sp>
-      <p:sp>
-        <p:nvSpPr>
-          <p:cNvPr id="49" name="Text 47"/>
-          <p:cNvSpPr/>
-          <p:nvPr/>
-        </p:nvSpPr>
-        <p:spPr>
-          <a:xfrm>
-            <a:off x="6408638" y="4169664"/>
-            <a:ext cx="685800" cy="384048"/>
-          </a:xfrm>
-          <a:prstGeom prst="rect">
-            <a:avLst/>
-          </a:prstGeom>
-          <a:noFill/>
-          <a:ln/>
-        </p:spPr>
-        <p:txBody>
-          <a:bodyPr wrap="square" lIns="0" tIns="0" rIns="0" bIns="0" rtlCol="0" anchor="ctr"/>
-          <a:lstStyle/>
-          <a:p>
-            <a:pPr algn="ctr" indent="0" marL="0">
-              <a:buNone/>
-            </a:pPr>
-            <a:r>
-              <a:rPr lang="en-US" sz="900" b="1" dirty="0">
-                <a:solidFill>
-                  <a:srgbClr val="9D174D"/>
-                </a:solidFill>
-                <a:latin typeface="Trebuchet MS" pitchFamily="34" charset="0"/>
-                <a:ea typeface="Trebuchet MS" pitchFamily="34" charset="-122"/>
-                <a:cs typeface="Trebuchet MS" pitchFamily="34" charset="-120"/>
-              </a:rPr>
-              <a:t>io</a:t>
-            </a:r>
-            <a:endParaRPr lang="en-US" sz="900" dirty="0"/>
-          </a:p>
-        </p:txBody>
-      </p:sp>
-      <p:sp>
-        <p:nvSpPr>
-          <p:cNvPr id="50" name="Shape 48"/>
-          <p:cNvSpPr/>
-          <p:nvPr/>
-        </p:nvSpPr>
-        <p:spPr>
-          <a:xfrm>
-            <a:off x="7447135" y="4169664"/>
-            <a:ext cx="685800" cy="384048"/>
-          </a:xfrm>
-          <a:prstGeom prst="rect">
-            <a:avLst>
-              <a:gd name="adj" fmla="val 9524"/>
-            </a:avLst>
-          </a:prstGeom>
-          <a:solidFill>
-            <a:srgbClr val="FFFFFF"/>
-          </a:solidFill>
-          <a:ln w="12700">
-            <a:solidFill>
-              <a:srgbClr val="DB2777"/>
-            </a:solidFill>
-            <a:prstDash val="solid"/>
-          </a:ln>
-        </p:spPr>
-      </p:sp>
-      <p:sp>
-        <p:nvSpPr>
-          <p:cNvPr id="51" name="Text 49"/>
-          <p:cNvSpPr/>
-          <p:nvPr/>
-        </p:nvSpPr>
-        <p:spPr>
-          <a:xfrm>
-            <a:off x="7447135" y="4169664"/>
-            <a:ext cx="685800" cy="384048"/>
-          </a:xfrm>
-          <a:prstGeom prst="rect">
-            <a:avLst/>
-          </a:prstGeom>
-          <a:noFill/>
-          <a:ln/>
-        </p:spPr>
-        <p:txBody>
-          <a:bodyPr wrap="square" lIns="0" tIns="0" rIns="0" bIns="0" rtlCol="0" anchor="ctr"/>
-          <a:lstStyle/>
-          <a:p>
-            <a:pPr algn="ctr" indent="0" marL="0">
-              <a:buNone/>
-            </a:pPr>
-            <a:r>
-              <a:rPr lang="en-US" sz="900" b="1" dirty="0">
-                <a:solidFill>
-                  <a:srgbClr val="9D174D"/>
-                </a:solidFill>
-                <a:latin typeface="Trebuchet MS" pitchFamily="34" charset="0"/>
-                <a:ea typeface="Trebuchet MS" pitchFamily="34" charset="-122"/>
-                <a:cs typeface="Trebuchet MS" pitchFamily="34" charset="-120"/>
-              </a:rPr>
-              <a:t>n</a:t>
+              <a:t>le</a:t>
             </a:r>
             <a:endParaRPr lang="en-US" sz="900" dirty="0"/>
           </a:p>
@@ -30002,7 +28829,7 @@
                 <a:ea typeface="Trebuchet MS" pitchFamily="34" charset="-122"/>
                 <a:cs typeface="Trebuchet MS" pitchFamily="34" charset="-120"/>
               </a:rPr>
-              <a:t>audience</a:t>
+              <a:t>auditory</a:t>
             </a:r>
             <a:endParaRPr lang="en-US" sz="2800" dirty="0"/>
           </a:p>
@@ -30829,7 +29656,7 @@
                 <a:ea typeface="Trebuchet MS" pitchFamily="34" charset="-122"/>
                 <a:cs typeface="Trebuchet MS" pitchFamily="34" charset="-120"/>
               </a:rPr>
-              <a:t>audience</a:t>
+              <a:t>auditory</a:t>
             </a:r>
             <a:endParaRPr lang="en-US" sz="2800" dirty="0"/>
           </a:p>
@@ -31007,7 +29834,7 @@
                 <a:ea typeface="Calibri" pitchFamily="34" charset="-122"/>
                 <a:cs typeface="Calibri" pitchFamily="34" charset="-120"/>
               </a:rPr>
-              <a:t>hear</a:t>
+              <a:t>hear / listen</a:t>
             </a:r>
             <a:endParaRPr lang="en-US" sz="850" dirty="0"/>
           </a:p>
@@ -31080,7 +29907,7 @@
                 <a:ea typeface="Trebuchet MS" pitchFamily="34" charset="-122"/>
                 <a:cs typeface="Trebuchet MS" pitchFamily="34" charset="-120"/>
               </a:rPr>
-              <a:t>i</a:t>
+              <a:t>it</a:t>
             </a:r>
             <a:endParaRPr lang="en-US" sz="1300" dirty="0"/>
           </a:p>
@@ -31119,7 +29946,7 @@
                 <a:ea typeface="Calibri" pitchFamily="34" charset="-122"/>
                 <a:cs typeface="Calibri" pitchFamily="34" charset="-120"/>
               </a:rPr>
-              <a:t>connecting vowel</a:t>
+              <a:t>go, process</a:t>
             </a:r>
             <a:endParaRPr lang="en-US" sz="850" dirty="0"/>
           </a:p>
@@ -31127,46 +29954,7 @@
       </p:sp>
       <p:sp>
         <p:nvSpPr>
-          <p:cNvPr id="22" name="Text 20"/>
-          <p:cNvSpPr/>
-          <p:nvPr/>
-        </p:nvSpPr>
-        <p:spPr>
-          <a:xfrm>
-            <a:off x="4370832" y="2752344"/>
-            <a:ext cx="1828800" cy="182880"/>
-          </a:xfrm>
-          <a:prstGeom prst="rect">
-            <a:avLst/>
-          </a:prstGeom>
-          <a:noFill/>
-          <a:ln/>
-        </p:spPr>
-        <p:txBody>
-          <a:bodyPr wrap="square" lIns="0" tIns="0" rIns="0" bIns="0" rtlCol="0" anchor="t"/>
-          <a:lstStyle/>
-          <a:p>
-            <a:pPr algn="ctr" indent="0" marL="0">
-              <a:buNone/>
-            </a:pPr>
-            <a:r>
-              <a:rPr lang="en-US" sz="700" i="1" dirty="0">
-                <a:solidFill>
-                  <a:srgbClr val="94A3B8"/>
-                </a:solidFill>
-                <a:latin typeface="Calibri" pitchFamily="34" charset="0"/>
-                <a:ea typeface="Calibri" pitchFamily="34" charset="-122"/>
-                <a:cs typeface="Calibri" pitchFamily="34" charset="-120"/>
-              </a:rPr>
-              <a:t>links base to suffix</a:t>
-            </a:r>
-            <a:endParaRPr lang="en-US" sz="700" dirty="0"/>
-          </a:p>
-        </p:txBody>
-      </p:sp>
-      <p:sp>
-        <p:nvSpPr>
-          <p:cNvPr id="23" name="Shape 21"/>
+          <p:cNvPr id="22" name="Shape 20"/>
           <p:cNvSpPr/>
           <p:nvPr/>
         </p:nvSpPr>
@@ -31200,7 +29988,7 @@
       </p:sp>
       <p:sp>
         <p:nvSpPr>
-          <p:cNvPr id="24" name="Text 22"/>
+          <p:cNvPr id="23" name="Text 21"/>
           <p:cNvSpPr/>
           <p:nvPr/>
         </p:nvSpPr>
@@ -31231,7 +30019,7 @@
                 <a:ea typeface="Trebuchet MS" pitchFamily="34" charset="-122"/>
                 <a:cs typeface="Trebuchet MS" pitchFamily="34" charset="-120"/>
               </a:rPr>
-              <a:t>ence</a:t>
+              <a:t>ory</a:t>
             </a:r>
             <a:endParaRPr lang="en-US" sz="1300" dirty="0"/>
           </a:p>
@@ -31239,7 +30027,7 @@
       </p:sp>
       <p:sp>
         <p:nvSpPr>
-          <p:cNvPr id="25" name="Text 23"/>
+          <p:cNvPr id="24" name="Text 22"/>
           <p:cNvSpPr/>
           <p:nvPr/>
         </p:nvSpPr>
@@ -31270,7 +30058,7 @@
                 <a:ea typeface="Calibri" pitchFamily="34" charset="-122"/>
                 <a:cs typeface="Calibri" pitchFamily="34" charset="-120"/>
               </a:rPr>
-              <a:t>state or quality of</a:t>
+              <a:t>relating to, place for</a:t>
             </a:r>
             <a:endParaRPr lang="en-US" sz="850" dirty="0"/>
           </a:p>
@@ -31278,7 +30066,7 @@
       </p:sp>
       <p:sp>
         <p:nvSpPr>
-          <p:cNvPr id="26" name="Shape 24"/>
+          <p:cNvPr id="25" name="Shape 23"/>
           <p:cNvSpPr/>
           <p:nvPr/>
         </p:nvSpPr>
@@ -31305,7 +30093,7 @@
       </p:sp>
       <p:sp>
         <p:nvSpPr>
-          <p:cNvPr id="27" name="Text 25"/>
+          <p:cNvPr id="26" name="Text 24"/>
           <p:cNvSpPr/>
           <p:nvPr/>
         </p:nvSpPr>
@@ -31344,7 +30132,7 @@
       </p:sp>
       <p:sp>
         <p:nvSpPr>
-          <p:cNvPr id="28" name="Shape 26"/>
+          <p:cNvPr id="27" name="Shape 25"/>
           <p:cNvSpPr/>
           <p:nvPr/>
         </p:nvSpPr>
@@ -31371,7 +30159,7 @@
       </p:sp>
       <p:sp>
         <p:nvSpPr>
-          <p:cNvPr id="29" name="Text 27"/>
+          <p:cNvPr id="28" name="Text 26"/>
           <p:cNvSpPr/>
           <p:nvPr/>
         </p:nvSpPr>
@@ -31410,7 +30198,7 @@
       </p:sp>
       <p:sp>
         <p:nvSpPr>
-          <p:cNvPr id="30" name="Shape 28"/>
+          <p:cNvPr id="29" name="Shape 27"/>
           <p:cNvSpPr/>
           <p:nvPr/>
         </p:nvSpPr>
@@ -31437,7 +30225,7 @@
       </p:sp>
       <p:sp>
         <p:nvSpPr>
-          <p:cNvPr id="31" name="Text 29"/>
+          <p:cNvPr id="30" name="Text 28"/>
           <p:cNvSpPr/>
           <p:nvPr/>
         </p:nvSpPr>
@@ -31476,7 +30264,7 @@
       </p:sp>
       <p:sp>
         <p:nvSpPr>
-          <p:cNvPr id="32" name="Shape 30"/>
+          <p:cNvPr id="31" name="Shape 29"/>
           <p:cNvSpPr/>
           <p:nvPr/>
         </p:nvSpPr>
@@ -31503,7 +30291,7 @@
       </p:sp>
       <p:sp>
         <p:nvSpPr>
-          <p:cNvPr id="33" name="Text 31"/>
+          <p:cNvPr id="32" name="Text 30"/>
           <p:cNvSpPr/>
           <p:nvPr/>
         </p:nvSpPr>
@@ -31965,7 +30753,7 @@
                 <a:ea typeface="Trebuchet MS" pitchFamily="34" charset="-122"/>
                 <a:cs typeface="Trebuchet MS" pitchFamily="34" charset="-120"/>
               </a:rPr>
-              <a:t>audience</a:t>
+              <a:t>auditory</a:t>
             </a:r>
             <a:endParaRPr lang="en-US" sz="2800" dirty="0"/>
           </a:p>
@@ -32143,7 +30931,7 @@
                 <a:ea typeface="Calibri" pitchFamily="34" charset="-122"/>
                 <a:cs typeface="Calibri" pitchFamily="34" charset="-120"/>
               </a:rPr>
-              <a:t>hear</a:t>
+              <a:t>hear / listen</a:t>
             </a:r>
             <a:endParaRPr lang="en-US" sz="850" dirty="0"/>
           </a:p>
@@ -32216,7 +31004,7 @@
                 <a:ea typeface="Trebuchet MS" pitchFamily="34" charset="-122"/>
                 <a:cs typeface="Trebuchet MS" pitchFamily="34" charset="-120"/>
               </a:rPr>
-              <a:t>i</a:t>
+              <a:t>it</a:t>
             </a:r>
             <a:endParaRPr lang="en-US" sz="1300" dirty="0"/>
           </a:p>
@@ -32255,7 +31043,7 @@
                 <a:ea typeface="Calibri" pitchFamily="34" charset="-122"/>
                 <a:cs typeface="Calibri" pitchFamily="34" charset="-120"/>
               </a:rPr>
-              <a:t>connecting vowel</a:t>
+              <a:t>go, process</a:t>
             </a:r>
             <a:endParaRPr lang="en-US" sz="850" dirty="0"/>
           </a:p>
@@ -32263,46 +31051,7 @@
       </p:sp>
       <p:sp>
         <p:nvSpPr>
-          <p:cNvPr id="22" name="Text 20"/>
-          <p:cNvSpPr/>
-          <p:nvPr/>
-        </p:nvSpPr>
-        <p:spPr>
-          <a:xfrm>
-            <a:off x="4370832" y="2752344"/>
-            <a:ext cx="1828800" cy="182880"/>
-          </a:xfrm>
-          <a:prstGeom prst="rect">
-            <a:avLst/>
-          </a:prstGeom>
-          <a:noFill/>
-          <a:ln/>
-        </p:spPr>
-        <p:txBody>
-          <a:bodyPr wrap="square" lIns="0" tIns="0" rIns="0" bIns="0" rtlCol="0" anchor="t"/>
-          <a:lstStyle/>
-          <a:p>
-            <a:pPr algn="ctr" indent="0" marL="0">
-              <a:buNone/>
-            </a:pPr>
-            <a:r>
-              <a:rPr lang="en-US" sz="700" i="1" dirty="0">
-                <a:solidFill>
-                  <a:srgbClr val="94A3B8"/>
-                </a:solidFill>
-                <a:latin typeface="Calibri" pitchFamily="34" charset="0"/>
-                <a:ea typeface="Calibri" pitchFamily="34" charset="-122"/>
-                <a:cs typeface="Calibri" pitchFamily="34" charset="-120"/>
-              </a:rPr>
-              <a:t>links base to suffix</a:t>
-            </a:r>
-            <a:endParaRPr lang="en-US" sz="700" dirty="0"/>
-          </a:p>
-        </p:txBody>
-      </p:sp>
-      <p:sp>
-        <p:nvSpPr>
-          <p:cNvPr id="23" name="Shape 21"/>
+          <p:cNvPr id="22" name="Shape 20"/>
           <p:cNvSpPr/>
           <p:nvPr/>
         </p:nvSpPr>
@@ -32336,7 +31085,7 @@
       </p:sp>
       <p:sp>
         <p:nvSpPr>
-          <p:cNvPr id="24" name="Text 22"/>
+          <p:cNvPr id="23" name="Text 21"/>
           <p:cNvSpPr/>
           <p:nvPr/>
         </p:nvSpPr>
@@ -32367,7 +31116,7 @@
                 <a:ea typeface="Trebuchet MS" pitchFamily="34" charset="-122"/>
                 <a:cs typeface="Trebuchet MS" pitchFamily="34" charset="-120"/>
               </a:rPr>
-              <a:t>ence</a:t>
+              <a:t>ory</a:t>
             </a:r>
             <a:endParaRPr lang="en-US" sz="1300" dirty="0"/>
           </a:p>
@@ -32375,7 +31124,7 @@
       </p:sp>
       <p:sp>
         <p:nvSpPr>
-          <p:cNvPr id="25" name="Text 23"/>
+          <p:cNvPr id="24" name="Text 22"/>
           <p:cNvSpPr/>
           <p:nvPr/>
         </p:nvSpPr>
@@ -32406,7 +31155,7 @@
                 <a:ea typeface="Calibri" pitchFamily="34" charset="-122"/>
                 <a:cs typeface="Calibri" pitchFamily="34" charset="-120"/>
               </a:rPr>
-              <a:t>state or quality of</a:t>
+              <a:t>relating to, place for</a:t>
             </a:r>
             <a:endParaRPr lang="en-US" sz="850" dirty="0"/>
           </a:p>
@@ -32414,7 +31163,7 @@
       </p:sp>
       <p:sp>
         <p:nvSpPr>
-          <p:cNvPr id="26" name="Shape 24"/>
+          <p:cNvPr id="25" name="Shape 23"/>
           <p:cNvSpPr/>
           <p:nvPr/>
         </p:nvSpPr>
@@ -32441,7 +31190,7 @@
       </p:sp>
       <p:sp>
         <p:nvSpPr>
-          <p:cNvPr id="27" name="Text 25"/>
+          <p:cNvPr id="26" name="Text 24"/>
           <p:cNvSpPr/>
           <p:nvPr/>
         </p:nvSpPr>
@@ -32480,7 +31229,7 @@
       </p:sp>
       <p:sp>
         <p:nvSpPr>
-          <p:cNvPr id="28" name="Shape 26"/>
+          <p:cNvPr id="27" name="Shape 25"/>
           <p:cNvSpPr/>
           <p:nvPr/>
         </p:nvSpPr>
@@ -32507,14 +31256,14 @@
       </p:sp>
       <p:sp>
         <p:nvSpPr>
-          <p:cNvPr id="29" name="Shape 27"/>
-          <p:cNvSpPr/>
-          <p:nvPr/>
-        </p:nvSpPr>
-        <p:spPr>
-          <a:xfrm>
-            <a:off x="2313432" y="3364992"/>
-            <a:ext cx="1645920" cy="475488"/>
+          <p:cNvPr id="28" name="Shape 26"/>
+          <p:cNvSpPr/>
+          <p:nvPr/>
+        </p:nvSpPr>
+        <p:spPr>
+          <a:xfrm>
+            <a:off x="1975104" y="3364992"/>
+            <a:ext cx="1554480" cy="475488"/>
           </a:xfrm>
           <a:prstGeom prst="rect">
             <a:avLst>
@@ -32534,14 +31283,14 @@
       </p:sp>
       <p:sp>
         <p:nvSpPr>
-          <p:cNvPr id="30" name="Text 28"/>
-          <p:cNvSpPr/>
-          <p:nvPr/>
-        </p:nvSpPr>
-        <p:spPr>
-          <a:xfrm>
-            <a:off x="2313432" y="3364992"/>
-            <a:ext cx="1645920" cy="475488"/>
+          <p:cNvPr id="29" name="Text 27"/>
+          <p:cNvSpPr/>
+          <p:nvPr/>
+        </p:nvSpPr>
+        <p:spPr>
+          <a:xfrm>
+            <a:off x="1975104" y="3364992"/>
+            <a:ext cx="1554480" cy="475488"/>
           </a:xfrm>
           <a:prstGeom prst="rect">
             <a:avLst/>
@@ -32573,14 +31322,14 @@
       </p:sp>
       <p:sp>
         <p:nvSpPr>
-          <p:cNvPr id="31" name="Text 29"/>
-          <p:cNvSpPr/>
-          <p:nvPr/>
-        </p:nvSpPr>
-        <p:spPr>
-          <a:xfrm>
-            <a:off x="3959352" y="3364992"/>
-            <a:ext cx="411480" cy="475488"/>
+          <p:cNvPr id="30" name="Text 28"/>
+          <p:cNvSpPr/>
+          <p:nvPr/>
+        </p:nvSpPr>
+        <p:spPr>
+          <a:xfrm>
+            <a:off x="3529584" y="3364992"/>
+            <a:ext cx="73152" cy="475488"/>
           </a:xfrm>
           <a:prstGeom prst="rect">
             <a:avLst/>
@@ -32612,14 +31361,14 @@
       </p:sp>
       <p:sp>
         <p:nvSpPr>
-          <p:cNvPr id="32" name="Shape 30"/>
-          <p:cNvSpPr/>
-          <p:nvPr/>
-        </p:nvSpPr>
-        <p:spPr>
-          <a:xfrm>
-            <a:off x="4370832" y="3364992"/>
-            <a:ext cx="1645920" cy="475488"/>
+          <p:cNvPr id="31" name="Shape 29"/>
+          <p:cNvSpPr/>
+          <p:nvPr/>
+        </p:nvSpPr>
+        <p:spPr>
+          <a:xfrm>
+            <a:off x="3602736" y="3364992"/>
+            <a:ext cx="1554480" cy="475488"/>
           </a:xfrm>
           <a:prstGeom prst="rect">
             <a:avLst>
@@ -32639,14 +31388,14 @@
       </p:sp>
       <p:sp>
         <p:nvSpPr>
-          <p:cNvPr id="33" name="Text 31"/>
-          <p:cNvSpPr/>
-          <p:nvPr/>
-        </p:nvSpPr>
-        <p:spPr>
-          <a:xfrm>
-            <a:off x="4370832" y="3364992"/>
-            <a:ext cx="1645920" cy="475488"/>
+          <p:cNvPr id="32" name="Text 30"/>
+          <p:cNvSpPr/>
+          <p:nvPr/>
+        </p:nvSpPr>
+        <p:spPr>
+          <a:xfrm>
+            <a:off x="3602736" y="3364992"/>
+            <a:ext cx="1554480" cy="475488"/>
           </a:xfrm>
           <a:prstGeom prst="rect">
             <a:avLst/>
@@ -32678,14 +31427,14 @@
       </p:sp>
       <p:sp>
         <p:nvSpPr>
-          <p:cNvPr id="34" name="Text 32"/>
-          <p:cNvSpPr/>
-          <p:nvPr/>
-        </p:nvSpPr>
-        <p:spPr>
-          <a:xfrm>
-            <a:off x="6016752" y="3364992"/>
-            <a:ext cx="411480" cy="475488"/>
+          <p:cNvPr id="33" name="Text 31"/>
+          <p:cNvSpPr/>
+          <p:nvPr/>
+        </p:nvSpPr>
+        <p:spPr>
+          <a:xfrm>
+            <a:off x="5157216" y="3364992"/>
+            <a:ext cx="73152" cy="475488"/>
           </a:xfrm>
           <a:prstGeom prst="rect">
             <a:avLst/>
@@ -32717,14 +31466,14 @@
       </p:sp>
       <p:sp>
         <p:nvSpPr>
-          <p:cNvPr id="35" name="Shape 33"/>
-          <p:cNvSpPr/>
-          <p:nvPr/>
-        </p:nvSpPr>
-        <p:spPr>
-          <a:xfrm>
-            <a:off x="6428232" y="3364992"/>
-            <a:ext cx="1645920" cy="475488"/>
+          <p:cNvPr id="34" name="Shape 32"/>
+          <p:cNvSpPr/>
+          <p:nvPr/>
+        </p:nvSpPr>
+        <p:spPr>
+          <a:xfrm>
+            <a:off x="5230368" y="3364992"/>
+            <a:ext cx="1554480" cy="475488"/>
           </a:xfrm>
           <a:prstGeom prst="rect">
             <a:avLst>
@@ -32744,14 +31493,14 @@
       </p:sp>
       <p:sp>
         <p:nvSpPr>
-          <p:cNvPr id="36" name="Text 34"/>
-          <p:cNvSpPr/>
-          <p:nvPr/>
-        </p:nvSpPr>
-        <p:spPr>
-          <a:xfrm>
-            <a:off x="6428232" y="3364992"/>
-            <a:ext cx="1645920" cy="475488"/>
+          <p:cNvPr id="35" name="Text 33"/>
+          <p:cNvSpPr/>
+          <p:nvPr/>
+        </p:nvSpPr>
+        <p:spPr>
+          <a:xfrm>
+            <a:off x="5230368" y="3364992"/>
+            <a:ext cx="1554480" cy="475488"/>
           </a:xfrm>
           <a:prstGeom prst="rect">
             <a:avLst/>
@@ -32775,7 +31524,7 @@
                 <a:ea typeface="Trebuchet MS" pitchFamily="34" charset="-122"/>
                 <a:cs typeface="Trebuchet MS" pitchFamily="34" charset="-120"/>
               </a:rPr>
-              <a:t>ence</a:t>
+              <a:t>to</a:t>
             </a:r>
             <a:endParaRPr lang="en-US" sz="1400" dirty="0"/>
           </a:p>
@@ -32783,7 +31532,112 @@
       </p:sp>
       <p:sp>
         <p:nvSpPr>
+          <p:cNvPr id="36" name="Text 34"/>
+          <p:cNvSpPr/>
+          <p:nvPr/>
+        </p:nvSpPr>
+        <p:spPr>
+          <a:xfrm>
+            <a:off x="6784848" y="3364992"/>
+            <a:ext cx="73152" cy="475488"/>
+          </a:xfrm>
+          <a:prstGeom prst="rect">
+            <a:avLst/>
+          </a:prstGeom>
+          <a:noFill/>
+          <a:ln/>
+        </p:spPr>
+        <p:txBody>
+          <a:bodyPr wrap="square" lIns="0" tIns="0" rIns="0" bIns="0" rtlCol="0" anchor="ctr"/>
+          <a:lstStyle/>
+          <a:p>
+            <a:pPr algn="ctr" indent="0" marL="0">
+              <a:buNone/>
+            </a:pPr>
+            <a:r>
+              <a:rPr lang="en-US" sz="1600" b="1" dirty="0">
+                <a:solidFill>
+                  <a:srgbClr val="0D9488"/>
+                </a:solidFill>
+                <a:latin typeface="Trebuchet MS" pitchFamily="34" charset="0"/>
+                <a:ea typeface="Trebuchet MS" pitchFamily="34" charset="-122"/>
+                <a:cs typeface="Trebuchet MS" pitchFamily="34" charset="-120"/>
+              </a:rPr>
+              <a:t>·</a:t>
+            </a:r>
+            <a:endParaRPr lang="en-US" sz="1600" dirty="0"/>
+          </a:p>
+        </p:txBody>
+      </p:sp>
+      <p:sp>
+        <p:nvSpPr>
           <p:cNvPr id="37" name="Shape 35"/>
+          <p:cNvSpPr/>
+          <p:nvPr/>
+        </p:nvSpPr>
+        <p:spPr>
+          <a:xfrm>
+            <a:off x="6858000" y="3364992"/>
+            <a:ext cx="1554480" cy="475488"/>
+          </a:xfrm>
+          <a:prstGeom prst="rect">
+            <a:avLst>
+              <a:gd name="adj" fmla="val 9615"/>
+            </a:avLst>
+          </a:prstGeom>
+          <a:solidFill>
+            <a:srgbClr val="FFFFFF"/>
+          </a:solidFill>
+          <a:ln w="12700">
+            <a:solidFill>
+              <a:srgbClr val="0D9488"/>
+            </a:solidFill>
+            <a:prstDash val="solid"/>
+          </a:ln>
+        </p:spPr>
+      </p:sp>
+      <p:sp>
+        <p:nvSpPr>
+          <p:cNvPr id="38" name="Text 36"/>
+          <p:cNvSpPr/>
+          <p:nvPr/>
+        </p:nvSpPr>
+        <p:spPr>
+          <a:xfrm>
+            <a:off x="6858000" y="3364992"/>
+            <a:ext cx="1554480" cy="475488"/>
+          </a:xfrm>
+          <a:prstGeom prst="rect">
+            <a:avLst/>
+          </a:prstGeom>
+          <a:noFill/>
+          <a:ln/>
+        </p:spPr>
+        <p:txBody>
+          <a:bodyPr wrap="square" lIns="0" tIns="0" rIns="0" bIns="0" rtlCol="0" anchor="ctr"/>
+          <a:lstStyle/>
+          <a:p>
+            <a:pPr algn="ctr" indent="0" marL="0">
+              <a:buNone/>
+            </a:pPr>
+            <a:r>
+              <a:rPr lang="en-US" sz="1400" b="1" dirty="0">
+                <a:solidFill>
+                  <a:srgbClr val="0D9488"/>
+                </a:solidFill>
+                <a:latin typeface="Trebuchet MS" pitchFamily="34" charset="0"/>
+                <a:ea typeface="Trebuchet MS" pitchFamily="34" charset="-122"/>
+                <a:cs typeface="Trebuchet MS" pitchFamily="34" charset="-120"/>
+              </a:rPr>
+              <a:t>ry</a:t>
+            </a:r>
+            <a:endParaRPr lang="en-US" sz="1400" dirty="0"/>
+          </a:p>
+        </p:txBody>
+      </p:sp>
+      <p:sp>
+        <p:nvSpPr>
+          <p:cNvPr id="39" name="Shape 37"/>
           <p:cNvSpPr/>
           <p:nvPr/>
         </p:nvSpPr>
@@ -32810,7 +31664,7 @@
       </p:sp>
       <p:sp>
         <p:nvSpPr>
-          <p:cNvPr id="38" name="Text 36"/>
+          <p:cNvPr id="40" name="Text 38"/>
           <p:cNvSpPr/>
           <p:nvPr/>
         </p:nvSpPr>
@@ -32849,7 +31703,7 @@
       </p:sp>
       <p:sp>
         <p:nvSpPr>
-          <p:cNvPr id="39" name="Shape 37"/>
+          <p:cNvPr id="41" name="Shape 39"/>
           <p:cNvSpPr/>
           <p:nvPr/>
         </p:nvSpPr>
@@ -32876,7 +31730,7 @@
       </p:sp>
       <p:sp>
         <p:nvSpPr>
-          <p:cNvPr id="40" name="Text 38"/>
+          <p:cNvPr id="42" name="Text 40"/>
           <p:cNvSpPr/>
           <p:nvPr/>
         </p:nvSpPr>
@@ -33338,7 +32192,7 @@
                 <a:ea typeface="Trebuchet MS" pitchFamily="34" charset="-122"/>
                 <a:cs typeface="Trebuchet MS" pitchFamily="34" charset="-120"/>
               </a:rPr>
-              <a:t>audience</a:t>
+              <a:t>auditory</a:t>
             </a:r>
             <a:endParaRPr lang="en-US" sz="2800" dirty="0"/>
           </a:p>
@@ -33516,7 +32370,7 @@
                 <a:ea typeface="Calibri" pitchFamily="34" charset="-122"/>
                 <a:cs typeface="Calibri" pitchFamily="34" charset="-120"/>
               </a:rPr>
-              <a:t>hear</a:t>
+              <a:t>hear / listen</a:t>
             </a:r>
             <a:endParaRPr lang="en-US" sz="850" dirty="0"/>
           </a:p>
@@ -33589,7 +32443,7 @@
                 <a:ea typeface="Trebuchet MS" pitchFamily="34" charset="-122"/>
                 <a:cs typeface="Trebuchet MS" pitchFamily="34" charset="-120"/>
               </a:rPr>
-              <a:t>i</a:t>
+              <a:t>it</a:t>
             </a:r>
             <a:endParaRPr lang="en-US" sz="1300" dirty="0"/>
           </a:p>
@@ -33628,7 +32482,7 @@
                 <a:ea typeface="Calibri" pitchFamily="34" charset="-122"/>
                 <a:cs typeface="Calibri" pitchFamily="34" charset="-120"/>
               </a:rPr>
-              <a:t>connecting vowel</a:t>
+              <a:t>go, process</a:t>
             </a:r>
             <a:endParaRPr lang="en-US" sz="850" dirty="0"/>
           </a:p>
@@ -33636,46 +32490,7 @@
       </p:sp>
       <p:sp>
         <p:nvSpPr>
-          <p:cNvPr id="22" name="Text 20"/>
-          <p:cNvSpPr/>
-          <p:nvPr/>
-        </p:nvSpPr>
-        <p:spPr>
-          <a:xfrm>
-            <a:off x="4370832" y="2752344"/>
-            <a:ext cx="1828800" cy="182880"/>
-          </a:xfrm>
-          <a:prstGeom prst="rect">
-            <a:avLst/>
-          </a:prstGeom>
-          <a:noFill/>
-          <a:ln/>
-        </p:spPr>
-        <p:txBody>
-          <a:bodyPr wrap="square" lIns="0" tIns="0" rIns="0" bIns="0" rtlCol="0" anchor="t"/>
-          <a:lstStyle/>
-          <a:p>
-            <a:pPr algn="ctr" indent="0" marL="0">
-              <a:buNone/>
-            </a:pPr>
-            <a:r>
-              <a:rPr lang="en-US" sz="700" i="1" dirty="0">
-                <a:solidFill>
-                  <a:srgbClr val="94A3B8"/>
-                </a:solidFill>
-                <a:latin typeface="Calibri" pitchFamily="34" charset="0"/>
-                <a:ea typeface="Calibri" pitchFamily="34" charset="-122"/>
-                <a:cs typeface="Calibri" pitchFamily="34" charset="-120"/>
-              </a:rPr>
-              <a:t>links base to suffix</a:t>
-            </a:r>
-            <a:endParaRPr lang="en-US" sz="700" dirty="0"/>
-          </a:p>
-        </p:txBody>
-      </p:sp>
-      <p:sp>
-        <p:nvSpPr>
-          <p:cNvPr id="23" name="Shape 21"/>
+          <p:cNvPr id="22" name="Shape 20"/>
           <p:cNvSpPr/>
           <p:nvPr/>
         </p:nvSpPr>
@@ -33709,7 +32524,7 @@
       </p:sp>
       <p:sp>
         <p:nvSpPr>
-          <p:cNvPr id="24" name="Text 22"/>
+          <p:cNvPr id="23" name="Text 21"/>
           <p:cNvSpPr/>
           <p:nvPr/>
         </p:nvSpPr>
@@ -33740,7 +32555,7 @@
                 <a:ea typeface="Trebuchet MS" pitchFamily="34" charset="-122"/>
                 <a:cs typeface="Trebuchet MS" pitchFamily="34" charset="-120"/>
               </a:rPr>
-              <a:t>ence</a:t>
+              <a:t>ory</a:t>
             </a:r>
             <a:endParaRPr lang="en-US" sz="1300" dirty="0"/>
           </a:p>
@@ -33748,7 +32563,7 @@
       </p:sp>
       <p:sp>
         <p:nvSpPr>
-          <p:cNvPr id="25" name="Text 23"/>
+          <p:cNvPr id="24" name="Text 22"/>
           <p:cNvSpPr/>
           <p:nvPr/>
         </p:nvSpPr>
@@ -33779,7 +32594,7 @@
                 <a:ea typeface="Calibri" pitchFamily="34" charset="-122"/>
                 <a:cs typeface="Calibri" pitchFamily="34" charset="-120"/>
               </a:rPr>
-              <a:t>state or quality of</a:t>
+              <a:t>relating to, place for</a:t>
             </a:r>
             <a:endParaRPr lang="en-US" sz="850" dirty="0"/>
           </a:p>
@@ -33787,7 +32602,7 @@
       </p:sp>
       <p:sp>
         <p:nvSpPr>
-          <p:cNvPr id="26" name="Shape 24"/>
+          <p:cNvPr id="25" name="Shape 23"/>
           <p:cNvSpPr/>
           <p:nvPr/>
         </p:nvSpPr>
@@ -33814,7 +32629,7 @@
       </p:sp>
       <p:sp>
         <p:nvSpPr>
-          <p:cNvPr id="27" name="Text 25"/>
+          <p:cNvPr id="26" name="Text 24"/>
           <p:cNvSpPr/>
           <p:nvPr/>
         </p:nvSpPr>
@@ -33853,7 +32668,7 @@
       </p:sp>
       <p:sp>
         <p:nvSpPr>
-          <p:cNvPr id="28" name="Shape 26"/>
+          <p:cNvPr id="27" name="Shape 25"/>
           <p:cNvSpPr/>
           <p:nvPr/>
         </p:nvSpPr>
@@ -33880,14 +32695,14 @@
       </p:sp>
       <p:sp>
         <p:nvSpPr>
-          <p:cNvPr id="29" name="Shape 27"/>
-          <p:cNvSpPr/>
-          <p:nvPr/>
-        </p:nvSpPr>
-        <p:spPr>
-          <a:xfrm>
-            <a:off x="2313432" y="3364992"/>
-            <a:ext cx="1645920" cy="475488"/>
+          <p:cNvPr id="28" name="Shape 26"/>
+          <p:cNvSpPr/>
+          <p:nvPr/>
+        </p:nvSpPr>
+        <p:spPr>
+          <a:xfrm>
+            <a:off x="1975104" y="3364992"/>
+            <a:ext cx="1554480" cy="475488"/>
           </a:xfrm>
           <a:prstGeom prst="rect">
             <a:avLst>
@@ -33907,14 +32722,14 @@
       </p:sp>
       <p:sp>
         <p:nvSpPr>
-          <p:cNvPr id="30" name="Text 28"/>
-          <p:cNvSpPr/>
-          <p:nvPr/>
-        </p:nvSpPr>
-        <p:spPr>
-          <a:xfrm>
-            <a:off x="2313432" y="3364992"/>
-            <a:ext cx="1645920" cy="475488"/>
+          <p:cNvPr id="29" name="Text 27"/>
+          <p:cNvSpPr/>
+          <p:nvPr/>
+        </p:nvSpPr>
+        <p:spPr>
+          <a:xfrm>
+            <a:off x="1975104" y="3364992"/>
+            <a:ext cx="1554480" cy="475488"/>
           </a:xfrm>
           <a:prstGeom prst="rect">
             <a:avLst/>
@@ -33946,14 +32761,14 @@
       </p:sp>
       <p:sp>
         <p:nvSpPr>
-          <p:cNvPr id="31" name="Text 29"/>
-          <p:cNvSpPr/>
-          <p:nvPr/>
-        </p:nvSpPr>
-        <p:spPr>
-          <a:xfrm>
-            <a:off x="3959352" y="3364992"/>
-            <a:ext cx="411480" cy="475488"/>
+          <p:cNvPr id="30" name="Text 28"/>
+          <p:cNvSpPr/>
+          <p:nvPr/>
+        </p:nvSpPr>
+        <p:spPr>
+          <a:xfrm>
+            <a:off x="3529584" y="3364992"/>
+            <a:ext cx="73152" cy="475488"/>
           </a:xfrm>
           <a:prstGeom prst="rect">
             <a:avLst/>
@@ -33985,14 +32800,14 @@
       </p:sp>
       <p:sp>
         <p:nvSpPr>
-          <p:cNvPr id="32" name="Shape 30"/>
-          <p:cNvSpPr/>
-          <p:nvPr/>
-        </p:nvSpPr>
-        <p:spPr>
-          <a:xfrm>
-            <a:off x="4370832" y="3364992"/>
-            <a:ext cx="1645920" cy="475488"/>
+          <p:cNvPr id="31" name="Shape 29"/>
+          <p:cNvSpPr/>
+          <p:nvPr/>
+        </p:nvSpPr>
+        <p:spPr>
+          <a:xfrm>
+            <a:off x="3602736" y="3364992"/>
+            <a:ext cx="1554480" cy="475488"/>
           </a:xfrm>
           <a:prstGeom prst="rect">
             <a:avLst>
@@ -34012,14 +32827,14 @@
       </p:sp>
       <p:sp>
         <p:nvSpPr>
-          <p:cNvPr id="33" name="Text 31"/>
-          <p:cNvSpPr/>
-          <p:nvPr/>
-        </p:nvSpPr>
-        <p:spPr>
-          <a:xfrm>
-            <a:off x="4370832" y="3364992"/>
-            <a:ext cx="1645920" cy="475488"/>
+          <p:cNvPr id="32" name="Text 30"/>
+          <p:cNvSpPr/>
+          <p:nvPr/>
+        </p:nvSpPr>
+        <p:spPr>
+          <a:xfrm>
+            <a:off x="3602736" y="3364992"/>
+            <a:ext cx="1554480" cy="475488"/>
           </a:xfrm>
           <a:prstGeom prst="rect">
             <a:avLst/>
@@ -34051,14 +32866,14 @@
       </p:sp>
       <p:sp>
         <p:nvSpPr>
-          <p:cNvPr id="34" name="Text 32"/>
-          <p:cNvSpPr/>
-          <p:nvPr/>
-        </p:nvSpPr>
-        <p:spPr>
-          <a:xfrm>
-            <a:off x="6016752" y="3364992"/>
-            <a:ext cx="411480" cy="475488"/>
+          <p:cNvPr id="33" name="Text 31"/>
+          <p:cNvSpPr/>
+          <p:nvPr/>
+        </p:nvSpPr>
+        <p:spPr>
+          <a:xfrm>
+            <a:off x="5157216" y="3364992"/>
+            <a:ext cx="73152" cy="475488"/>
           </a:xfrm>
           <a:prstGeom prst="rect">
             <a:avLst/>
@@ -34090,14 +32905,14 @@
       </p:sp>
       <p:sp>
         <p:nvSpPr>
-          <p:cNvPr id="35" name="Shape 33"/>
-          <p:cNvSpPr/>
-          <p:nvPr/>
-        </p:nvSpPr>
-        <p:spPr>
-          <a:xfrm>
-            <a:off x="6428232" y="3364992"/>
-            <a:ext cx="1645920" cy="475488"/>
+          <p:cNvPr id="34" name="Shape 32"/>
+          <p:cNvSpPr/>
+          <p:nvPr/>
+        </p:nvSpPr>
+        <p:spPr>
+          <a:xfrm>
+            <a:off x="5230368" y="3364992"/>
+            <a:ext cx="1554480" cy="475488"/>
           </a:xfrm>
           <a:prstGeom prst="rect">
             <a:avLst>
@@ -34117,14 +32932,14 @@
       </p:sp>
       <p:sp>
         <p:nvSpPr>
-          <p:cNvPr id="36" name="Text 34"/>
-          <p:cNvSpPr/>
-          <p:nvPr/>
-        </p:nvSpPr>
-        <p:spPr>
-          <a:xfrm>
-            <a:off x="6428232" y="3364992"/>
-            <a:ext cx="1645920" cy="475488"/>
+          <p:cNvPr id="35" name="Text 33"/>
+          <p:cNvSpPr/>
+          <p:nvPr/>
+        </p:nvSpPr>
+        <p:spPr>
+          <a:xfrm>
+            <a:off x="5230368" y="3364992"/>
+            <a:ext cx="1554480" cy="475488"/>
           </a:xfrm>
           <a:prstGeom prst="rect">
             <a:avLst/>
@@ -34148,7 +32963,7 @@
                 <a:ea typeface="Trebuchet MS" pitchFamily="34" charset="-122"/>
                 <a:cs typeface="Trebuchet MS" pitchFamily="34" charset="-120"/>
               </a:rPr>
-              <a:t>ence</a:t>
+              <a:t>to</a:t>
             </a:r>
             <a:endParaRPr lang="en-US" sz="1400" dirty="0"/>
           </a:p>
@@ -34156,7 +32971,112 @@
       </p:sp>
       <p:sp>
         <p:nvSpPr>
+          <p:cNvPr id="36" name="Text 34"/>
+          <p:cNvSpPr/>
+          <p:nvPr/>
+        </p:nvSpPr>
+        <p:spPr>
+          <a:xfrm>
+            <a:off x="6784848" y="3364992"/>
+            <a:ext cx="73152" cy="475488"/>
+          </a:xfrm>
+          <a:prstGeom prst="rect">
+            <a:avLst/>
+          </a:prstGeom>
+          <a:noFill/>
+          <a:ln/>
+        </p:spPr>
+        <p:txBody>
+          <a:bodyPr wrap="square" lIns="0" tIns="0" rIns="0" bIns="0" rtlCol="0" anchor="ctr"/>
+          <a:lstStyle/>
+          <a:p>
+            <a:pPr algn="ctr" indent="0" marL="0">
+              <a:buNone/>
+            </a:pPr>
+            <a:r>
+              <a:rPr lang="en-US" sz="1600" b="1" dirty="0">
+                <a:solidFill>
+                  <a:srgbClr val="0D9488"/>
+                </a:solidFill>
+                <a:latin typeface="Trebuchet MS" pitchFamily="34" charset="0"/>
+                <a:ea typeface="Trebuchet MS" pitchFamily="34" charset="-122"/>
+                <a:cs typeface="Trebuchet MS" pitchFamily="34" charset="-120"/>
+              </a:rPr>
+              <a:t>·</a:t>
+            </a:r>
+            <a:endParaRPr lang="en-US" sz="1600" dirty="0"/>
+          </a:p>
+        </p:txBody>
+      </p:sp>
+      <p:sp>
+        <p:nvSpPr>
           <p:cNvPr id="37" name="Shape 35"/>
+          <p:cNvSpPr/>
+          <p:nvPr/>
+        </p:nvSpPr>
+        <p:spPr>
+          <a:xfrm>
+            <a:off x="6858000" y="3364992"/>
+            <a:ext cx="1554480" cy="475488"/>
+          </a:xfrm>
+          <a:prstGeom prst="rect">
+            <a:avLst>
+              <a:gd name="adj" fmla="val 9615"/>
+            </a:avLst>
+          </a:prstGeom>
+          <a:solidFill>
+            <a:srgbClr val="FFFFFF"/>
+          </a:solidFill>
+          <a:ln w="12700">
+            <a:solidFill>
+              <a:srgbClr val="0D9488"/>
+            </a:solidFill>
+            <a:prstDash val="solid"/>
+          </a:ln>
+        </p:spPr>
+      </p:sp>
+      <p:sp>
+        <p:nvSpPr>
+          <p:cNvPr id="38" name="Text 36"/>
+          <p:cNvSpPr/>
+          <p:nvPr/>
+        </p:nvSpPr>
+        <p:spPr>
+          <a:xfrm>
+            <a:off x="6858000" y="3364992"/>
+            <a:ext cx="1554480" cy="475488"/>
+          </a:xfrm>
+          <a:prstGeom prst="rect">
+            <a:avLst/>
+          </a:prstGeom>
+          <a:noFill/>
+          <a:ln/>
+        </p:spPr>
+        <p:txBody>
+          <a:bodyPr wrap="square" lIns="0" tIns="0" rIns="0" bIns="0" rtlCol="0" anchor="ctr"/>
+          <a:lstStyle/>
+          <a:p>
+            <a:pPr algn="ctr" indent="0" marL="0">
+              <a:buNone/>
+            </a:pPr>
+            <a:r>
+              <a:rPr lang="en-US" sz="1400" b="1" dirty="0">
+                <a:solidFill>
+                  <a:srgbClr val="0D9488"/>
+                </a:solidFill>
+                <a:latin typeface="Trebuchet MS" pitchFamily="34" charset="0"/>
+                <a:ea typeface="Trebuchet MS" pitchFamily="34" charset="-122"/>
+                <a:cs typeface="Trebuchet MS" pitchFamily="34" charset="-120"/>
+              </a:rPr>
+              <a:t>ry</a:t>
+            </a:r>
+            <a:endParaRPr lang="en-US" sz="1400" dirty="0"/>
+          </a:p>
+        </p:txBody>
+      </p:sp>
+      <p:sp>
+        <p:nvSpPr>
+          <p:cNvPr id="39" name="Shape 37"/>
           <p:cNvSpPr/>
           <p:nvPr/>
         </p:nvSpPr>
@@ -34183,7 +33103,7 @@
       </p:sp>
       <p:sp>
         <p:nvSpPr>
-          <p:cNvPr id="38" name="Text 36"/>
+          <p:cNvPr id="40" name="Text 38"/>
           <p:cNvSpPr/>
           <p:nvPr/>
         </p:nvSpPr>
@@ -34222,18 +33142,18 @@
       </p:sp>
       <p:sp>
         <p:nvSpPr>
-          <p:cNvPr id="39" name="Shape 37"/>
+          <p:cNvPr id="41" name="Shape 39"/>
           <p:cNvSpPr/>
           <p:nvPr/>
         </p:nvSpPr>
         <p:spPr>
           <a:xfrm>
             <a:off x="1874520" y="4096512"/>
-            <a:ext cx="6903720" cy="804672"/>
+            <a:ext cx="6903720" cy="658368"/>
           </a:xfrm>
           <a:prstGeom prst="rect">
             <a:avLst>
-              <a:gd name="adj" fmla="val 6818"/>
+              <a:gd name="adj" fmla="val 8333"/>
             </a:avLst>
           </a:prstGeom>
           <a:solidFill>
@@ -34249,18 +33169,18 @@
       </p:sp>
       <p:sp>
         <p:nvSpPr>
-          <p:cNvPr id="40" name="Shape 38"/>
-          <p:cNvSpPr/>
-          <p:nvPr/>
-        </p:nvSpPr>
-        <p:spPr>
-          <a:xfrm>
-            <a:off x="2254649" y="4169664"/>
-            <a:ext cx="685800" cy="384048"/>
+          <p:cNvPr id="42" name="Shape 40"/>
+          <p:cNvSpPr/>
+          <p:nvPr/>
+        </p:nvSpPr>
+        <p:spPr>
+          <a:xfrm>
+            <a:off x="2124837" y="4169664"/>
+            <a:ext cx="685800" cy="475488"/>
           </a:xfrm>
           <a:prstGeom prst="rect">
             <a:avLst>
-              <a:gd name="adj" fmla="val 9524"/>
+              <a:gd name="adj" fmla="val 7692"/>
             </a:avLst>
           </a:prstGeom>
           <a:solidFill>
@@ -34276,14 +33196,14 @@
       </p:sp>
       <p:sp>
         <p:nvSpPr>
-          <p:cNvPr id="41" name="Text 39"/>
-          <p:cNvSpPr/>
-          <p:nvPr/>
-        </p:nvSpPr>
-        <p:spPr>
-          <a:xfrm>
-            <a:off x="2254649" y="4169664"/>
-            <a:ext cx="685800" cy="384048"/>
+          <p:cNvPr id="43" name="Text 41"/>
+          <p:cNvSpPr/>
+          <p:nvPr/>
+        </p:nvSpPr>
+        <p:spPr>
+          <a:xfrm>
+            <a:off x="2124837" y="4169664"/>
+            <a:ext cx="685800" cy="475488"/>
           </a:xfrm>
           <a:prstGeom prst="rect">
             <a:avLst/>
@@ -34315,18 +33235,18 @@
       </p:sp>
       <p:sp>
         <p:nvSpPr>
-          <p:cNvPr id="42" name="Shape 40"/>
-          <p:cNvSpPr/>
-          <p:nvPr/>
-        </p:nvSpPr>
-        <p:spPr>
-          <a:xfrm>
-            <a:off x="3293146" y="4169664"/>
-            <a:ext cx="685800" cy="384048"/>
+          <p:cNvPr id="44" name="Shape 42"/>
+          <p:cNvSpPr/>
+          <p:nvPr/>
+        </p:nvSpPr>
+        <p:spPr>
+          <a:xfrm>
+            <a:off x="3033522" y="4169664"/>
+            <a:ext cx="685800" cy="475488"/>
           </a:xfrm>
           <a:prstGeom prst="rect">
             <a:avLst>
-              <a:gd name="adj" fmla="val 9524"/>
+              <a:gd name="adj" fmla="val 7692"/>
             </a:avLst>
           </a:prstGeom>
           <a:solidFill>
@@ -34342,14 +33262,14 @@
       </p:sp>
       <p:sp>
         <p:nvSpPr>
-          <p:cNvPr id="43" name="Text 41"/>
-          <p:cNvSpPr/>
-          <p:nvPr/>
-        </p:nvSpPr>
-        <p:spPr>
-          <a:xfrm>
-            <a:off x="3293146" y="4169664"/>
-            <a:ext cx="685800" cy="384048"/>
+          <p:cNvPr id="45" name="Text 43"/>
+          <p:cNvSpPr/>
+          <p:nvPr/>
+        </p:nvSpPr>
+        <p:spPr>
+          <a:xfrm>
+            <a:off x="3033522" y="4169664"/>
+            <a:ext cx="685800" cy="475488"/>
           </a:xfrm>
           <a:prstGeom prst="rect">
             <a:avLst/>
@@ -34381,18 +33301,18 @@
       </p:sp>
       <p:sp>
         <p:nvSpPr>
-          <p:cNvPr id="44" name="Shape 42"/>
-          <p:cNvSpPr/>
-          <p:nvPr/>
-        </p:nvSpPr>
-        <p:spPr>
-          <a:xfrm>
-            <a:off x="4331643" y="4169664"/>
-            <a:ext cx="685800" cy="384048"/>
+          <p:cNvPr id="46" name="Shape 44"/>
+          <p:cNvSpPr/>
+          <p:nvPr/>
+        </p:nvSpPr>
+        <p:spPr>
+          <a:xfrm>
+            <a:off x="3942207" y="4169664"/>
+            <a:ext cx="685800" cy="475488"/>
           </a:xfrm>
           <a:prstGeom prst="rect">
             <a:avLst>
-              <a:gd name="adj" fmla="val 9524"/>
+              <a:gd name="adj" fmla="val 7692"/>
             </a:avLst>
           </a:prstGeom>
           <a:solidFill>
@@ -34408,14 +33328,14 @@
       </p:sp>
       <p:sp>
         <p:nvSpPr>
-          <p:cNvPr id="45" name="Text 43"/>
-          <p:cNvSpPr/>
-          <p:nvPr/>
-        </p:nvSpPr>
-        <p:spPr>
-          <a:xfrm>
-            <a:off x="4331643" y="4169664"/>
-            <a:ext cx="685800" cy="384048"/>
+          <p:cNvPr id="47" name="Text 45"/>
+          <p:cNvSpPr/>
+          <p:nvPr/>
+        </p:nvSpPr>
+        <p:spPr>
+          <a:xfrm>
+            <a:off x="3942207" y="4169664"/>
+            <a:ext cx="685800" cy="475488"/>
           </a:xfrm>
           <a:prstGeom prst="rect">
             <a:avLst/>
@@ -34447,18 +33367,18 @@
       </p:sp>
       <p:sp>
         <p:nvSpPr>
-          <p:cNvPr id="46" name="Shape 44"/>
-          <p:cNvSpPr/>
-          <p:nvPr/>
-        </p:nvSpPr>
-        <p:spPr>
-          <a:xfrm>
-            <a:off x="5370141" y="4169664"/>
-            <a:ext cx="685800" cy="384048"/>
+          <p:cNvPr id="48" name="Shape 46"/>
+          <p:cNvSpPr/>
+          <p:nvPr/>
+        </p:nvSpPr>
+        <p:spPr>
+          <a:xfrm>
+            <a:off x="4850892" y="4169664"/>
+            <a:ext cx="685800" cy="475488"/>
           </a:xfrm>
           <a:prstGeom prst="rect">
             <a:avLst>
-              <a:gd name="adj" fmla="val 9524"/>
+              <a:gd name="adj" fmla="val 7692"/>
             </a:avLst>
           </a:prstGeom>
           <a:solidFill>
@@ -34474,14 +33394,14 @@
       </p:sp>
       <p:sp>
         <p:nvSpPr>
-          <p:cNvPr id="47" name="Text 45"/>
-          <p:cNvSpPr/>
-          <p:nvPr/>
-        </p:nvSpPr>
-        <p:spPr>
-          <a:xfrm>
-            <a:off x="5370141" y="4169664"/>
-            <a:ext cx="685800" cy="384048"/>
+          <p:cNvPr id="49" name="Text 47"/>
+          <p:cNvSpPr/>
+          <p:nvPr/>
+        </p:nvSpPr>
+        <p:spPr>
+          <a:xfrm>
+            <a:off x="4850892" y="4169664"/>
+            <a:ext cx="685800" cy="475488"/>
           </a:xfrm>
           <a:prstGeom prst="rect">
             <a:avLst/>
@@ -34505,7 +33425,7 @@
                 <a:ea typeface="Trebuchet MS" pitchFamily="34" charset="-122"/>
                 <a:cs typeface="Trebuchet MS" pitchFamily="34" charset="-120"/>
               </a:rPr>
-              <a:t>e</a:t>
+              <a:t>t</a:t>
             </a:r>
             <a:endParaRPr lang="en-US" sz="900" dirty="0"/>
           </a:p>
@@ -34513,18 +33433,18 @@
       </p:sp>
       <p:sp>
         <p:nvSpPr>
-          <p:cNvPr id="48" name="Shape 46"/>
-          <p:cNvSpPr/>
-          <p:nvPr/>
-        </p:nvSpPr>
-        <p:spPr>
-          <a:xfrm>
-            <a:off x="6408638" y="4169664"/>
-            <a:ext cx="685800" cy="384048"/>
+          <p:cNvPr id="50" name="Shape 48"/>
+          <p:cNvSpPr/>
+          <p:nvPr/>
+        </p:nvSpPr>
+        <p:spPr>
+          <a:xfrm>
+            <a:off x="5759577" y="4169664"/>
+            <a:ext cx="685800" cy="475488"/>
           </a:xfrm>
           <a:prstGeom prst="rect">
             <a:avLst>
-              <a:gd name="adj" fmla="val 9524"/>
+              <a:gd name="adj" fmla="val 7692"/>
             </a:avLst>
           </a:prstGeom>
           <a:solidFill>
@@ -34540,14 +33460,14 @@
       </p:sp>
       <p:sp>
         <p:nvSpPr>
-          <p:cNvPr id="49" name="Text 47"/>
-          <p:cNvSpPr/>
-          <p:nvPr/>
-        </p:nvSpPr>
-        <p:spPr>
-          <a:xfrm>
-            <a:off x="6408638" y="4169664"/>
-            <a:ext cx="685800" cy="384048"/>
+          <p:cNvPr id="51" name="Text 49"/>
+          <p:cNvSpPr/>
+          <p:nvPr/>
+        </p:nvSpPr>
+        <p:spPr>
+          <a:xfrm>
+            <a:off x="5759577" y="4169664"/>
+            <a:ext cx="685800" cy="475488"/>
           </a:xfrm>
           <a:prstGeom prst="rect">
             <a:avLst/>
@@ -34571,7 +33491,7 @@
                 <a:ea typeface="Trebuchet MS" pitchFamily="34" charset="-122"/>
                 <a:cs typeface="Trebuchet MS" pitchFamily="34" charset="-120"/>
               </a:rPr>
-              <a:t>n</a:t>
+              <a:t>o</a:t>
             </a:r>
             <a:endParaRPr lang="en-US" sz="900" dirty="0"/>
           </a:p>
@@ -34579,18 +33499,18 @@
       </p:sp>
       <p:sp>
         <p:nvSpPr>
-          <p:cNvPr id="50" name="Shape 48"/>
-          <p:cNvSpPr/>
-          <p:nvPr/>
-        </p:nvSpPr>
-        <p:spPr>
-          <a:xfrm>
-            <a:off x="7447135" y="4169664"/>
-            <a:ext cx="685800" cy="384048"/>
+          <p:cNvPr id="52" name="Shape 50"/>
+          <p:cNvSpPr/>
+          <p:nvPr/>
+        </p:nvSpPr>
+        <p:spPr>
+          <a:xfrm>
+            <a:off x="6668262" y="4169664"/>
+            <a:ext cx="685800" cy="475488"/>
           </a:xfrm>
           <a:prstGeom prst="rect">
             <a:avLst>
-              <a:gd name="adj" fmla="val 9524"/>
+              <a:gd name="adj" fmla="val 7692"/>
             </a:avLst>
           </a:prstGeom>
           <a:solidFill>
@@ -34606,14 +33526,14 @@
       </p:sp>
       <p:sp>
         <p:nvSpPr>
-          <p:cNvPr id="51" name="Text 49"/>
-          <p:cNvSpPr/>
-          <p:nvPr/>
-        </p:nvSpPr>
-        <p:spPr>
-          <a:xfrm>
-            <a:off x="7447135" y="4169664"/>
-            <a:ext cx="685800" cy="384048"/>
+          <p:cNvPr id="53" name="Text 51"/>
+          <p:cNvSpPr/>
+          <p:nvPr/>
+        </p:nvSpPr>
+        <p:spPr>
+          <a:xfrm>
+            <a:off x="6668262" y="4169664"/>
+            <a:ext cx="685800" cy="475488"/>
           </a:xfrm>
           <a:prstGeom prst="rect">
             <a:avLst/>
@@ -34637,7 +33557,7 @@
                 <a:ea typeface="Trebuchet MS" pitchFamily="34" charset="-122"/>
                 <a:cs typeface="Trebuchet MS" pitchFamily="34" charset="-120"/>
               </a:rPr>
-              <a:t>ce</a:t>
+              <a:t>r</a:t>
             </a:r>
             <a:endParaRPr lang="en-US" sz="900" dirty="0"/>
           </a:p>
@@ -34645,40 +33565,67 @@
       </p:sp>
       <p:sp>
         <p:nvSpPr>
-          <p:cNvPr id="52" name="Text 50"/>
-          <p:cNvSpPr/>
-          <p:nvPr/>
-        </p:nvSpPr>
-        <p:spPr>
-          <a:xfrm>
-            <a:off x="7447135" y="4572000"/>
-            <a:ext cx="685800" cy="219456"/>
-          </a:xfrm>
-          <a:prstGeom prst="rect">
-            <a:avLst/>
-          </a:prstGeom>
-          <a:noFill/>
-          <a:ln/>
-        </p:spPr>
-        <p:txBody>
-          <a:bodyPr wrap="square" lIns="0" tIns="0" rIns="0" bIns="0" rtlCol="0" anchor="t"/>
-          <a:lstStyle/>
-          <a:p>
-            <a:pPr algn="ctr" indent="0" marL="0">
-              <a:buNone/>
-            </a:pPr>
-            <a:r>
-              <a:rPr lang="en-US" sz="750" i="1" dirty="0">
-                <a:solidFill>
-                  <a:srgbClr val="94A3B8"/>
-                </a:solidFill>
-                <a:latin typeface="Calibri" pitchFamily="34" charset="0"/>
-                <a:ea typeface="Calibri" pitchFamily="34" charset="-122"/>
-                <a:cs typeface="Calibri" pitchFamily="34" charset="-120"/>
-              </a:rPr>
-              <a:t>/s/</a:t>
-            </a:r>
-            <a:endParaRPr lang="en-US" sz="750" dirty="0"/>
+          <p:cNvPr id="54" name="Shape 52"/>
+          <p:cNvSpPr/>
+          <p:nvPr/>
+        </p:nvSpPr>
+        <p:spPr>
+          <a:xfrm>
+            <a:off x="7576947" y="4169664"/>
+            <a:ext cx="685800" cy="475488"/>
+          </a:xfrm>
+          <a:prstGeom prst="rect">
+            <a:avLst>
+              <a:gd name="adj" fmla="val 7692"/>
+            </a:avLst>
+          </a:prstGeom>
+          <a:solidFill>
+            <a:srgbClr val="FFFFFF"/>
+          </a:solidFill>
+          <a:ln w="12700">
+            <a:solidFill>
+              <a:srgbClr val="DB2777"/>
+            </a:solidFill>
+            <a:prstDash val="solid"/>
+          </a:ln>
+        </p:spPr>
+      </p:sp>
+      <p:sp>
+        <p:nvSpPr>
+          <p:cNvPr id="55" name="Text 53"/>
+          <p:cNvSpPr/>
+          <p:nvPr/>
+        </p:nvSpPr>
+        <p:spPr>
+          <a:xfrm>
+            <a:off x="7576947" y="4169664"/>
+            <a:ext cx="685800" cy="475488"/>
+          </a:xfrm>
+          <a:prstGeom prst="rect">
+            <a:avLst/>
+          </a:prstGeom>
+          <a:noFill/>
+          <a:ln/>
+        </p:spPr>
+        <p:txBody>
+          <a:bodyPr wrap="square" lIns="0" tIns="0" rIns="0" bIns="0" rtlCol="0" anchor="ctr"/>
+          <a:lstStyle/>
+          <a:p>
+            <a:pPr algn="ctr" indent="0" marL="0">
+              <a:buNone/>
+            </a:pPr>
+            <a:r>
+              <a:rPr lang="en-US" sz="900" b="1" dirty="0">
+                <a:solidFill>
+                  <a:srgbClr val="9D174D"/>
+                </a:solidFill>
+                <a:latin typeface="Trebuchet MS" pitchFamily="34" charset="0"/>
+                <a:ea typeface="Trebuchet MS" pitchFamily="34" charset="-122"/>
+                <a:cs typeface="Trebuchet MS" pitchFamily="34" charset="-120"/>
+              </a:rPr>
+              <a:t>y</a:t>
+            </a:r>
+            <a:endParaRPr lang="en-US" sz="900" dirty="0"/>
           </a:p>
         </p:txBody>
       </p:sp>
@@ -36438,7 +35385,7 @@
                 <a:ea typeface="Trebuchet MS" pitchFamily="34" charset="-122"/>
                 <a:cs typeface="Trebuchet MS" pitchFamily="34" charset="-120"/>
               </a:rPr>
-              <a:t>in-</a:t>
+              <a:t>sub-</a:t>
             </a:r>
             <a:endParaRPr lang="en-US" sz="1300" dirty="0"/>
           </a:p>
@@ -36630,7 +35577,7 @@
                 <a:ea typeface="Trebuchet MS" pitchFamily="34" charset="-122"/>
                 <a:cs typeface="Trebuchet MS" pitchFamily="34" charset="-120"/>
               </a:rPr>
-              <a:t>re-</a:t>
+              <a:t>ob-</a:t>
             </a:r>
             <a:endParaRPr lang="en-US" sz="1300" dirty="0"/>
           </a:p>
@@ -36783,7 +35730,7 @@
                 <a:ea typeface="Trebuchet MS" pitchFamily="34" charset="-122"/>
                 <a:cs typeface="Trebuchet MS" pitchFamily="34" charset="-120"/>
               </a:rPr>
-              <a:t>sub-</a:t>
+              <a:t>in-</a:t>
             </a:r>
             <a:endParaRPr lang="en-US" sz="1300" dirty="0"/>
           </a:p>
@@ -36936,7 +35883,7 @@
                 <a:ea typeface="Trebuchet MS" pitchFamily="34" charset="-122"/>
                 <a:cs typeface="Trebuchet MS" pitchFamily="34" charset="-120"/>
               </a:rPr>
-              <a:t>ob-</a:t>
+              <a:t>ex-</a:t>
             </a:r>
             <a:endParaRPr lang="en-US" sz="1300" dirty="0"/>
           </a:p>
@@ -37025,7 +35972,7 @@
                 <a:ea typeface="Trebuchet MS" pitchFamily="34" charset="-122"/>
                 <a:cs typeface="Trebuchet MS" pitchFamily="34" charset="-120"/>
               </a:rPr>
-              <a:t>-itorium</a:t>
+              <a:t>-acity</a:t>
             </a:r>
             <a:endParaRPr lang="en-US" sz="1300" dirty="0"/>
           </a:p>
@@ -37089,7 +36036,7 @@
                 <a:ea typeface="Trebuchet MS" pitchFamily="34" charset="-122"/>
                 <a:cs typeface="Trebuchet MS" pitchFamily="34" charset="-120"/>
               </a:rPr>
-              <a:t>ex-</a:t>
+              <a:t>re-</a:t>
             </a:r>
             <a:endParaRPr lang="en-US" sz="1300" dirty="0"/>
           </a:p>
@@ -37349,7 +36296,7 @@
                 <a:ea typeface="Trebuchet MS" pitchFamily="34" charset="-122"/>
                 <a:cs typeface="Trebuchet MS" pitchFamily="34" charset="-120"/>
               </a:rPr>
-              <a:t>auditory</a:t>
+              <a:t>audible</a:t>
             </a:r>
             <a:endParaRPr lang="en-US" sz="1200" dirty="0"/>
           </a:p>
@@ -37415,7 +36362,7 @@
                 <a:ea typeface="Trebuchet MS" pitchFamily="34" charset="-122"/>
                 <a:cs typeface="Trebuchet MS" pitchFamily="34" charset="-120"/>
               </a:rPr>
-              <a:t>audible</a:t>
+              <a:t>auditorium</a:t>
             </a:r>
             <a:endParaRPr lang="en-US" sz="1200" dirty="0"/>
           </a:p>
@@ -37481,7 +36428,7 @@
                 <a:ea typeface="Trebuchet MS" pitchFamily="34" charset="-122"/>
                 <a:cs typeface="Trebuchet MS" pitchFamily="34" charset="-120"/>
               </a:rPr>
-              <a:t>auditorium</a:t>
+              <a:t>audio</a:t>
             </a:r>
             <a:endParaRPr lang="en-US" sz="1200" dirty="0"/>
           </a:p>
@@ -37547,7 +36494,7 @@
                 <a:ea typeface="Trebuchet MS" pitchFamily="34" charset="-122"/>
                 <a:cs typeface="Trebuchet MS" pitchFamily="34" charset="-120"/>
               </a:rPr>
-              <a:t>audio</a:t>
+              <a:t>audition</a:t>
             </a:r>
             <a:endParaRPr lang="en-US" sz="1200" dirty="0"/>
           </a:p>
@@ -37613,7 +36560,7 @@
                 <a:ea typeface="Trebuchet MS" pitchFamily="34" charset="-122"/>
                 <a:cs typeface="Trebuchet MS" pitchFamily="34" charset="-120"/>
               </a:rPr>
-              <a:t>audit</a:t>
+              <a:t>auditory</a:t>
             </a:r>
             <a:endParaRPr lang="en-US" sz="1200" dirty="0"/>
           </a:p>
@@ -37679,7 +36626,7 @@
                 <a:ea typeface="Trebuchet MS" pitchFamily="34" charset="-122"/>
                 <a:cs typeface="Trebuchet MS" pitchFamily="34" charset="-120"/>
               </a:rPr>
-              <a:t>audition</a:t>
+              <a:t>audit</a:t>
             </a:r>
             <a:endParaRPr lang="en-US" sz="1200" dirty="0"/>
           </a:p>
@@ -37745,7 +36692,7 @@
                 <a:ea typeface="Trebuchet MS" pitchFamily="34" charset="-122"/>
                 <a:cs typeface="Trebuchet MS" pitchFamily="34" charset="-120"/>
               </a:rPr>
-              <a:t>inaudible</a:t>
+              <a:t>audacious</a:t>
             </a:r>
             <a:endParaRPr lang="en-US" sz="1200" dirty="0"/>
           </a:p>
@@ -38933,7 +37880,7 @@
                 <a:ea typeface="Calibri" pitchFamily="34" charset="-122"/>
                 <a:cs typeface="Calibri" pitchFamily="34" charset="-120"/>
               </a:rPr>
-              <a:t>1.  The root 'aud' comes from a Latin word meaning 'to hear'.</a:t>
+              <a:t>1.  An audition involves performing so that someone can hear or see your talent.</a:t>
             </a:r>
             <a:endParaRPr lang="en-US" sz="1300" dirty="0"/>
           </a:p>
@@ -39211,7 +38158,7 @@
                 <a:ea typeface="Calibri" pitchFamily="34" charset="-122"/>
                 <a:cs typeface="Calibri" pitchFamily="34" charset="-120"/>
               </a:rPr>
-              <a:t>3.  An 'audience' is a group of people who listen to or watch a performance.</a:t>
+              <a:t>3.  The root 'aud' comes from a Latin word meaning to hear.</a:t>
             </a:r>
             <a:endParaRPr lang="en-US" sz="1300" dirty="0"/>
           </a:p>
@@ -39350,7 +38297,7 @@
                 <a:ea typeface="Calibri" pitchFamily="34" charset="-122"/>
                 <a:cs typeface="Calibri" pitchFamily="34" charset="-120"/>
               </a:rPr>
-              <a:t>4.  An 'auditorium' is a large hall where people gather to listen to performances.</a:t>
+              <a:t>4.  The root 'aud' comes from a Greek word meaning to speak.</a:t>
             </a:r>
             <a:endParaRPr lang="en-US" sz="1300" dirty="0"/>
           </a:p>
@@ -39373,11 +38320,11 @@
             </a:avLst>
           </a:prstGeom>
           <a:solidFill>
-            <a:srgbClr val="DCFCE7"/>
-          </a:solidFill>
-          <a:ln w="12700">
-            <a:solidFill>
-              <a:srgbClr val="16A34A"/>
+            <a:srgbClr val="FEE2E2"/>
+          </a:solidFill>
+          <a:ln w="12700">
+            <a:solidFill>
+              <a:srgbClr val="DC2626"/>
             </a:solidFill>
             <a:prstDash val="solid"/>
           </a:ln>
@@ -39410,13 +38357,13 @@
             <a:r>
               <a:rPr lang="en-US" sz="1100" b="1" dirty="0">
                 <a:solidFill>
-                  <a:srgbClr val="16A34A"/>
+                  <a:srgbClr val="DC2626"/>
                 </a:solidFill>
                 <a:latin typeface="Trebuchet MS" pitchFamily="34" charset="0"/>
                 <a:ea typeface="Trebuchet MS" pitchFamily="34" charset="-122"/>
                 <a:cs typeface="Trebuchet MS" pitchFamily="34" charset="-120"/>
               </a:rPr>
-              <a:t>TRUE</a:t>
+              <a:t>FALSE</a:t>
             </a:r>
             <a:endParaRPr lang="en-US" sz="1100" dirty="0"/>
           </a:p>
@@ -39489,7 +38436,7 @@
                 <a:ea typeface="Calibri" pitchFamily="34" charset="-122"/>
                 <a:cs typeface="Calibri" pitchFamily="34" charset="-120"/>
               </a:rPr>
-              <a:t>5.  The root 'aud' is found in the word 'audio' but has nothing to do with sound.</a:t>
+              <a:t>5.  An auditorium is a place where people go to listen and watch performances.</a:t>
             </a:r>
             <a:endParaRPr lang="en-US" sz="1300" dirty="0"/>
           </a:p>
@@ -39512,11 +38459,11 @@
             </a:avLst>
           </a:prstGeom>
           <a:solidFill>
-            <a:srgbClr val="FEE2E2"/>
-          </a:solidFill>
-          <a:ln w="12700">
-            <a:solidFill>
-              <a:srgbClr val="DC2626"/>
+            <a:srgbClr val="DCFCE7"/>
+          </a:solidFill>
+          <a:ln w="12700">
+            <a:solidFill>
+              <a:srgbClr val="16A34A"/>
             </a:solidFill>
             <a:prstDash val="solid"/>
           </a:ln>
@@ -39549,13 +38496,13 @@
             <a:r>
               <a:rPr lang="en-US" sz="1100" b="1" dirty="0">
                 <a:solidFill>
-                  <a:srgbClr val="DC2626"/>
+                  <a:srgbClr val="16A34A"/>
                 </a:solidFill>
                 <a:latin typeface="Trebuchet MS" pitchFamily="34" charset="0"/>
                 <a:ea typeface="Trebuchet MS" pitchFamily="34" charset="-122"/>
                 <a:cs typeface="Trebuchet MS" pitchFamily="34" charset="-120"/>
               </a:rPr>
-              <a:t>FALSE</a:t>
+              <a:t>TRUE</a:t>
             </a:r>
             <a:endParaRPr lang="en-US" sz="1100" dirty="0"/>
           </a:p>
@@ -40194,7 +39141,7 @@
                 <a:ea typeface="Trebuchet MS" pitchFamily="34" charset="-122"/>
                 <a:cs typeface="Trebuchet MS" pitchFamily="34" charset="-120"/>
               </a:rPr>
-              <a:t>auditory</a:t>
+              <a:t>audible</a:t>
             </a:r>
             <a:endParaRPr lang="en-US" sz="1300" dirty="0"/>
           </a:p>
@@ -40260,7 +39207,7 @@
                 <a:ea typeface="Trebuchet MS" pitchFamily="34" charset="-122"/>
                 <a:cs typeface="Trebuchet MS" pitchFamily="34" charset="-120"/>
               </a:rPr>
-              <a:t>audible</a:t>
+              <a:t>auditorium</a:t>
             </a:r>
             <a:endParaRPr lang="en-US" sz="1300" dirty="0"/>
           </a:p>
@@ -40326,7 +39273,7 @@
                 <a:ea typeface="Trebuchet MS" pitchFamily="34" charset="-122"/>
                 <a:cs typeface="Trebuchet MS" pitchFamily="34" charset="-120"/>
               </a:rPr>
-              <a:t>auditorium</a:t>
+              <a:t>audio</a:t>
             </a:r>
             <a:endParaRPr lang="en-US" sz="1300" dirty="0"/>
           </a:p>
@@ -40392,7 +39339,7 @@
                 <a:ea typeface="Trebuchet MS" pitchFamily="34" charset="-122"/>
                 <a:cs typeface="Trebuchet MS" pitchFamily="34" charset="-120"/>
               </a:rPr>
-              <a:t>audio</a:t>
+              <a:t>audition</a:t>
             </a:r>
             <a:endParaRPr lang="en-US" sz="1300" dirty="0"/>
           </a:p>
@@ -40458,7 +39405,7 @@
                 <a:ea typeface="Trebuchet MS" pitchFamily="34" charset="-122"/>
                 <a:cs typeface="Trebuchet MS" pitchFamily="34" charset="-120"/>
               </a:rPr>
-              <a:t>audit</a:t>
+              <a:t>auditory</a:t>
             </a:r>
             <a:endParaRPr lang="en-US" sz="1300" dirty="0"/>
           </a:p>
@@ -40524,7 +39471,7 @@
                 <a:ea typeface="Trebuchet MS" pitchFamily="34" charset="-122"/>
                 <a:cs typeface="Trebuchet MS" pitchFamily="34" charset="-120"/>
               </a:rPr>
-              <a:t>audition</a:t>
+              <a:t>audit</a:t>
             </a:r>
             <a:endParaRPr lang="en-US" sz="1300" dirty="0"/>
           </a:p>
@@ -41117,7 +40064,7 @@
                 <a:ea typeface="Trebuchet MS" pitchFamily="34" charset="-122"/>
                 <a:cs typeface="Trebuchet MS" pitchFamily="34" charset="-120"/>
               </a:rPr>
-              <a:t>in-</a:t>
+              <a:t>sub-</a:t>
             </a:r>
             <a:endParaRPr lang="en-US" sz="1300" dirty="0"/>
           </a:p>
@@ -41309,7 +40256,7 @@
                 <a:ea typeface="Trebuchet MS" pitchFamily="34" charset="-122"/>
                 <a:cs typeface="Trebuchet MS" pitchFamily="34" charset="-120"/>
               </a:rPr>
-              <a:t>re-</a:t>
+              <a:t>ob-</a:t>
             </a:r>
             <a:endParaRPr lang="en-US" sz="1300" dirty="0"/>
           </a:p>
@@ -41462,7 +40409,7 @@
                 <a:ea typeface="Trebuchet MS" pitchFamily="34" charset="-122"/>
                 <a:cs typeface="Trebuchet MS" pitchFamily="34" charset="-120"/>
               </a:rPr>
-              <a:t>sub-</a:t>
+              <a:t>in-</a:t>
             </a:r>
             <a:endParaRPr lang="en-US" sz="1300" dirty="0"/>
           </a:p>
@@ -41615,7 +40562,7 @@
                 <a:ea typeface="Trebuchet MS" pitchFamily="34" charset="-122"/>
                 <a:cs typeface="Trebuchet MS" pitchFamily="34" charset="-120"/>
               </a:rPr>
-              <a:t>ob-</a:t>
+              <a:t>ex-</a:t>
             </a:r>
             <a:endParaRPr lang="en-US" sz="1300" dirty="0"/>
           </a:p>
@@ -41704,7 +40651,7 @@
                 <a:ea typeface="Trebuchet MS" pitchFamily="34" charset="-122"/>
                 <a:cs typeface="Trebuchet MS" pitchFamily="34" charset="-120"/>
               </a:rPr>
-              <a:t>-itorium</a:t>
+              <a:t>-acity</a:t>
             </a:r>
             <a:endParaRPr lang="en-US" sz="1300" dirty="0"/>
           </a:p>
@@ -41768,7 +40715,7 @@
                 <a:ea typeface="Trebuchet MS" pitchFamily="34" charset="-122"/>
                 <a:cs typeface="Trebuchet MS" pitchFamily="34" charset="-120"/>
               </a:rPr>
-              <a:t>ex-</a:t>
+              <a:t>re-</a:t>
             </a:r>
             <a:endParaRPr lang="en-US" sz="1300" dirty="0"/>
           </a:p>
@@ -41911,7 +40858,7 @@
         <p:spPr>
           <a:xfrm>
             <a:off x="1508760" y="4178808"/>
-            <a:ext cx="822960" cy="420624"/>
+            <a:ext cx="950976" cy="420624"/>
           </a:xfrm>
           <a:prstGeom prst="rect">
             <a:avLst>
@@ -41945,7 +40892,7 @@
         <p:spPr>
           <a:xfrm>
             <a:off x="1508760" y="4178808"/>
-            <a:ext cx="822960" cy="420624"/>
+            <a:ext cx="950976" cy="420624"/>
           </a:xfrm>
           <a:prstGeom prst="rect">
             <a:avLst/>
@@ -41969,7 +40916,7 @@
                 <a:ea typeface="Trebuchet MS" pitchFamily="34" charset="-122"/>
                 <a:cs typeface="Trebuchet MS" pitchFamily="34" charset="-120"/>
               </a:rPr>
-              <a:t>in-</a:t>
+              <a:t>sub-</a:t>
             </a:r>
             <a:endParaRPr lang="en-US" sz="1300" dirty="0"/>
           </a:p>
@@ -41983,7 +40930,7 @@
         </p:nvSpPr>
         <p:spPr>
           <a:xfrm>
-            <a:off x="2359152" y="4178808"/>
+            <a:off x="2487168" y="4178808"/>
             <a:ext cx="320040" cy="420624"/>
           </a:xfrm>
           <a:prstGeom prst="rect">
@@ -42022,7 +40969,7 @@
         </p:nvSpPr>
         <p:spPr>
           <a:xfrm>
-            <a:off x="2706624" y="4178808"/>
+            <a:off x="2834640" y="4178808"/>
             <a:ext cx="1097280" cy="420624"/>
           </a:xfrm>
           <a:prstGeom prst="rect">
@@ -42056,7 +41003,7 @@
         </p:nvSpPr>
         <p:spPr>
           <a:xfrm>
-            <a:off x="2706624" y="4178808"/>
+            <a:off x="2834640" y="4178808"/>
             <a:ext cx="1097280" cy="420624"/>
           </a:xfrm>
           <a:prstGeom prst="rect">
@@ -42095,7 +41042,7 @@
         </p:nvSpPr>
         <p:spPr>
           <a:xfrm>
-            <a:off x="3831336" y="4178808"/>
+            <a:off x="3959352" y="4178808"/>
             <a:ext cx="320040" cy="420624"/>
           </a:xfrm>
           <a:prstGeom prst="rect">
@@ -42134,7 +41081,7 @@
         </p:nvSpPr>
         <p:spPr>
           <a:xfrm>
-            <a:off x="4178808" y="4178808"/>
+            <a:off x="4306824" y="4178808"/>
             <a:ext cx="1243584" cy="420624"/>
           </a:xfrm>
           <a:prstGeom prst="rect">
@@ -42168,7 +41115,7 @@
         </p:nvSpPr>
         <p:spPr>
           <a:xfrm>
-            <a:off x="4178808" y="4178808"/>
+            <a:off x="4306824" y="4178808"/>
             <a:ext cx="1243584" cy="420624"/>
           </a:xfrm>
           <a:prstGeom prst="rect">
@@ -42207,7 +41154,7 @@
         </p:nvSpPr>
         <p:spPr>
           <a:xfrm>
-            <a:off x="5495544" y="4178808"/>
+            <a:off x="5623560" y="4178808"/>
             <a:ext cx="365760" cy="420624"/>
           </a:xfrm>
           <a:prstGeom prst="rect">
@@ -42246,7 +41193,7 @@
         </p:nvSpPr>
         <p:spPr>
           <a:xfrm>
-            <a:off x="5907024" y="4178808"/>
+            <a:off x="6035040" y="4178808"/>
             <a:ext cx="2194560" cy="420624"/>
           </a:xfrm>
           <a:prstGeom prst="rect">
@@ -42273,7 +41220,7 @@
         </p:nvSpPr>
         <p:spPr>
           <a:xfrm>
-            <a:off x="5907024" y="4178808"/>
+            <a:off x="6035040" y="4178808"/>
             <a:ext cx="2194560" cy="420624"/>
           </a:xfrm>
           <a:prstGeom prst="rect">
@@ -42768,7 +41715,7 @@
                 <a:ea typeface="Calibri" pitchFamily="34" charset="-122"/>
                 <a:cs typeface="Calibri" pitchFamily="34" charset="-120"/>
               </a:rPr>
-              <a:t>Sound that is recorded or broadcast, such as music or speech.</a:t>
+              <a:t>A short performance where someone shows their talent to try to get a part in a show or team.</a:t>
             </a:r>
             <a:endParaRPr lang="en-US" sz="1200" dirty="0"/>
           </a:p>
@@ -42841,7 +41788,7 @@
                 <a:ea typeface="Trebuchet MS" pitchFamily="34" charset="-122"/>
                 <a:cs typeface="Trebuchet MS" pitchFamily="34" charset="-120"/>
               </a:rPr>
-              <a:t>auditory</a:t>
+              <a:t>audible</a:t>
             </a:r>
             <a:endParaRPr lang="en-US" sz="1200" dirty="0"/>
           </a:p>
@@ -42907,7 +41854,7 @@
                 <a:ea typeface="Calibri" pitchFamily="34" charset="-122"/>
                 <a:cs typeface="Calibri" pitchFamily="34" charset="-120"/>
               </a:rPr>
-              <a:t>A large room or hall where people sit to watch performances or listen to speakers.</a:t>
+              <a:t>Sound that can be recorded or played back, like music or a podcast.</a:t>
             </a:r>
             <a:endParaRPr lang="en-US" sz="1200" dirty="0"/>
           </a:p>
@@ -42980,7 +41927,7 @@
                 <a:ea typeface="Trebuchet MS" pitchFamily="34" charset="-122"/>
                 <a:cs typeface="Trebuchet MS" pitchFamily="34" charset="-120"/>
               </a:rPr>
-              <a:t>audible</a:t>
+              <a:t>auditorium</a:t>
             </a:r>
             <a:endParaRPr lang="en-US" sz="1200" dirty="0"/>
           </a:p>
@@ -43046,7 +41993,7 @@
                 <a:ea typeface="Calibri" pitchFamily="34" charset="-122"/>
                 <a:cs typeface="Calibri" pitchFamily="34" charset="-120"/>
               </a:rPr>
-              <a:t>A careful check or examination of something, like accounts or records.</a:t>
+              <a:t>To do with the sense of hearing or the parts of the body used for hearing.</a:t>
             </a:r>
             <a:endParaRPr lang="en-US" sz="1200" dirty="0"/>
           </a:p>
@@ -43119,7 +42066,7 @@
                 <a:ea typeface="Trebuchet MS" pitchFamily="34" charset="-122"/>
                 <a:cs typeface="Trebuchet MS" pitchFamily="34" charset="-120"/>
               </a:rPr>
-              <a:t>auditorium</a:t>
+              <a:t>audio</a:t>
             </a:r>
             <a:endParaRPr lang="en-US" sz="1200" dirty="0"/>
           </a:p>
@@ -43185,7 +42132,7 @@
                 <a:ea typeface="Calibri" pitchFamily="34" charset="-122"/>
                 <a:cs typeface="Calibri" pitchFamily="34" charset="-120"/>
               </a:rPr>
-              <a:t>Loud enough to be heard clearly.</a:t>
+              <a:t>A large room or hall where people sit to watch performances or listen to speakers.</a:t>
             </a:r>
             <a:endParaRPr lang="en-US" sz="1200" dirty="0"/>
           </a:p>
@@ -43258,7 +42205,7 @@
                 <a:ea typeface="Trebuchet MS" pitchFamily="34" charset="-122"/>
                 <a:cs typeface="Trebuchet MS" pitchFamily="34" charset="-120"/>
               </a:rPr>
-              <a:t>audio</a:t>
+              <a:t>audition</a:t>
             </a:r>
             <a:endParaRPr lang="en-US" sz="1200" dirty="0"/>
           </a:p>
@@ -43324,7 +42271,7 @@
                 <a:ea typeface="Calibri" pitchFamily="34" charset="-122"/>
                 <a:cs typeface="Calibri" pitchFamily="34" charset="-120"/>
               </a:rPr>
-              <a:t>A short performance someone gives to show their talent and try to get a part in a show.</a:t>
+              <a:t>A careful check of records or accounts to make sure everything is correct.</a:t>
             </a:r>
             <a:endParaRPr lang="en-US" sz="1200" dirty="0"/>
           </a:p>
@@ -43397,7 +42344,7 @@
                 <a:ea typeface="Trebuchet MS" pitchFamily="34" charset="-122"/>
                 <a:cs typeface="Trebuchet MS" pitchFamily="34" charset="-120"/>
               </a:rPr>
-              <a:t>audit</a:t>
+              <a:t>auditory</a:t>
             </a:r>
             <a:endParaRPr lang="en-US" sz="1200" dirty="0"/>
           </a:p>
@@ -43536,7 +42483,7 @@
                 <a:ea typeface="Trebuchet MS" pitchFamily="34" charset="-122"/>
                 <a:cs typeface="Trebuchet MS" pitchFamily="34" charset="-120"/>
               </a:rPr>
-              <a:t>audition</a:t>
+              <a:t>audit</a:t>
             </a:r>
             <a:endParaRPr lang="en-US" sz="1200" dirty="0"/>
           </a:p>
@@ -43602,7 +42549,7 @@
                 <a:ea typeface="Calibri" pitchFamily="34" charset="-122"/>
                 <a:cs typeface="Calibri" pitchFamily="34" charset="-120"/>
               </a:rPr>
-              <a:t>Relating to the sense of hearing or the ears.</a:t>
+              <a:t>Something that is loud enough to be heard.</a:t>
             </a:r>
             <a:endParaRPr lang="en-US" sz="1200" dirty="0"/>
           </a:p>
@@ -44261,7 +43208,7 @@
                 <a:ea typeface="Calibri" pitchFamily="34" charset="-122"/>
                 <a:cs typeface="Calibri" pitchFamily="34" charset="-120"/>
               </a:rPr>
-              <a:t>The teacher asked the students to speak up because their voices were barely audible from the back of the room.</a:t>
+              <a:t>She spoke in a clear, audible voice so everyone in the room could hear her.</a:t>
             </a:r>
             <a:endParaRPr lang="en-US" sz="1500" dirty="0"/>
           </a:p>
@@ -44425,7 +43372,7 @@
                 <a:ea typeface="Calibri" pitchFamily="34" charset="-122"/>
                 <a:cs typeface="Calibri" pitchFamily="34" charset="-120"/>
               </a:rPr>
-              <a:t>We watched the audition and were amazed by how well everyone performed.</a:t>
+              <a:t>All the students gathered in the auditorium to watch the visiting dance troupe perform.</a:t>
             </a:r>
             <a:endParaRPr lang="en-US" sz="1500" dirty="0"/>
           </a:p>
